--- a/output/presentation/techflow-community-auto-publish-kb.pptx
+++ b/output/presentation/techflow-community-auto-publish-kb.pptx
@@ -2,17 +2,17 @@
 <file path=ppt/presentation.xml><?xml version="1.0" encoding="utf-8"?>
 <p:presentation xmlns:p="http://schemas.openxmlformats.org/presentationml/2006/main">
   <p:sldMasterIdLst>
-    <p:sldMasterId xmlns:r="http://schemas.openxmlformats.org/officeDocument/2006/relationships" id="2147483648" r:id="R2e9eb424901943d8"/>
+    <p:sldMasterId xmlns:r="http://schemas.openxmlformats.org/officeDocument/2006/relationships" id="2147483648" r:id="Rd29d38257cfa40a9"/>
   </p:sldMasterIdLst>
   <p:notesMasterIdLst>
-    <p:notesMasterId xmlns:r="http://schemas.openxmlformats.org/officeDocument/2006/relationships" r:id="R9d08db37ad8340ac"/>
+    <p:notesMasterId xmlns:r="http://schemas.openxmlformats.org/officeDocument/2006/relationships" r:id="Rd8c2d595e9b24256"/>
   </p:notesMasterIdLst>
   <p:sldIdLst>
-    <p:sldId xmlns:r="http://schemas.openxmlformats.org/officeDocument/2006/relationships" id="256" r:id="R9adafd37c1874bc6"/>
-    <p:sldId xmlns:r="http://schemas.openxmlformats.org/officeDocument/2006/relationships" id="257" r:id="R246251d0b07f4b0c"/>
-    <p:sldId xmlns:r="http://schemas.openxmlformats.org/officeDocument/2006/relationships" id="258" r:id="Ree923ec289bc4562"/>
-    <p:sldId xmlns:r="http://schemas.openxmlformats.org/officeDocument/2006/relationships" id="259" r:id="R2e2aff3b7c824b07"/>
-    <p:sldId xmlns:r="http://schemas.openxmlformats.org/officeDocument/2006/relationships" id="260" r:id="R6ef3ab2927564715"/>
+    <p:sldId xmlns:r="http://schemas.openxmlformats.org/officeDocument/2006/relationships" id="256" r:id="R1d211c7a006b4ae2"/>
+    <p:sldId xmlns:r="http://schemas.openxmlformats.org/officeDocument/2006/relationships" id="257" r:id="R6372933210eb4d93"/>
+    <p:sldId xmlns:r="http://schemas.openxmlformats.org/officeDocument/2006/relationships" id="258" r:id="R6e1aebdfada740ec"/>
+    <p:sldId xmlns:r="http://schemas.openxmlformats.org/officeDocument/2006/relationships" id="259" r:id="Rb737f9e709b84c1e"/>
+    <p:sldId xmlns:r="http://schemas.openxmlformats.org/officeDocument/2006/relationships" id="260" r:id="Rd55c7c0faa254367"/>
   </p:sldIdLst>
   <p:sldSz cx="12192000" cy="6858000"/>
   <p:notesSz cx="6858000" cy="9144000"/>
@@ -839,7 +839,7 @@
   </p:cSld>
   <p:clrMap bg1="lt1" tx1="dk1" bg2="lt2" tx2="dk2" accent1="accent1" accent2="accent2" accent3="accent3" accent4="accent4" accent5="accent5" accent6="accent6" hlink="hlink" folHlink="folHlink"/>
   <p:sldLayoutIdLst>
-    <p:sldLayoutId xmlns:r="http://schemas.openxmlformats.org/officeDocument/2006/relationships" id="2147483649" r:id="Rbb1bd9045d7449e0"/>
+    <p:sldLayoutId xmlns:r="http://schemas.openxmlformats.org/officeDocument/2006/relationships" id="2147483649" r:id="Rb24cbbe3218148b4"/>
   </p:sldLayoutIdLst>
   <p:txStyles>
     <p:titleStyle>
@@ -1695,7 +1695,7 @@
                 <a:ea typeface="Malgun Gothic"/>
                 <a:cs typeface="Malgun Gothic"/>
               </a:rPr>
-              <a:t>AI Gateway 0.14.0</a:t>
+              <a:t>AI Gateway 0.14.1</a:t>
             </a:r>
           </a:p>
         </p:txBody>
@@ -2107,7 +2107,7 @@
       </p:sp>
       <p:cxnSp>
         <p:nvCxnSpPr>
-          <p:cNvPr id="24" name="arrow-418-340"/>
+          <p:cNvPr id="48" name="arrow-418-340"/>
           <p:cNvCxnSpPr/>
           <p:nvPr/>
         </p:nvCxnSpPr>
@@ -2279,7 +2279,7 @@
       </p:sp>
       <p:cxnSp>
         <p:nvCxnSpPr>
-          <p:cNvPr id="28" name="arrow-892-340"/>
+          <p:cNvPr id="52" name="arrow-892-340"/>
           <p:cNvCxnSpPr/>
           <p:nvPr/>
         </p:nvCxnSpPr>
@@ -2705,7 +2705,7 @@
       </p:sp>
       <p:cxnSp>
         <p:nvCxnSpPr>
-          <p:cNvPr id="30" name="arrow-272-320"/>
+          <p:cNvPr id="60" name="arrow-272-320"/>
           <p:cNvCxnSpPr/>
           <p:nvPr/>
         </p:nvCxnSpPr>
@@ -2932,7 +2932,7 @@
       </p:sp>
       <p:cxnSp>
         <p:nvCxnSpPr>
-          <p:cNvPr id="35" name="arrow-540-320"/>
+          <p:cNvPr id="65" name="arrow-540-320"/>
           <p:cNvCxnSpPr/>
           <p:nvPr/>
         </p:nvCxnSpPr>
@@ -3159,7 +3159,7 @@
       </p:sp>
       <p:cxnSp>
         <p:nvCxnSpPr>
-          <p:cNvPr id="40" name="arrow-808-320"/>
+          <p:cNvPr id="70" name="arrow-808-320"/>
           <p:cNvCxnSpPr/>
           <p:nvPr/>
         </p:nvCxnSpPr>
@@ -5166,7 +5166,18 @@
                 <a:ea typeface="Malgun Gothic"/>
                 <a:cs typeface="Malgun Gothic"/>
               </a:rPr>
-              <a:t>AI Gateway 0.14.0 · Migration 0012 · OpenAI</a:t>
+              <a:t>AI Gateway 0.14.1</a:t>
+            </a:r>
+            <a:r>
+              <a:rPr sz="1800" b="1">
+                <a:solidFill>
+                  <a:srgbClr val="FFFFFF"/>
+                </a:solidFill>
+                <a:latin typeface="Malgun Gothic"/>
+                <a:ea typeface="Malgun Gothic"/>
+                <a:cs typeface="Malgun Gothic"/>
+              </a:rPr>
+              <a:t> · Migration 0012 · OpenAI</a:t>
             </a:r>
           </a:p>
         </p:txBody>

--- a/output/presentation/techflow-community-auto-publish-kb.pptx
+++ b/output/presentation/techflow-community-auto-publish-kb.pptx
@@ -2,17 +2,17 @@
 <file path=ppt/presentation.xml><?xml version="1.0" encoding="utf-8"?>
 <p:presentation xmlns:p="http://schemas.openxmlformats.org/presentationml/2006/main">
   <p:sldMasterIdLst>
-    <p:sldMasterId xmlns:r="http://schemas.openxmlformats.org/officeDocument/2006/relationships" id="2147483648" r:id="Rd29d38257cfa40a9"/>
+    <p:sldMasterId xmlns:r="http://schemas.openxmlformats.org/officeDocument/2006/relationships" id="2147483648" r:id="Re469907e60d7407e"/>
   </p:sldMasterIdLst>
   <p:notesMasterIdLst>
-    <p:notesMasterId xmlns:r="http://schemas.openxmlformats.org/officeDocument/2006/relationships" r:id="Rd8c2d595e9b24256"/>
+    <p:notesMasterId xmlns:r="http://schemas.openxmlformats.org/officeDocument/2006/relationships" r:id="R10f4b5e8246041f6"/>
   </p:notesMasterIdLst>
   <p:sldIdLst>
-    <p:sldId xmlns:r="http://schemas.openxmlformats.org/officeDocument/2006/relationships" id="256" r:id="R1d211c7a006b4ae2"/>
-    <p:sldId xmlns:r="http://schemas.openxmlformats.org/officeDocument/2006/relationships" id="257" r:id="R6372933210eb4d93"/>
-    <p:sldId xmlns:r="http://schemas.openxmlformats.org/officeDocument/2006/relationships" id="258" r:id="R6e1aebdfada740ec"/>
-    <p:sldId xmlns:r="http://schemas.openxmlformats.org/officeDocument/2006/relationships" id="259" r:id="Rb737f9e709b84c1e"/>
-    <p:sldId xmlns:r="http://schemas.openxmlformats.org/officeDocument/2006/relationships" id="260" r:id="Rd55c7c0faa254367"/>
+    <p:sldId xmlns:r="http://schemas.openxmlformats.org/officeDocument/2006/relationships" id="256" r:id="R9f929578f03f4b21"/>
+    <p:sldId xmlns:r="http://schemas.openxmlformats.org/officeDocument/2006/relationships" id="257" r:id="R4549e3ff5aa441ad"/>
+    <p:sldId xmlns:r="http://schemas.openxmlformats.org/officeDocument/2006/relationships" id="258" r:id="Rb42067f3e288438a"/>
+    <p:sldId xmlns:r="http://schemas.openxmlformats.org/officeDocument/2006/relationships" id="259" r:id="Rae9b41999baa4e04"/>
+    <p:sldId xmlns:r="http://schemas.openxmlformats.org/officeDocument/2006/relationships" id="260" r:id="Rf1035700d6bc4466"/>
   </p:sldIdLst>
   <p:sldSz cx="12192000" cy="6858000"/>
   <p:notesSz cx="6858000" cy="9144000"/>
@@ -839,7 +839,7 @@
   </p:cSld>
   <p:clrMap bg1="lt1" tx1="dk1" bg2="lt2" tx2="dk2" accent1="accent1" accent2="accent2" accent3="accent3" accent4="accent4" accent5="accent5" accent6="accent6" hlink="hlink" folHlink="folHlink"/>
   <p:sldLayoutIdLst>
-    <p:sldLayoutId xmlns:r="http://schemas.openxmlformats.org/officeDocument/2006/relationships" id="2147483649" r:id="Rb24cbbe3218148b4"/>
+    <p:sldLayoutId xmlns:r="http://schemas.openxmlformats.org/officeDocument/2006/relationships" id="2147483649" r:id="Rc97a8d0a265e40af"/>
   </p:sldLayoutIdLst>
   <p:txStyles>
     <p:titleStyle>
@@ -1550,7 +1550,7 @@
                 <a:cs typeface="Malgun Gothic"/>
               </a:rPr>
               <a:t>Community 자동 답변과
-해결 기반 Knowledge Base</a:t>
+최종 솔루션 Knowledge Base</a:t>
             </a:r>
           </a:p>
         </p:txBody>
@@ -1607,7 +1607,7 @@
                 <a:ea typeface="Malgun Gothic"/>
                 <a:cs typeface="Malgun Gothic"/>
               </a:rPr>
-              <a:t>승인 대기 제거 · 쉬운 대화 · 해결 후 최종 문서</a:t>
+              <a:t>승인 대기 제거 · 쉬운 대화 · KB 최종 솔루션</a:t>
             </a:r>
           </a:p>
         </p:txBody>
@@ -1695,7 +1695,7 @@
                 <a:ea typeface="Malgun Gothic"/>
                 <a:cs typeface="Malgun Gothic"/>
               </a:rPr>
-              <a:t>AI Gateway 0.14.1</a:t>
+              <a:t>AI Gateway 0.14.2</a:t>
             </a:r>
           </a:p>
         </p:txBody>
@@ -1835,7 +1835,7 @@
         </p:spPr>
         <p:txBody>
           <a:bodyPr xmlns:a="http://schemas.openxmlformats.org/drawingml/2006/main" lIns="76200" tIns="38100" rIns="76200" bIns="38100" anchor="ctr">
-            <a:normAutofit fontScale="95590"/>
+            <a:normAutofit fontScale="100000"/>
           </a:bodyPr>
           <a:lstStyle xmlns:a="http://schemas.openxmlformats.org/drawingml/2006/main"/>
           <a:p xmlns:a="http://schemas.openxmlformats.org/drawingml/2006/main">
@@ -1862,7 +1862,7 @@
                 <a:ea typeface="Malgun Gothic"/>
                 <a:cs typeface="Malgun Gothic"/>
               </a:rPr>
-              <a:t>매 답변을 문서처럼 승인하던 방식을 대화와 최종 문서로 분리했습니다</a:t>
+              <a:t>진행 답변과 최종 지식 문서를 분리했습니다</a:t>
             </a:r>
           </a:p>
         </p:txBody>
@@ -2107,7 +2107,7 @@
       </p:sp>
       <p:cxnSp>
         <p:nvCxnSpPr>
-          <p:cNvPr id="48" name="arrow-418-340"/>
+          <p:cNvPr id="72" name="arrow-418-340"/>
           <p:cNvCxnSpPr/>
           <p:nvPr/>
         </p:nvCxnSpPr>
@@ -2279,7 +2279,7 @@
       </p:sp>
       <p:cxnSp>
         <p:nvCxnSpPr>
-          <p:cNvPr id="52" name="arrow-892-340"/>
+          <p:cNvPr id="76" name="arrow-892-340"/>
           <p:cNvCxnSpPr/>
           <p:nvPr/>
         </p:nvCxnSpPr>
@@ -2414,7 +2414,7 @@
         </p:spPr>
         <p:txBody>
           <a:bodyPr xmlns:a="http://schemas.openxmlformats.org/drawingml/2006/main" lIns="76200" tIns="38100" rIns="76200" bIns="38100" anchor="ctr">
-            <a:normAutofit fontScale="100000"/>
+            <a:normAutofit fontScale="99984"/>
           </a:bodyPr>
           <a:lstStyle xmlns:a="http://schemas.openxmlformats.org/drawingml/2006/main"/>
           <a:p xmlns:a="http://schemas.openxmlformats.org/drawingml/2006/main">
@@ -2443,7 +2443,7 @@
               </a:rPr>
               <a:t>선택 답변 중심
 Knowledge Base
-한 번만 게시</a:t>
+최종 솔루션 지정</a:t>
             </a:r>
           </a:p>
         </p:txBody>
@@ -2500,7 +2500,7 @@
                 <a:ea typeface="Malgun Gothic"/>
                 <a:cs typeface="Malgun Gothic"/>
               </a:rPr>
-              <a:t>Chat은 승인 대신 게시·실패·KB 생성 상태를 관찰합니다</a:t>
+              <a:t>Chat은 게시·실패·KB 최종 지정 상태를 관찰합니다</a:t>
             </a:r>
           </a:p>
         </p:txBody>
@@ -2610,7 +2610,7 @@
                 <a:ea typeface="Malgun Gothic"/>
                 <a:cs typeface="Malgun Gothic"/>
               </a:rPr>
-              <a:t>질문부터 해결 문서까지 한 Conversation으로 이어집니다</a:t>
+              <a:t>질문부터 최종 솔루션까지 한 Conversation으로 이어집니다</a:t>
             </a:r>
           </a:p>
         </p:txBody>
@@ -2705,7 +2705,7 @@
       </p:sp>
       <p:cxnSp>
         <p:nvCxnSpPr>
-          <p:cNvPr id="60" name="arrow-272-320"/>
+          <p:cNvPr id="90" name="arrow-272-320"/>
           <p:cNvCxnSpPr/>
           <p:nvPr/>
         </p:nvCxnSpPr>
@@ -2932,7 +2932,7 @@
       </p:sp>
       <p:cxnSp>
         <p:nvCxnSpPr>
-          <p:cNvPr id="65" name="arrow-540-320"/>
+          <p:cNvPr id="95" name="arrow-540-320"/>
           <p:cNvCxnSpPr/>
           <p:nvPr/>
         </p:nvCxnSpPr>
@@ -3159,7 +3159,7 @@
       </p:sp>
       <p:cxnSp>
         <p:nvCxnSpPr>
-          <p:cNvPr id="70" name="arrow-808-320"/>
+          <p:cNvPr id="100" name="arrow-808-320"/>
           <p:cNvCxnSpPr/>
           <p:nvPr/>
         </p:nvCxnSpPr>
@@ -3321,7 +3321,7 @@
                 <a:ea typeface="Malgun Gothic"/>
                 <a:cs typeface="Malgun Gothic"/>
               </a:rPr>
-              <a:t>Best Answer</a:t>
+              <a:t>해결 선택</a:t>
             </a:r>
           </a:p>
         </p:txBody>
@@ -3379,7 +3379,7 @@
                 <a:cs typeface="Malgun Gothic"/>
               </a:rPr>
               <a:t>질문자가
-해결 선택</a:t>
+답변 선택</a:t>
             </a:r>
           </a:p>
         </p:txBody>
@@ -3499,7 +3499,7 @@
         </p:spPr>
         <p:txBody>
           <a:bodyPr xmlns:a="http://schemas.openxmlformats.org/drawingml/2006/main" lIns="76200" tIns="38100" rIns="76200" bIns="38100" anchor="ctr">
-            <a:normAutofit fontScale="93193"/>
+            <a:normAutofit fontScale="100000"/>
           </a:bodyPr>
           <a:lstStyle xmlns:a="http://schemas.openxmlformats.org/drawingml/2006/main"/>
           <a:p xmlns:a="http://schemas.openxmlformats.org/drawingml/2006/main">
@@ -3526,7 +3526,7 @@
                 <a:ea typeface="Malgun Gothic"/>
                 <a:cs typeface="Malgun Gothic"/>
               </a:rPr>
-              <a:t>Knowledge Base</a:t>
+              <a:t>KB·최종 지정</a:t>
             </a:r>
           </a:p>
         </p:txBody>
@@ -3583,8 +3583,8 @@
                 <a:ea typeface="Malgun Gothic"/>
                 <a:cs typeface="Malgun Gothic"/>
               </a:rPr>
-              <a:t>증상·원인
-해결·버전</a:t>
+              <a:t>KB 게시 후
+솔루션 확정</a:t>
             </a:r>
           </a:p>
         </p:txBody>
@@ -3782,7 +3782,7 @@
                 <a:ea typeface="Malgun Gothic"/>
                 <a:cs typeface="Malgun Gothic"/>
               </a:rPr>
-              <a:t>실제 Community에서 자동 답변과 KB 게시를 확인했습니다</a:t>
+              <a:t>Discussion #165에서 KB 게시와 최종 솔루션 지정을 검증했습니다</a:t>
             </a:r>
           </a:p>
         </p:txBody>
@@ -4358,8 +4358,8 @@
                 <a:ea typeface="Malgun Gothic"/>
                 <a:cs typeface="Malgun Gothic"/>
               </a:rPr>
-              <a:t>버전·시각·로그 요청
-승인 없이 공개</a:t>
+              <a:t>Post #367
+선택 답변 원본</a:t>
             </a:r>
           </a:p>
         </p:txBody>
@@ -4504,7 +4504,7 @@
                 <a:ea typeface="Malgun Gothic"/>
                 <a:cs typeface="Malgun Gothic"/>
               </a:rPr>
-              <a:t>선택 Post #367 중심</a:t>
+              <a:t>Post #367 중심 종합</a:t>
             </a:r>
           </a:p>
         </p:txBody>
@@ -4619,7 +4619,7 @@
                 <a:cs typeface="Malgun Gothic"/>
               </a:rPr>
               <a:t>Version 1 유지
-중복 게시 0</a:t>
+최종 솔루션 지정</a:t>
             </a:r>
           </a:p>
         </p:txBody>
@@ -4879,7 +4879,7 @@
                 <a:ea typeface="Malgun Gothic"/>
                 <a:cs typeface="Malgun Gothic"/>
               </a:rPr>
-              <a:t>보이는 Marker</a:t>
+              <a:t>중복 KB 게시</a:t>
             </a:r>
           </a:p>
         </p:txBody>
@@ -5078,7 +5078,7 @@
                 <a:cs typeface="Malgun Gothic"/>
               </a:rPr>
               <a:t>사용자는 바로 답을 받고,
-해결된 대화만 지식이 됩니다</a:t>
+검증된 KB가 최종 솔루션이 됩니다</a:t>
             </a:r>
           </a:p>
         </p:txBody>
@@ -5166,18 +5166,7 @@
                 <a:ea typeface="Malgun Gothic"/>
                 <a:cs typeface="Malgun Gothic"/>
               </a:rPr>
-              <a:t>AI Gateway 0.14.1</a:t>
-            </a:r>
-            <a:r>
-              <a:rPr sz="1800" b="1">
-                <a:solidFill>
-                  <a:srgbClr val="FFFFFF"/>
-                </a:solidFill>
-                <a:latin typeface="Malgun Gothic"/>
-                <a:ea typeface="Malgun Gothic"/>
-                <a:cs typeface="Malgun Gothic"/>
-              </a:rPr>
-              <a:t> · Migration 0012 · OpenAI</a:t>
+              <a:t>AI Gateway 0.14.2 · Migration 0013 · OpenAI</a:t>
             </a:r>
           </a:p>
         </p:txBody>
@@ -5291,7 +5280,7 @@
                 <a:ea typeface="Malgun Gothic"/>
                 <a:cs typeface="Malgun Gothic"/>
               </a:rPr>
-              <a:t>백업 1.76 GB · 루트 여유 927 GB · 보호 서비스 무변경</a:t>
+              <a:t>전체 DB 백업 · 루트 여유 927 GB · 보호 서비스 무변경</a:t>
             </a:r>
           </a:p>
         </p:txBody>

--- a/output/presentation/techflow-community-auto-publish-kb.pptx
+++ b/output/presentation/techflow-community-auto-publish-kb.pptx
@@ -2,17 +2,17 @@
 <file path=ppt/presentation.xml><?xml version="1.0" encoding="utf-8"?>
 <p:presentation xmlns:p="http://schemas.openxmlformats.org/presentationml/2006/main">
   <p:sldMasterIdLst>
-    <p:sldMasterId xmlns:r="http://schemas.openxmlformats.org/officeDocument/2006/relationships" id="2147483648" r:id="Re469907e60d7407e"/>
+    <p:sldMasterId xmlns:r="http://schemas.openxmlformats.org/officeDocument/2006/relationships" id="2147483648" r:id="Rbcdc592acd024237"/>
   </p:sldMasterIdLst>
   <p:notesMasterIdLst>
-    <p:notesMasterId xmlns:r="http://schemas.openxmlformats.org/officeDocument/2006/relationships" r:id="R10f4b5e8246041f6"/>
+    <p:notesMasterId xmlns:r="http://schemas.openxmlformats.org/officeDocument/2006/relationships" r:id="Re825d9e9d33c4891"/>
   </p:notesMasterIdLst>
   <p:sldIdLst>
-    <p:sldId xmlns:r="http://schemas.openxmlformats.org/officeDocument/2006/relationships" id="256" r:id="R9f929578f03f4b21"/>
-    <p:sldId xmlns:r="http://schemas.openxmlformats.org/officeDocument/2006/relationships" id="257" r:id="R4549e3ff5aa441ad"/>
-    <p:sldId xmlns:r="http://schemas.openxmlformats.org/officeDocument/2006/relationships" id="258" r:id="Rb42067f3e288438a"/>
-    <p:sldId xmlns:r="http://schemas.openxmlformats.org/officeDocument/2006/relationships" id="259" r:id="Rae9b41999baa4e04"/>
-    <p:sldId xmlns:r="http://schemas.openxmlformats.org/officeDocument/2006/relationships" id="260" r:id="Rf1035700d6bc4466"/>
+    <p:sldId xmlns:r="http://schemas.openxmlformats.org/officeDocument/2006/relationships" id="256" r:id="R1fcdc7b3e6ca45fb"/>
+    <p:sldId xmlns:r="http://schemas.openxmlformats.org/officeDocument/2006/relationships" id="257" r:id="Rb390837117b84f66"/>
+    <p:sldId xmlns:r="http://schemas.openxmlformats.org/officeDocument/2006/relationships" id="258" r:id="Rd407531c05fa401d"/>
+    <p:sldId xmlns:r="http://schemas.openxmlformats.org/officeDocument/2006/relationships" id="259" r:id="R61c80380c7ca42f3"/>
+    <p:sldId xmlns:r="http://schemas.openxmlformats.org/officeDocument/2006/relationships" id="260" r:id="R82934bad8b34411d"/>
   </p:sldIdLst>
   <p:sldSz cx="12192000" cy="6858000"/>
   <p:notesSz cx="6858000" cy="9144000"/>
@@ -681,17 +681,12 @@
           </a:p>
           <a:p xmlns:a="http://schemas.openxmlformats.org/drawingml/2006/main">
             <a:r>
-              <a:t>- docs/reports/issue-69-community-auto-publish-kb-validation.md#3</a:t>
-            </a:r>
-          </a:p>
-          <a:p xmlns:a="http://schemas.openxmlformats.org/drawingml/2006/main">
-            <a:r>
-              <a:t>- https://community.ablecloud.io/d/164</a:t>
-            </a:r>
-          </a:p>
-          <a:p xmlns:a="http://schemas.openxmlformats.org/drawingml/2006/main">
-            <a:r>
-              <a:t>- https://community.ablecloud.io/d/165</a:t>
+              <a:t>- docs/reports/issue-69-community-auto-publish-kb-validation.md#3.4</a:t>
+            </a:r>
+          </a:p>
+          <a:p xmlns:a="http://schemas.openxmlformats.org/drawingml/2006/main">
+            <a:r>
+              <a:t>- https://community.ablecloud.io/d/166/377</a:t>
             </a:r>
           </a:p>
         </p:txBody>
@@ -839,7 +834,7 @@
   </p:cSld>
   <p:clrMap bg1="lt1" tx1="dk1" bg2="lt2" tx2="dk2" accent1="accent1" accent2="accent2" accent3="accent3" accent4="accent4" accent5="accent5" accent6="accent6" hlink="hlink" folHlink="folHlink"/>
   <p:sldLayoutIdLst>
-    <p:sldLayoutId xmlns:r="http://schemas.openxmlformats.org/officeDocument/2006/relationships" id="2147483649" r:id="Rc97a8d0a265e40af"/>
+    <p:sldLayoutId xmlns:r="http://schemas.openxmlformats.org/officeDocument/2006/relationships" id="2147483649" r:id="R5b29123ecf7e4445"/>
   </p:sldLayoutIdLst>
   <p:txStyles>
     <p:titleStyle>
@@ -1383,7 +1378,7 @@
           <p:cNvPr id="9" name="background">
             <a:extLst xmlns:a="http://schemas.openxmlformats.org/drawingml/2006/main">
               <a:ext uri="{FF2B5EF4-FFF2-40B4-BE49-F238E27FC236}">
-                <a16:creationId xmlns:a16="http://schemas.microsoft.com/office/drawing/2014/main" id="{78EB77BD-1B06-423C-A879-9EC715BAB662}"/>
+                <a16:creationId xmlns:a16="http://schemas.microsoft.com/office/drawing/2014/main" id="{E3861B12-9B90-4262-B7E4-233FD56D68E6}"/>
               </a:ext>
             </a:extLst>
           </p:cNvPr>
@@ -1414,7 +1409,7 @@
           <p:cNvPr id="2" name="cover">
             <a:extLst xmlns:a="http://schemas.openxmlformats.org/drawingml/2006/main">
               <a:ext uri="{FF2B5EF4-FFF2-40B4-BE49-F238E27FC236}">
-                <a16:creationId xmlns:a16="http://schemas.microsoft.com/office/drawing/2014/main" id="{2E8F6017-EFEA-473F-BF5A-D6FD62AB34E1}"/>
+                <a16:creationId xmlns:a16="http://schemas.microsoft.com/office/drawing/2014/main" id="{DE730D82-0E08-4419-B978-0901A305246A}"/>
               </a:ext>
             </a:extLst>
           </p:cNvPr>
@@ -1445,7 +1440,7 @@
           <p:cNvPr id="3" name="text">
             <a:extLst xmlns:a="http://schemas.openxmlformats.org/drawingml/2006/main">
               <a:ext uri="{FF2B5EF4-FFF2-40B4-BE49-F238E27FC236}">
-                <a16:creationId xmlns:a16="http://schemas.microsoft.com/office/drawing/2014/main" id="{CB037654-4AB6-42E0-ADD5-65B7A9D70574}"/>
+                <a16:creationId xmlns:a16="http://schemas.microsoft.com/office/drawing/2014/main" id="{4F266D21-8332-4A1B-A6FD-8C1A5C06F9ED}"/>
               </a:ext>
             </a:extLst>
           </p:cNvPr>
@@ -1502,7 +1497,7 @@
           <p:cNvPr id="4" name="text">
             <a:extLst xmlns:a="http://schemas.openxmlformats.org/drawingml/2006/main">
               <a:ext uri="{FF2B5EF4-FFF2-40B4-BE49-F238E27FC236}">
-                <a16:creationId xmlns:a16="http://schemas.microsoft.com/office/drawing/2014/main" id="{418C622F-295F-4E58-A896-D2A355C2DD07}"/>
+                <a16:creationId xmlns:a16="http://schemas.microsoft.com/office/drawing/2014/main" id="{C4CAD0F9-B10A-4224-8067-786C6ABF0317}"/>
               </a:ext>
             </a:extLst>
           </p:cNvPr>
@@ -1560,7 +1555,7 @@
           <p:cNvPr id="5" name="text">
             <a:extLst xmlns:a="http://schemas.openxmlformats.org/drawingml/2006/main">
               <a:ext uri="{FF2B5EF4-FFF2-40B4-BE49-F238E27FC236}">
-                <a16:creationId xmlns:a16="http://schemas.microsoft.com/office/drawing/2014/main" id="{ADDE68AF-3D8C-4715-8EAD-E815D3FD359E}"/>
+                <a16:creationId xmlns:a16="http://schemas.microsoft.com/office/drawing/2014/main" id="{3FD07A48-050A-46A7-8F6B-9E8CE9DA51C1}"/>
               </a:ext>
             </a:extLst>
           </p:cNvPr>
@@ -1617,7 +1612,7 @@
           <p:cNvPr id="6" name="result">
             <a:extLst xmlns:a="http://schemas.openxmlformats.org/drawingml/2006/main">
               <a:ext uri="{FF2B5EF4-FFF2-40B4-BE49-F238E27FC236}">
-                <a16:creationId xmlns:a16="http://schemas.microsoft.com/office/drawing/2014/main" id="{C203A577-9931-4DAE-8508-2DC54A321DCC}"/>
+                <a16:creationId xmlns:a16="http://schemas.microsoft.com/office/drawing/2014/main" id="{4F04554B-96CA-4E89-ACDD-50E6BC674DC3}"/>
               </a:ext>
             </a:extLst>
           </p:cNvPr>
@@ -1648,7 +1643,7 @@
           <p:cNvPr id="7" name="text">
             <a:extLst xmlns:a="http://schemas.openxmlformats.org/drawingml/2006/main">
               <a:ext uri="{FF2B5EF4-FFF2-40B4-BE49-F238E27FC236}">
-                <a16:creationId xmlns:a16="http://schemas.microsoft.com/office/drawing/2014/main" id="{F85858AA-4EDA-4A76-8FDA-19057453FAF5}"/>
+                <a16:creationId xmlns:a16="http://schemas.microsoft.com/office/drawing/2014/main" id="{3D9D282C-F44A-4369-81B0-32464F461455}"/>
               </a:ext>
             </a:extLst>
           </p:cNvPr>
@@ -1695,7 +1690,7 @@
                 <a:ea typeface="Malgun Gothic"/>
                 <a:cs typeface="Malgun Gothic"/>
               </a:rPr>
-              <a:t>AI Gateway 0.14.2</a:t>
+              <a:t>AI Gateway 0.14.3</a:t>
             </a:r>
           </a:p>
         </p:txBody>
@@ -1705,7 +1700,7 @@
           <p:cNvPr id="8" name="text">
             <a:extLst xmlns:a="http://schemas.openxmlformats.org/drawingml/2006/main">
               <a:ext uri="{FF2B5EF4-FFF2-40B4-BE49-F238E27FC236}">
-                <a16:creationId xmlns:a16="http://schemas.microsoft.com/office/drawing/2014/main" id="{FFCBA838-7447-46E7-BA8E-CC04D5ABF489}"/>
+                <a16:creationId xmlns:a16="http://schemas.microsoft.com/office/drawing/2014/main" id="{9CD21798-4E97-4E09-BEA4-1389AACF5CF3}"/>
               </a:ext>
             </a:extLst>
           </p:cNvPr>
@@ -1752,7 +1747,7 @@
                 <a:ea typeface="Malgun Gothic"/>
                 <a:cs typeface="Malgun Gothic"/>
               </a:rPr>
-              <a:t>Issue #69 · 2026-08-13</a:t>
+              <a:t>Issue #69 · 2026-08-14</a:t>
             </a:r>
           </a:p>
         </p:txBody>
@@ -1760,7 +1755,7 @@
     </p:spTree>
     <p:extLst>
       <p:ext uri="{BB962C8B-B14F-4D97-AF65-F5344CB8AC3E}">
-        <p14:creationId xmlns:p14="http://schemas.microsoft.com/office/powerpoint/2010/main" val="1709081510"/>
+        <p14:creationId xmlns:p14="http://schemas.microsoft.com/office/powerpoint/2010/main" val="166103454"/>
       </p:ext>
     </p:extLst>
   </p:cSld>
@@ -1784,7 +1779,7 @@
           <p:cNvPr id="17" name="background">
             <a:extLst xmlns:a="http://schemas.openxmlformats.org/drawingml/2006/main">
               <a:ext uri="{FF2B5EF4-FFF2-40B4-BE49-F238E27FC236}">
-                <a16:creationId xmlns:a16="http://schemas.microsoft.com/office/drawing/2014/main" id="{F97F877D-B0E0-4FC4-A34F-A75D181BAE09}"/>
+                <a16:creationId xmlns:a16="http://schemas.microsoft.com/office/drawing/2014/main" id="{C6EB3B9E-FA83-4F13-864B-7A077A96D7CE}"/>
               </a:ext>
             </a:extLst>
           </p:cNvPr>
@@ -1815,7 +1810,7 @@
           <p:cNvPr id="2" name="text">
             <a:extLst xmlns:a="http://schemas.openxmlformats.org/drawingml/2006/main">
               <a:ext uri="{FF2B5EF4-FFF2-40B4-BE49-F238E27FC236}">
-                <a16:creationId xmlns:a16="http://schemas.microsoft.com/office/drawing/2014/main" id="{DEE5B864-8449-469A-9D12-6A7F240710CD}"/>
+                <a16:creationId xmlns:a16="http://schemas.microsoft.com/office/drawing/2014/main" id="{2B9BC606-2E7A-4650-81EB-19A957C6FEA1}"/>
               </a:ext>
             </a:extLst>
           </p:cNvPr>
@@ -1872,7 +1867,7 @@
           <p:cNvPr id="3" name="rule">
             <a:extLst xmlns:a="http://schemas.openxmlformats.org/drawingml/2006/main">
               <a:ext uri="{FF2B5EF4-FFF2-40B4-BE49-F238E27FC236}">
-                <a16:creationId xmlns:a16="http://schemas.microsoft.com/office/drawing/2014/main" id="{33224C42-D395-497D-8080-AC4298F2ACAB}"/>
+                <a16:creationId xmlns:a16="http://schemas.microsoft.com/office/drawing/2014/main" id="{EAC46E5C-D0DC-4987-872F-242D09C6B84A}"/>
               </a:ext>
             </a:extLst>
           </p:cNvPr>
@@ -1903,7 +1898,7 @@
           <p:cNvPr id="4" name="page">
             <a:extLst xmlns:a="http://schemas.openxmlformats.org/drawingml/2006/main">
               <a:ext uri="{FF2B5EF4-FFF2-40B4-BE49-F238E27FC236}">
-                <a16:creationId xmlns:a16="http://schemas.microsoft.com/office/drawing/2014/main" id="{49CF060C-8142-4DDC-8DF5-48EDDF42F1B9}"/>
+                <a16:creationId xmlns:a16="http://schemas.microsoft.com/office/drawing/2014/main" id="{6F9A27FE-D15C-4741-8164-E430D04FF2DC}"/>
               </a:ext>
             </a:extLst>
           </p:cNvPr>
@@ -1960,7 +1955,7 @@
           <p:cNvPr id="5" name="before">
             <a:extLst xmlns:a="http://schemas.openxmlformats.org/drawingml/2006/main">
               <a:ext uri="{FF2B5EF4-FFF2-40B4-BE49-F238E27FC236}">
-                <a16:creationId xmlns:a16="http://schemas.microsoft.com/office/drawing/2014/main" id="{679E21FA-BA4E-4373-90F1-96CBF10DE4C8}"/>
+                <a16:creationId xmlns:a16="http://schemas.microsoft.com/office/drawing/2014/main" id="{48A6BE8E-DBB9-4C22-A985-73798FBE1307}"/>
               </a:ext>
             </a:extLst>
           </p:cNvPr>
@@ -1993,7 +1988,7 @@
           <p:cNvPr id="6" name="text">
             <a:extLst xmlns:a="http://schemas.openxmlformats.org/drawingml/2006/main">
               <a:ext uri="{FF2B5EF4-FFF2-40B4-BE49-F238E27FC236}">
-                <a16:creationId xmlns:a16="http://schemas.microsoft.com/office/drawing/2014/main" id="{1A60BDCE-35E6-458E-A589-5E84766F584A}"/>
+                <a16:creationId xmlns:a16="http://schemas.microsoft.com/office/drawing/2014/main" id="{F9050E40-8C16-4467-8BCA-71E6CDF850BB}"/>
               </a:ext>
             </a:extLst>
           </p:cNvPr>
@@ -2050,7 +2045,7 @@
           <p:cNvPr id="7" name="text">
             <a:extLst xmlns:a="http://schemas.openxmlformats.org/drawingml/2006/main">
               <a:ext uri="{FF2B5EF4-FFF2-40B4-BE49-F238E27FC236}">
-                <a16:creationId xmlns:a16="http://schemas.microsoft.com/office/drawing/2014/main" id="{48356473-2E0D-440A-9CB2-E29C865CF4AC}"/>
+                <a16:creationId xmlns:a16="http://schemas.microsoft.com/office/drawing/2014/main" id="{770CC320-F512-4EE5-A6EB-00083530F5AF}"/>
               </a:ext>
             </a:extLst>
           </p:cNvPr>
@@ -2107,7 +2102,7 @@
       </p:sp>
       <p:cxnSp>
         <p:nvCxnSpPr>
-          <p:cNvPr id="72" name="arrow-418-340"/>
+          <p:cNvPr id="24" name="arrow-418-340"/>
           <p:cNvCxnSpPr/>
           <p:nvPr/>
         </p:nvCxnSpPr>
@@ -2132,7 +2127,7 @@
           <p:cNvPr id="9" name="ongoing">
             <a:extLst xmlns:a="http://schemas.openxmlformats.org/drawingml/2006/main">
               <a:ext uri="{FF2B5EF4-FFF2-40B4-BE49-F238E27FC236}">
-                <a16:creationId xmlns:a16="http://schemas.microsoft.com/office/drawing/2014/main" id="{9FCDB460-47C1-4636-9D14-B29FDB51264C}"/>
+                <a16:creationId xmlns:a16="http://schemas.microsoft.com/office/drawing/2014/main" id="{E6862FF8-B7C3-499A-9A75-DC59426880F6}"/>
               </a:ext>
             </a:extLst>
           </p:cNvPr>
@@ -2165,7 +2160,7 @@
           <p:cNvPr id="10" name="text">
             <a:extLst xmlns:a="http://schemas.openxmlformats.org/drawingml/2006/main">
               <a:ext uri="{FF2B5EF4-FFF2-40B4-BE49-F238E27FC236}">
-                <a16:creationId xmlns:a16="http://schemas.microsoft.com/office/drawing/2014/main" id="{F01EB7C0-6526-4F1C-9F60-275C1CD9FA72}"/>
+                <a16:creationId xmlns:a16="http://schemas.microsoft.com/office/drawing/2014/main" id="{F8730F62-35A6-4EA5-A6DF-5798CB11E27D}"/>
               </a:ext>
             </a:extLst>
           </p:cNvPr>
@@ -2222,7 +2217,7 @@
           <p:cNvPr id="11" name="text">
             <a:extLst xmlns:a="http://schemas.openxmlformats.org/drawingml/2006/main">
               <a:ext uri="{FF2B5EF4-FFF2-40B4-BE49-F238E27FC236}">
-                <a16:creationId xmlns:a16="http://schemas.microsoft.com/office/drawing/2014/main" id="{8052B5B4-2EA7-446A-B898-62FD5DFBD5BC}"/>
+                <a16:creationId xmlns:a16="http://schemas.microsoft.com/office/drawing/2014/main" id="{C36ECE00-180F-4897-A685-722F903CA2EE}"/>
               </a:ext>
             </a:extLst>
           </p:cNvPr>
@@ -2269,17 +2264,17 @@
                 <a:ea typeface="Malgun Gothic"/>
                 <a:cs typeface="Malgun Gothic"/>
               </a:rPr>
-              <a:t>친절한 엔지니어 설명
-즉시 자동 공개
-필요 정보만 요청
-같은 맥락 유지</a:t>
+              <a:t>해결책과 CLI 우선
+성공 기준 제시
+실패 시에만 자료 요청
+반복 답변 게시 차단</a:t>
             </a:r>
           </a:p>
         </p:txBody>
       </p:sp>
       <p:cxnSp>
         <p:nvCxnSpPr>
-          <p:cNvPr id="76" name="arrow-892-340"/>
+          <p:cNvPr id="28" name="arrow-892-340"/>
           <p:cNvCxnSpPr/>
           <p:nvPr/>
         </p:nvCxnSpPr>
@@ -2304,7 +2299,7 @@
           <p:cNvPr id="13" name="final">
             <a:extLst xmlns:a="http://schemas.openxmlformats.org/drawingml/2006/main">
               <a:ext uri="{FF2B5EF4-FFF2-40B4-BE49-F238E27FC236}">
-                <a16:creationId xmlns:a16="http://schemas.microsoft.com/office/drawing/2014/main" id="{9A3A0BAD-D811-4A47-9E47-E93F9DDF03C8}"/>
+                <a16:creationId xmlns:a16="http://schemas.microsoft.com/office/drawing/2014/main" id="{C2E7507E-C1CC-45C4-B163-01E9511FC1DF}"/>
               </a:ext>
             </a:extLst>
           </p:cNvPr>
@@ -2337,7 +2332,7 @@
           <p:cNvPr id="14" name="text">
             <a:extLst xmlns:a="http://schemas.openxmlformats.org/drawingml/2006/main">
               <a:ext uri="{FF2B5EF4-FFF2-40B4-BE49-F238E27FC236}">
-                <a16:creationId xmlns:a16="http://schemas.microsoft.com/office/drawing/2014/main" id="{5505C2E7-A1D4-4CD8-B418-F8957527534F}"/>
+                <a16:creationId xmlns:a16="http://schemas.microsoft.com/office/drawing/2014/main" id="{A113009C-95D8-49E2-9D99-9378D9D5AA95}"/>
               </a:ext>
             </a:extLst>
           </p:cNvPr>
@@ -2394,7 +2389,7 @@
           <p:cNvPr id="15" name="text">
             <a:extLst xmlns:a="http://schemas.openxmlformats.org/drawingml/2006/main">
               <a:ext uri="{FF2B5EF4-FFF2-40B4-BE49-F238E27FC236}">
-                <a16:creationId xmlns:a16="http://schemas.microsoft.com/office/drawing/2014/main" id="{F16C26C3-2D1B-43A0-8595-6396C39CB8FE}"/>
+                <a16:creationId xmlns:a16="http://schemas.microsoft.com/office/drawing/2014/main" id="{1FE220CA-9910-4DCB-B997-D823D5363A92}"/>
               </a:ext>
             </a:extLst>
           </p:cNvPr>
@@ -2453,7 +2448,7 @@
           <p:cNvPr id="16" name="text">
             <a:extLst xmlns:a="http://schemas.openxmlformats.org/drawingml/2006/main">
               <a:ext uri="{FF2B5EF4-FFF2-40B4-BE49-F238E27FC236}">
-                <a16:creationId xmlns:a16="http://schemas.microsoft.com/office/drawing/2014/main" id="{B54CE6CB-C107-4908-BA9F-723A6BBC4A7F}"/>
+                <a16:creationId xmlns:a16="http://schemas.microsoft.com/office/drawing/2014/main" id="{1F0DCBCC-490A-44FF-BCED-E365570B2226}"/>
               </a:ext>
             </a:extLst>
           </p:cNvPr>
@@ -2508,7 +2503,7 @@
     </p:spTree>
     <p:extLst>
       <p:ext uri="{BB962C8B-B14F-4D97-AF65-F5344CB8AC3E}">
-        <p14:creationId xmlns:p14="http://schemas.microsoft.com/office/powerpoint/2010/main" val="1214450395"/>
+        <p14:creationId xmlns:p14="http://schemas.microsoft.com/office/powerpoint/2010/main" val="1031505683"/>
       </p:ext>
     </p:extLst>
   </p:cSld>
@@ -2532,7 +2527,7 @@
           <p:cNvPr id="26" name="background">
             <a:extLst xmlns:a="http://schemas.openxmlformats.org/drawingml/2006/main">
               <a:ext uri="{FF2B5EF4-FFF2-40B4-BE49-F238E27FC236}">
-                <a16:creationId xmlns:a16="http://schemas.microsoft.com/office/drawing/2014/main" id="{A00C08BB-ABC6-45D5-98CC-342603CEF51E}"/>
+                <a16:creationId xmlns:a16="http://schemas.microsoft.com/office/drawing/2014/main" id="{B1096CE3-BE7B-48B6-AECE-8E95EC2D5A1F}"/>
               </a:ext>
             </a:extLst>
           </p:cNvPr>
@@ -2563,7 +2558,7 @@
           <p:cNvPr id="2" name="text">
             <a:extLst xmlns:a="http://schemas.openxmlformats.org/drawingml/2006/main">
               <a:ext uri="{FF2B5EF4-FFF2-40B4-BE49-F238E27FC236}">
-                <a16:creationId xmlns:a16="http://schemas.microsoft.com/office/drawing/2014/main" id="{165725F0-3D40-4861-81A9-068E13392D25}"/>
+                <a16:creationId xmlns:a16="http://schemas.microsoft.com/office/drawing/2014/main" id="{1011E44B-9436-4177-9387-F430BD235120}"/>
               </a:ext>
             </a:extLst>
           </p:cNvPr>
@@ -2620,7 +2615,7 @@
           <p:cNvPr id="3" name="rule">
             <a:extLst xmlns:a="http://schemas.openxmlformats.org/drawingml/2006/main">
               <a:ext uri="{FF2B5EF4-FFF2-40B4-BE49-F238E27FC236}">
-                <a16:creationId xmlns:a16="http://schemas.microsoft.com/office/drawing/2014/main" id="{C02D053E-F5BA-4C2D-B65F-2BA26F4F76EF}"/>
+                <a16:creationId xmlns:a16="http://schemas.microsoft.com/office/drawing/2014/main" id="{E64B82FE-1B65-4AFF-9989-34F2E6EC4E4B}"/>
               </a:ext>
             </a:extLst>
           </p:cNvPr>
@@ -2651,7 +2646,7 @@
           <p:cNvPr id="4" name="page">
             <a:extLst xmlns:a="http://schemas.openxmlformats.org/drawingml/2006/main">
               <a:ext uri="{FF2B5EF4-FFF2-40B4-BE49-F238E27FC236}">
-                <a16:creationId xmlns:a16="http://schemas.microsoft.com/office/drawing/2014/main" id="{9236D624-815D-4897-832C-249BD36E6087}"/>
+                <a16:creationId xmlns:a16="http://schemas.microsoft.com/office/drawing/2014/main" id="{7B430200-FD6C-4D8A-9536-8E52DB7EAEB9}"/>
               </a:ext>
             </a:extLst>
           </p:cNvPr>
@@ -2705,7 +2700,7 @@
       </p:sp>
       <p:cxnSp>
         <p:nvCxnSpPr>
-          <p:cNvPr id="90" name="arrow-272-320"/>
+          <p:cNvPr id="30" name="arrow-272-320"/>
           <p:cNvCxnSpPr/>
           <p:nvPr/>
         </p:nvCxnSpPr>
@@ -2730,7 +2725,7 @@
           <p:cNvPr id="6" name="flow-0">
             <a:extLst xmlns:a="http://schemas.openxmlformats.org/drawingml/2006/main">
               <a:ext uri="{FF2B5EF4-FFF2-40B4-BE49-F238E27FC236}">
-                <a16:creationId xmlns:a16="http://schemas.microsoft.com/office/drawing/2014/main" id="{5DE7AF17-5EDC-4A26-8287-B93FFEB4ACB8}"/>
+                <a16:creationId xmlns:a16="http://schemas.microsoft.com/office/drawing/2014/main" id="{E459212F-A2A0-43F9-AC81-8615D1EFD71B}"/>
               </a:ext>
             </a:extLst>
           </p:cNvPr>
@@ -2763,7 +2758,7 @@
           <p:cNvPr id="7" name="text">
             <a:extLst xmlns:a="http://schemas.openxmlformats.org/drawingml/2006/main">
               <a:ext uri="{FF2B5EF4-FFF2-40B4-BE49-F238E27FC236}">
-                <a16:creationId xmlns:a16="http://schemas.microsoft.com/office/drawing/2014/main" id="{9CB0DD06-E5E2-4CCC-9700-042D52919576}"/>
+                <a16:creationId xmlns:a16="http://schemas.microsoft.com/office/drawing/2014/main" id="{8728F6BC-64F5-4782-8D4D-D7ABB03F9B0F}"/>
               </a:ext>
             </a:extLst>
           </p:cNvPr>
@@ -2820,7 +2815,7 @@
           <p:cNvPr id="8" name="text">
             <a:extLst xmlns:a="http://schemas.openxmlformats.org/drawingml/2006/main">
               <a:ext uri="{FF2B5EF4-FFF2-40B4-BE49-F238E27FC236}">
-                <a16:creationId xmlns:a16="http://schemas.microsoft.com/office/drawing/2014/main" id="{E4BE2CC5-B041-4157-8B2F-2F912F090EE3}"/>
+                <a16:creationId xmlns:a16="http://schemas.microsoft.com/office/drawing/2014/main" id="{5428534C-47D9-4942-BED3-4C8D7BB9109B}"/>
               </a:ext>
             </a:extLst>
           </p:cNvPr>
@@ -2877,7 +2872,7 @@
           <p:cNvPr id="9" name="text">
             <a:extLst xmlns:a="http://schemas.openxmlformats.org/drawingml/2006/main">
               <a:ext uri="{FF2B5EF4-FFF2-40B4-BE49-F238E27FC236}">
-                <a16:creationId xmlns:a16="http://schemas.microsoft.com/office/drawing/2014/main" id="{709A310D-B7C1-4A3D-81B9-D8057F210886}"/>
+                <a16:creationId xmlns:a16="http://schemas.microsoft.com/office/drawing/2014/main" id="{EAD15CE5-34E5-4110-A055-5EB423C7936F}"/>
               </a:ext>
             </a:extLst>
           </p:cNvPr>
@@ -2932,7 +2927,7 @@
       </p:sp>
       <p:cxnSp>
         <p:nvCxnSpPr>
-          <p:cNvPr id="95" name="arrow-540-320"/>
+          <p:cNvPr id="35" name="arrow-540-320"/>
           <p:cNvCxnSpPr/>
           <p:nvPr/>
         </p:nvCxnSpPr>
@@ -2957,7 +2952,7 @@
           <p:cNvPr id="11" name="flow-1">
             <a:extLst xmlns:a="http://schemas.openxmlformats.org/drawingml/2006/main">
               <a:ext uri="{FF2B5EF4-FFF2-40B4-BE49-F238E27FC236}">
-                <a16:creationId xmlns:a16="http://schemas.microsoft.com/office/drawing/2014/main" id="{F4647632-46AC-4DC3-BAA4-82260BE35A4B}"/>
+                <a16:creationId xmlns:a16="http://schemas.microsoft.com/office/drawing/2014/main" id="{206B83C4-F8D7-47F2-A3FE-65680BB4F3D2}"/>
               </a:ext>
             </a:extLst>
           </p:cNvPr>
@@ -2990,7 +2985,7 @@
           <p:cNvPr id="12" name="text">
             <a:extLst xmlns:a="http://schemas.openxmlformats.org/drawingml/2006/main">
               <a:ext uri="{FF2B5EF4-FFF2-40B4-BE49-F238E27FC236}">
-                <a16:creationId xmlns:a16="http://schemas.microsoft.com/office/drawing/2014/main" id="{43FFC508-7E90-4A5E-BC4F-275F118CCD4F}"/>
+                <a16:creationId xmlns:a16="http://schemas.microsoft.com/office/drawing/2014/main" id="{CD0D6727-0A2C-4A3D-BFF5-DF50ED967E96}"/>
               </a:ext>
             </a:extLst>
           </p:cNvPr>
@@ -3047,7 +3042,7 @@
           <p:cNvPr id="13" name="text">
             <a:extLst xmlns:a="http://schemas.openxmlformats.org/drawingml/2006/main">
               <a:ext uri="{FF2B5EF4-FFF2-40B4-BE49-F238E27FC236}">
-                <a16:creationId xmlns:a16="http://schemas.microsoft.com/office/drawing/2014/main" id="{1B9627DB-E7B1-4C68-A5F0-E2456F4A2116}"/>
+                <a16:creationId xmlns:a16="http://schemas.microsoft.com/office/drawing/2014/main" id="{22D0DFA8-1329-4B5F-B51D-E0ABA54306A7}"/>
               </a:ext>
             </a:extLst>
           </p:cNvPr>
@@ -3104,7 +3099,7 @@
           <p:cNvPr id="14" name="text">
             <a:extLst xmlns:a="http://schemas.openxmlformats.org/drawingml/2006/main">
               <a:ext uri="{FF2B5EF4-FFF2-40B4-BE49-F238E27FC236}">
-                <a16:creationId xmlns:a16="http://schemas.microsoft.com/office/drawing/2014/main" id="{5B0B0DC1-B1CC-4E76-B6F7-6D492A076D69}"/>
+                <a16:creationId xmlns:a16="http://schemas.microsoft.com/office/drawing/2014/main" id="{2A5909E6-5116-4361-8CDB-9120B93CA7D6}"/>
               </a:ext>
             </a:extLst>
           </p:cNvPr>
@@ -3159,7 +3154,7 @@
       </p:sp>
       <p:cxnSp>
         <p:nvCxnSpPr>
-          <p:cNvPr id="100" name="arrow-808-320"/>
+          <p:cNvPr id="40" name="arrow-808-320"/>
           <p:cNvCxnSpPr/>
           <p:nvPr/>
         </p:nvCxnSpPr>
@@ -3184,7 +3179,7 @@
           <p:cNvPr id="16" name="flow-2">
             <a:extLst xmlns:a="http://schemas.openxmlformats.org/drawingml/2006/main">
               <a:ext uri="{FF2B5EF4-FFF2-40B4-BE49-F238E27FC236}">
-                <a16:creationId xmlns:a16="http://schemas.microsoft.com/office/drawing/2014/main" id="{1A7A4F95-58CB-45D0-9F31-14A616DF0B7E}"/>
+                <a16:creationId xmlns:a16="http://schemas.microsoft.com/office/drawing/2014/main" id="{1720BA18-0889-4A5E-85E7-A489F0EEFA80}"/>
               </a:ext>
             </a:extLst>
           </p:cNvPr>
@@ -3217,7 +3212,7 @@
           <p:cNvPr id="17" name="text">
             <a:extLst xmlns:a="http://schemas.openxmlformats.org/drawingml/2006/main">
               <a:ext uri="{FF2B5EF4-FFF2-40B4-BE49-F238E27FC236}">
-                <a16:creationId xmlns:a16="http://schemas.microsoft.com/office/drawing/2014/main" id="{D4DA8743-FA00-4ABB-949E-63718F8FC02E}"/>
+                <a16:creationId xmlns:a16="http://schemas.microsoft.com/office/drawing/2014/main" id="{5E2B276C-A75F-4AE2-87D1-AEF10CD9E36B}"/>
               </a:ext>
             </a:extLst>
           </p:cNvPr>
@@ -3274,7 +3269,7 @@
           <p:cNvPr id="18" name="text">
             <a:extLst xmlns:a="http://schemas.openxmlformats.org/drawingml/2006/main">
               <a:ext uri="{FF2B5EF4-FFF2-40B4-BE49-F238E27FC236}">
-                <a16:creationId xmlns:a16="http://schemas.microsoft.com/office/drawing/2014/main" id="{A8FFE5EE-DF90-4B69-A0DB-E31E460CDEE2}"/>
+                <a16:creationId xmlns:a16="http://schemas.microsoft.com/office/drawing/2014/main" id="{4C3E6BEC-1941-436B-A0F2-9675F4E450BD}"/>
               </a:ext>
             </a:extLst>
           </p:cNvPr>
@@ -3331,7 +3326,7 @@
           <p:cNvPr id="19" name="text">
             <a:extLst xmlns:a="http://schemas.openxmlformats.org/drawingml/2006/main">
               <a:ext uri="{FF2B5EF4-FFF2-40B4-BE49-F238E27FC236}">
-                <a16:creationId xmlns:a16="http://schemas.microsoft.com/office/drawing/2014/main" id="{6EC2E563-F2EF-4CBF-8493-B22F1278EC70}"/>
+                <a16:creationId xmlns:a16="http://schemas.microsoft.com/office/drawing/2014/main" id="{B0DB12ED-4D90-4E23-8ADA-DDF1169AF0E1}"/>
               </a:ext>
             </a:extLst>
           </p:cNvPr>
@@ -3389,7 +3384,7 @@
           <p:cNvPr id="20" name="flow-3">
             <a:extLst xmlns:a="http://schemas.openxmlformats.org/drawingml/2006/main">
               <a:ext uri="{FF2B5EF4-FFF2-40B4-BE49-F238E27FC236}">
-                <a16:creationId xmlns:a16="http://schemas.microsoft.com/office/drawing/2014/main" id="{CCE3C432-8194-42F8-B1CB-4AAD68D35E3A}"/>
+                <a16:creationId xmlns:a16="http://schemas.microsoft.com/office/drawing/2014/main" id="{3C40FE54-60EE-4FA3-AACB-6C6DA185326C}"/>
               </a:ext>
             </a:extLst>
           </p:cNvPr>
@@ -3422,7 +3417,7 @@
           <p:cNvPr id="21" name="text">
             <a:extLst xmlns:a="http://schemas.openxmlformats.org/drawingml/2006/main">
               <a:ext uri="{FF2B5EF4-FFF2-40B4-BE49-F238E27FC236}">
-                <a16:creationId xmlns:a16="http://schemas.microsoft.com/office/drawing/2014/main" id="{A3B305D1-8755-40E9-A1AD-0370D0C262CF}"/>
+                <a16:creationId xmlns:a16="http://schemas.microsoft.com/office/drawing/2014/main" id="{3029FED3-6FFB-4AEF-88B9-01BF00E5E9A1}"/>
               </a:ext>
             </a:extLst>
           </p:cNvPr>
@@ -3479,7 +3474,7 @@
           <p:cNvPr id="22" name="text">
             <a:extLst xmlns:a="http://schemas.openxmlformats.org/drawingml/2006/main">
               <a:ext uri="{FF2B5EF4-FFF2-40B4-BE49-F238E27FC236}">
-                <a16:creationId xmlns:a16="http://schemas.microsoft.com/office/drawing/2014/main" id="{907349FD-B4A1-4905-8062-26A926DB4154}"/>
+                <a16:creationId xmlns:a16="http://schemas.microsoft.com/office/drawing/2014/main" id="{1F7B2095-3C52-47AA-BE23-CF889604FAFF}"/>
               </a:ext>
             </a:extLst>
           </p:cNvPr>
@@ -3536,7 +3531,7 @@
           <p:cNvPr id="23" name="text">
             <a:extLst xmlns:a="http://schemas.openxmlformats.org/drawingml/2006/main">
               <a:ext uri="{FF2B5EF4-FFF2-40B4-BE49-F238E27FC236}">
-                <a16:creationId xmlns:a16="http://schemas.microsoft.com/office/drawing/2014/main" id="{80EC6C9C-127A-4982-AFFF-CC79B7C9D660}"/>
+                <a16:creationId xmlns:a16="http://schemas.microsoft.com/office/drawing/2014/main" id="{E560A22E-0D34-48CA-87C3-D67F0DF7D1C4}"/>
               </a:ext>
             </a:extLst>
           </p:cNvPr>
@@ -3594,7 +3589,7 @@
           <p:cNvPr id="24" name="chat">
             <a:extLst xmlns:a="http://schemas.openxmlformats.org/drawingml/2006/main">
               <a:ext uri="{FF2B5EF4-FFF2-40B4-BE49-F238E27FC236}">
-                <a16:creationId xmlns:a16="http://schemas.microsoft.com/office/drawing/2014/main" id="{E2FE6E61-6AF3-46FF-A576-42B266ED62D8}"/>
+                <a16:creationId xmlns:a16="http://schemas.microsoft.com/office/drawing/2014/main" id="{1ED42C74-339D-443C-B9DB-9B45CE2567F4}"/>
               </a:ext>
             </a:extLst>
           </p:cNvPr>
@@ -3625,7 +3620,7 @@
           <p:cNvPr id="25" name="text">
             <a:extLst xmlns:a="http://schemas.openxmlformats.org/drawingml/2006/main">
               <a:ext uri="{FF2B5EF4-FFF2-40B4-BE49-F238E27FC236}">
-                <a16:creationId xmlns:a16="http://schemas.microsoft.com/office/drawing/2014/main" id="{BCDD8D55-6AAD-4E73-A6A8-3BF46E1C81A2}"/>
+                <a16:creationId xmlns:a16="http://schemas.microsoft.com/office/drawing/2014/main" id="{BDFF2203-C0E2-49B9-8F56-D64F4CC86971}"/>
               </a:ext>
             </a:extLst>
           </p:cNvPr>
@@ -3680,7 +3675,7 @@
     </p:spTree>
     <p:extLst>
       <p:ext uri="{BB962C8B-B14F-4D97-AF65-F5344CB8AC3E}">
-        <p14:creationId xmlns:p14="http://schemas.microsoft.com/office/powerpoint/2010/main" val="821210682"/>
+        <p14:creationId xmlns:p14="http://schemas.microsoft.com/office/powerpoint/2010/main" val="133814118"/>
       </p:ext>
     </p:extLst>
   </p:cSld>
@@ -3701,10 +3696,10 @@
       </p:grpSpPr>
       <p:sp>
         <p:nvSpPr>
-          <p:cNvPr id="24" name="background">
-            <a:extLst xmlns:a="http://schemas.openxmlformats.org/drawingml/2006/main">
-              <a:ext uri="{FF2B5EF4-FFF2-40B4-BE49-F238E27FC236}">
-                <a16:creationId xmlns:a16="http://schemas.microsoft.com/office/drawing/2014/main" id="{988E4A23-4A7E-4ABF-8246-3677A17977C3}"/>
+          <p:cNvPr id="21" name="background">
+            <a:extLst xmlns:a="http://schemas.openxmlformats.org/drawingml/2006/main">
+              <a:ext uri="{FF2B5EF4-FFF2-40B4-BE49-F238E27FC236}">
+                <a16:creationId xmlns:a16="http://schemas.microsoft.com/office/drawing/2014/main" id="{763156E2-504D-4650-9B4D-F8C9D0F8ACB0}"/>
               </a:ext>
             </a:extLst>
           </p:cNvPr>
@@ -3735,7 +3730,7 @@
           <p:cNvPr id="2" name="text">
             <a:extLst xmlns:a="http://schemas.openxmlformats.org/drawingml/2006/main">
               <a:ext uri="{FF2B5EF4-FFF2-40B4-BE49-F238E27FC236}">
-                <a16:creationId xmlns:a16="http://schemas.microsoft.com/office/drawing/2014/main" id="{0C7C99A6-C422-4ACF-B310-E214711344BD}"/>
+                <a16:creationId xmlns:a16="http://schemas.microsoft.com/office/drawing/2014/main" id="{CBD17D98-C9AF-43F8-8716-7BD96962055F}"/>
               </a:ext>
             </a:extLst>
           </p:cNvPr>
@@ -3782,7 +3777,7 @@
                 <a:ea typeface="Malgun Gothic"/>
                 <a:cs typeface="Malgun Gothic"/>
               </a:rPr>
-              <a:t>Discussion #165에서 KB 게시와 최종 솔루션 지정을 검증했습니다</a:t>
+              <a:t>Discussion #166에서 반복 상담을 실제 해결 단계로 바꿨습니다</a:t>
             </a:r>
           </a:p>
         </p:txBody>
@@ -3792,7 +3787,7 @@
           <p:cNvPr id="3" name="rule">
             <a:extLst xmlns:a="http://schemas.openxmlformats.org/drawingml/2006/main">
               <a:ext uri="{FF2B5EF4-FFF2-40B4-BE49-F238E27FC236}">
-                <a16:creationId xmlns:a16="http://schemas.microsoft.com/office/drawing/2014/main" id="{5F0D2535-60AD-42B3-8C69-6075A3B0CCF2}"/>
+                <a16:creationId xmlns:a16="http://schemas.microsoft.com/office/drawing/2014/main" id="{755B4E15-4004-4ADF-A93D-3DBF5D977FDA}"/>
               </a:ext>
             </a:extLst>
           </p:cNvPr>
@@ -3823,7 +3818,7 @@
           <p:cNvPr id="4" name="page">
             <a:extLst xmlns:a="http://schemas.openxmlformats.org/drawingml/2006/main">
               <a:ext uri="{FF2B5EF4-FFF2-40B4-BE49-F238E27FC236}">
-                <a16:creationId xmlns:a16="http://schemas.microsoft.com/office/drawing/2014/main" id="{E128118C-6C0A-40FA-B852-E932F92DCD46}"/>
+                <a16:creationId xmlns:a16="http://schemas.microsoft.com/office/drawing/2014/main" id="{82C36A8F-C671-4513-A456-6E31C20EEB59}"/>
               </a:ext>
             </a:extLst>
           </p:cNvPr>
@@ -3880,7 +3875,7 @@
           <p:cNvPr id="5" name="text">
             <a:extLst xmlns:a="http://schemas.openxmlformats.org/drawingml/2006/main">
               <a:ext uri="{FF2B5EF4-FFF2-40B4-BE49-F238E27FC236}">
-                <a16:creationId xmlns:a16="http://schemas.microsoft.com/office/drawing/2014/main" id="{7D932AE5-F347-419B-B635-D1DE7D6A7779}"/>
+                <a16:creationId xmlns:a16="http://schemas.microsoft.com/office/drawing/2014/main" id="{23AADD99-5053-41E7-B176-5A97FF65DACB}"/>
               </a:ext>
             </a:extLst>
           </p:cNvPr>
@@ -3909,9 +3904,9 @@
                 <a:spcPct val="108000"/>
               </a:lnSpc>
               <a:buNone/>
-              <a:defRPr sz="4200">
-                <a:solidFill>
-                  <a:srgbClr val="2563EB"/>
+              <a:defRPr sz="3300">
+                <a:solidFill>
+                  <a:srgbClr val="B91C1C"/>
                 </a:solidFill>
                 <a:latin typeface="Malgun Gothic"/>
                 <a:ea typeface="Malgun Gothic"/>
@@ -3919,15 +3914,15 @@
               </a:defRPr>
             </a:pPr>
             <a:r>
-              <a:rPr sz="4200" b="1">
-                <a:solidFill>
-                  <a:srgbClr val="2563EB"/>
+              <a:rPr sz="3300" b="1">
+                <a:solidFill>
+                  <a:srgbClr val="B91C1C"/>
                 </a:solidFill>
                 <a:latin typeface="Malgun Gothic"/>
                 <a:ea typeface="Malgun Gothic"/>
                 <a:cs typeface="Malgun Gothic"/>
               </a:rPr>
-              <a:t>#164</a:t>
+              <a:t>반복</a:t>
             </a:r>
           </a:p>
         </p:txBody>
@@ -3937,7 +3932,7 @@
           <p:cNvPr id="6" name="text">
             <a:extLst xmlns:a="http://schemas.openxmlformats.org/drawingml/2006/main">
               <a:ext uri="{FF2B5EF4-FFF2-40B4-BE49-F238E27FC236}">
-                <a16:creationId xmlns:a16="http://schemas.microsoft.com/office/drawing/2014/main" id="{EFAB3D66-CA5D-4DB0-A775-120D23DAC6B3}"/>
+                <a16:creationId xmlns:a16="http://schemas.microsoft.com/office/drawing/2014/main" id="{90D112CC-5EA1-49D0-98D1-FE5A37FAE771}"/>
               </a:ext>
             </a:extLst>
           </p:cNvPr>
@@ -3984,7 +3979,7 @@
                 <a:ea typeface="Malgun Gothic"/>
                 <a:cs typeface="Malgun Gothic"/>
               </a:rPr>
-              <a:t>기존 문서형 답변 전환</a:t>
+              <a:t>Post #374 · #376</a:t>
             </a:r>
           </a:p>
         </p:txBody>
@@ -3994,76 +3989,19 @@
           <p:cNvPr id="7" name="text">
             <a:extLst xmlns:a="http://schemas.openxmlformats.org/drawingml/2006/main">
               <a:ext uri="{FF2B5EF4-FFF2-40B4-BE49-F238E27FC236}">
-                <a16:creationId xmlns:a16="http://schemas.microsoft.com/office/drawing/2014/main" id="{5CAE3D59-C74A-4C3E-BF78-1D1F022C1571}"/>
-              </a:ext>
-            </a:extLst>
-          </p:cNvPr>
-          <p:cNvSpPr>
-            <a:spLocks xmlns:a="http://schemas.openxmlformats.org/drawingml/2006/main" noGrp="1"/>
-          </p:cNvSpPr>
-          <p:nvPr/>
-        </p:nvSpPr>
-        <p:spPr>
-          <a:xfrm xmlns:a="http://schemas.openxmlformats.org/drawingml/2006/main">
-            <a:off x="685800" y="3105150"/>
-            <a:ext cx="2381250" cy="552450"/>
-          </a:xfrm>
-          <a:prstGeom xmlns:a="http://schemas.openxmlformats.org/drawingml/2006/main" prst="rect">
-            <a:avLst/>
-          </a:prstGeom>
-        </p:spPr>
-        <p:txBody>
-          <a:bodyPr xmlns:a="http://schemas.openxmlformats.org/drawingml/2006/main" lIns="76200" tIns="38100" rIns="76200" bIns="38100" anchor="ctr">
-            <a:normAutofit fontScale="100000"/>
-          </a:bodyPr>
-          <a:lstStyle xmlns:a="http://schemas.openxmlformats.org/drawingml/2006/main"/>
-          <a:p xmlns:a="http://schemas.openxmlformats.org/drawingml/2006/main">
-            <a:pPr algn="ctr">
-              <a:lnSpc>
-                <a:spcPct val="108000"/>
-              </a:lnSpc>
-              <a:buNone/>
-              <a:defRPr sz="2325">
-                <a:solidFill>
-                  <a:srgbClr val="15803D"/>
-                </a:solidFill>
-                <a:latin typeface="Malgun Gothic"/>
-                <a:ea typeface="Malgun Gothic"/>
-                <a:cs typeface="Malgun Gothic"/>
-              </a:defRPr>
-            </a:pPr>
-            <a:r>
-              <a:rPr sz="2325" b="1">
-                <a:solidFill>
-                  <a:srgbClr val="15803D"/>
-                </a:solidFill>
-                <a:latin typeface="Malgun Gothic"/>
-                <a:ea typeface="Malgun Gothic"/>
-                <a:cs typeface="Malgun Gothic"/>
-              </a:rPr>
-              <a:t>Post #363</a:t>
-            </a:r>
-          </a:p>
-        </p:txBody>
-      </p:sp>
-      <p:sp>
-        <p:nvSpPr>
-          <p:cNvPr id="8" name="text">
-            <a:extLst xmlns:a="http://schemas.openxmlformats.org/drawingml/2006/main">
-              <a:ext uri="{FF2B5EF4-FFF2-40B4-BE49-F238E27FC236}">
-                <a16:creationId xmlns:a16="http://schemas.microsoft.com/office/drawing/2014/main" id="{E9125D75-DECB-4EAA-BDBE-4238E4C0763A}"/>
-              </a:ext>
-            </a:extLst>
-          </p:cNvPr>
-          <p:cNvSpPr>
-            <a:spLocks xmlns:a="http://schemas.openxmlformats.org/drawingml/2006/main" noGrp="1"/>
-          </p:cNvSpPr>
-          <p:nvPr/>
-        </p:nvSpPr>
-        <p:spPr>
-          <a:xfrm xmlns:a="http://schemas.openxmlformats.org/drawingml/2006/main">
-            <a:off x="685800" y="3790950"/>
-            <a:ext cx="2381250" cy="704850"/>
+                <a16:creationId xmlns:a16="http://schemas.microsoft.com/office/drawing/2014/main" id="{443AD65C-3B59-4BFD-8F37-BFB2DCC2D2EC}"/>
+              </a:ext>
+            </a:extLst>
+          </p:cNvPr>
+          <p:cNvSpPr>
+            <a:spLocks xmlns:a="http://schemas.openxmlformats.org/drawingml/2006/main" noGrp="1"/>
+          </p:cNvSpPr>
+          <p:nvPr/>
+        </p:nvSpPr>
+        <p:spPr>
+          <a:xfrm xmlns:a="http://schemas.openxmlformats.org/drawingml/2006/main">
+            <a:off x="685800" y="3257550"/>
+            <a:ext cx="2381250" cy="876300"/>
           </a:xfrm>
           <a:prstGeom xmlns:a="http://schemas.openxmlformats.org/drawingml/2006/main" prst="rect">
             <a:avLst/>
@@ -4098,18 +4036,18 @@
                 <a:ea typeface="Malgun Gothic"/>
                 <a:cs typeface="Malgun Gothic"/>
               </a:rPr>
-              <a:t>실제 후속 자동 답변
-Post #365</a:t>
-            </a:r>
-          </a:p>
-        </p:txBody>
-      </p:sp>
-      <p:sp>
-        <p:nvSpPr>
-          <p:cNvPr id="9" name="divider-1">
-            <a:extLst xmlns:a="http://schemas.openxmlformats.org/drawingml/2006/main">
-              <a:ext uri="{FF2B5EF4-FFF2-40B4-BE49-F238E27FC236}">
-                <a16:creationId xmlns:a16="http://schemas.microsoft.com/office/drawing/2014/main" id="{3DC563AE-2483-4EFD-AA1A-DBB4BE5811B1}"/>
+              <a:t>서비스·마운트·SELinux
+같은 점검 목록 반복</a:t>
+            </a:r>
+          </a:p>
+        </p:txBody>
+      </p:sp>
+      <p:sp>
+        <p:nvSpPr>
+          <p:cNvPr id="8" name="divider-1">
+            <a:extLst xmlns:a="http://schemas.openxmlformats.org/drawingml/2006/main">
+              <a:ext uri="{FF2B5EF4-FFF2-40B4-BE49-F238E27FC236}">
+                <a16:creationId xmlns:a16="http://schemas.microsoft.com/office/drawing/2014/main" id="{9D34D854-ABBF-4F0F-BE52-B4751F6B52D9}"/>
               </a:ext>
             </a:extLst>
           </p:cNvPr>
@@ -4137,10 +4075,10 @@
       </p:sp>
       <p:sp>
         <p:nvSpPr>
-          <p:cNvPr id="10" name="text">
-            <a:extLst xmlns:a="http://schemas.openxmlformats.org/drawingml/2006/main">
-              <a:ext uri="{FF2B5EF4-FFF2-40B4-BE49-F238E27FC236}">
-                <a16:creationId xmlns:a16="http://schemas.microsoft.com/office/drawing/2014/main" id="{C1ABD19C-AA9E-47C1-A5ED-700548E6C4BE}"/>
+          <p:cNvPr id="9" name="text">
+            <a:extLst xmlns:a="http://schemas.openxmlformats.org/drawingml/2006/main">
+              <a:ext uri="{FF2B5EF4-FFF2-40B4-BE49-F238E27FC236}">
+                <a16:creationId xmlns:a16="http://schemas.microsoft.com/office/drawing/2014/main" id="{BBC1BDB3-6AFF-4CD5-B408-AD7DCA242358}"/>
               </a:ext>
             </a:extLst>
           </p:cNvPr>
@@ -4169,7 +4107,7 @@
                 <a:spcPct val="108000"/>
               </a:lnSpc>
               <a:buNone/>
-              <a:defRPr sz="4200">
+              <a:defRPr sz="3300">
                 <a:solidFill>
                   <a:srgbClr val="2563EB"/>
                 </a:solidFill>
@@ -4179,7 +4117,7 @@
               </a:defRPr>
             </a:pPr>
             <a:r>
-              <a:rPr sz="4200" b="1">
+              <a:rPr sz="3300" b="1">
                 <a:solidFill>
                   <a:srgbClr val="2563EB"/>
                 </a:solidFill>
@@ -4187,17 +4125,17 @@
                 <a:ea typeface="Malgun Gothic"/>
                 <a:cs typeface="Malgun Gothic"/>
               </a:rPr>
-              <a:t>#165</a:t>
-            </a:r>
-          </a:p>
-        </p:txBody>
-      </p:sp>
-      <p:sp>
-        <p:nvSpPr>
-          <p:cNvPr id="11" name="text">
-            <a:extLst xmlns:a="http://schemas.openxmlformats.org/drawingml/2006/main">
-              <a:ext uri="{FF2B5EF4-FFF2-40B4-BE49-F238E27FC236}">
-                <a16:creationId xmlns:a16="http://schemas.microsoft.com/office/drawing/2014/main" id="{1A3F8922-4DF6-4F79-8EFC-EBB32D099888}"/>
+              <a:t>먼저</a:t>
+            </a:r>
+          </a:p>
+        </p:txBody>
+      </p:sp>
+      <p:sp>
+        <p:nvSpPr>
+          <p:cNvPr id="10" name="text">
+            <a:extLst xmlns:a="http://schemas.openxmlformats.org/drawingml/2006/main">
+              <a:ext uri="{FF2B5EF4-FFF2-40B4-BE49-F238E27FC236}">
+                <a16:creationId xmlns:a16="http://schemas.microsoft.com/office/drawing/2014/main" id="{15EA8B63-5704-419B-AA06-C8AAE402AB39}"/>
               </a:ext>
             </a:extLst>
           </p:cNvPr>
@@ -4217,7 +4155,7 @@
         </p:spPr>
         <p:txBody>
           <a:bodyPr xmlns:a="http://schemas.openxmlformats.org/drawingml/2006/main" lIns="76200" tIns="38100" rIns="76200" bIns="38100" anchor="ctr">
-            <a:normAutofit fontScale="98026"/>
+            <a:normAutofit fontScale="100000"/>
           </a:bodyPr>
           <a:lstStyle xmlns:a="http://schemas.openxmlformats.org/drawingml/2006/main"/>
           <a:p xmlns:a="http://schemas.openxmlformats.org/drawingml/2006/main">
@@ -4244,29 +4182,29 @@
                 <a:ea typeface="Malgun Gothic"/>
                 <a:cs typeface="Malgun Gothic"/>
               </a:rPr>
-              <a:t>근거 부족도 빈 답변 없음</a:t>
-            </a:r>
-          </a:p>
-        </p:txBody>
-      </p:sp>
-      <p:sp>
-        <p:nvSpPr>
-          <p:cNvPr id="12" name="text">
-            <a:extLst xmlns:a="http://schemas.openxmlformats.org/drawingml/2006/main">
-              <a:ext uri="{FF2B5EF4-FFF2-40B4-BE49-F238E27FC236}">
-                <a16:creationId xmlns:a16="http://schemas.microsoft.com/office/drawing/2014/main" id="{D40548D0-F123-421A-A612-C31CC88305F9}"/>
-              </a:ext>
-            </a:extLst>
-          </p:cNvPr>
-          <p:cNvSpPr>
-            <a:spLocks xmlns:a="http://schemas.openxmlformats.org/drawingml/2006/main" noGrp="1"/>
-          </p:cNvSpPr>
-          <p:nvPr/>
-        </p:nvSpPr>
-        <p:spPr>
-          <a:xfrm xmlns:a="http://schemas.openxmlformats.org/drawingml/2006/main">
-            <a:off x="4000500" y="3105150"/>
-            <a:ext cx="2381250" cy="552450"/>
+              <a:t>정확한 CLI</a:t>
+            </a:r>
+          </a:p>
+        </p:txBody>
+      </p:sp>
+      <p:sp>
+        <p:nvSpPr>
+          <p:cNvPr id="11" name="text">
+            <a:extLst xmlns:a="http://schemas.openxmlformats.org/drawingml/2006/main">
+              <a:ext uri="{FF2B5EF4-FFF2-40B4-BE49-F238E27FC236}">
+                <a16:creationId xmlns:a16="http://schemas.microsoft.com/office/drawing/2014/main" id="{A98304DF-445B-432F-9881-63CC491C2439}"/>
+              </a:ext>
+            </a:extLst>
+          </p:cNvPr>
+          <p:cNvSpPr>
+            <a:spLocks xmlns:a="http://schemas.openxmlformats.org/drawingml/2006/main" noGrp="1"/>
+          </p:cNvSpPr>
+          <p:nvPr/>
+        </p:nvSpPr>
+        <p:spPr>
+          <a:xfrm xmlns:a="http://schemas.openxmlformats.org/drawingml/2006/main">
+            <a:off x="4000500" y="3181350"/>
+            <a:ext cx="2381250" cy="1066800"/>
           </a:xfrm>
           <a:prstGeom xmlns:a="http://schemas.openxmlformats.org/drawingml/2006/main" prst="rect">
             <a:avLst/>
@@ -4283,9 +4221,9 @@
                 <a:spcPct val="108000"/>
               </a:lnSpc>
               <a:buNone/>
-              <a:defRPr sz="2325">
-                <a:solidFill>
-                  <a:srgbClr val="15803D"/>
+              <a:defRPr sz="1650">
+                <a:solidFill>
+                  <a:srgbClr val="475569"/>
                 </a:solidFill>
                 <a:latin typeface="Malgun Gothic"/>
                 <a:ea typeface="Malgun Gothic"/>
@@ -4293,83 +4231,27 @@
               </a:defRPr>
             </a:pPr>
             <a:r>
-              <a:rPr sz="2325" b="1">
-                <a:solidFill>
-                  <a:srgbClr val="15803D"/>
+              <a:rPr sz="1650" b="0">
+                <a:solidFill>
+                  <a:srgbClr val="475569"/>
                 </a:solidFill>
                 <a:latin typeface="Malgun Gothic"/>
                 <a:ea typeface="Malgun Gothic"/>
                 <a:cs typeface="Malgun Gothic"/>
               </a:rPr>
-              <a:t>Post #367</a:t>
-            </a:r>
-          </a:p>
-        </p:txBody>
-      </p:sp>
-      <p:sp>
-        <p:nvSpPr>
-          <p:cNvPr id="13" name="text">
-            <a:extLst xmlns:a="http://schemas.openxmlformats.org/drawingml/2006/main">
-              <a:ext uri="{FF2B5EF4-FFF2-40B4-BE49-F238E27FC236}">
-                <a16:creationId xmlns:a16="http://schemas.microsoft.com/office/drawing/2014/main" id="{B547112D-66C6-403A-A8D1-EB6B787708B2}"/>
-              </a:ext>
-            </a:extLst>
-          </p:cNvPr>
-          <p:cNvSpPr>
-            <a:spLocks xmlns:a="http://schemas.openxmlformats.org/drawingml/2006/main" noGrp="1"/>
-          </p:cNvSpPr>
-          <p:nvPr/>
-        </p:nvSpPr>
-        <p:spPr>
-          <a:xfrm xmlns:a="http://schemas.openxmlformats.org/drawingml/2006/main">
-            <a:off x="4000500" y="3790950"/>
-            <a:ext cx="2381250" cy="704850"/>
-          </a:xfrm>
-          <a:prstGeom xmlns:a="http://schemas.openxmlformats.org/drawingml/2006/main" prst="rect">
-            <a:avLst/>
-          </a:prstGeom>
-        </p:spPr>
-        <p:txBody>
-          <a:bodyPr xmlns:a="http://schemas.openxmlformats.org/drawingml/2006/main" lIns="76200" tIns="38100" rIns="76200" bIns="38100" anchor="ctr">
-            <a:normAutofit fontScale="100000"/>
-          </a:bodyPr>
-          <a:lstStyle xmlns:a="http://schemas.openxmlformats.org/drawingml/2006/main"/>
-          <a:p xmlns:a="http://schemas.openxmlformats.org/drawingml/2006/main">
-            <a:pPr algn="ctr">
-              <a:lnSpc>
-                <a:spcPct val="108000"/>
-              </a:lnSpc>
-              <a:buNone/>
-              <a:defRPr sz="1575">
-                <a:solidFill>
-                  <a:srgbClr val="475569"/>
-                </a:solidFill>
-                <a:latin typeface="Malgun Gothic"/>
-                <a:ea typeface="Malgun Gothic"/>
-                <a:cs typeface="Malgun Gothic"/>
-              </a:defRPr>
-            </a:pPr>
-            <a:r>
-              <a:rPr sz="1575" b="0">
-                <a:solidFill>
-                  <a:srgbClr val="475569"/>
-                </a:solidFill>
-                <a:latin typeface="Malgun Gothic"/>
-                <a:ea typeface="Malgun Gothic"/>
-                <a:cs typeface="Malgun Gothic"/>
-              </a:rPr>
-              <a:t>Post #367
-선택 답변 원본</a:t>
-            </a:r>
-          </a:p>
-        </p:txBody>
-      </p:sp>
-      <p:sp>
-        <p:nvSpPr>
-          <p:cNvPr id="14" name="divider-2">
-            <a:extLst xmlns:a="http://schemas.openxmlformats.org/drawingml/2006/main">
-              <a:ext uri="{FF2B5EF4-FFF2-40B4-BE49-F238E27FC236}">
-                <a16:creationId xmlns:a16="http://schemas.microsoft.com/office/drawing/2014/main" id="{0507251C-6526-46EE-AC02-1C2768D8299C}"/>
+              <a:t>ausearch
+matchpathcon
+조건부 restorecon</a:t>
+            </a:r>
+          </a:p>
+        </p:txBody>
+      </p:sp>
+      <p:sp>
+        <p:nvSpPr>
+          <p:cNvPr id="12" name="divider-2">
+            <a:extLst xmlns:a="http://schemas.openxmlformats.org/drawingml/2006/main">
+              <a:ext uri="{FF2B5EF4-FFF2-40B4-BE49-F238E27FC236}">
+                <a16:creationId xmlns:a16="http://schemas.microsoft.com/office/drawing/2014/main" id="{97662A0B-42FF-4583-9114-DB7F1B4A8D08}"/>
               </a:ext>
             </a:extLst>
           </p:cNvPr>
@@ -4397,10 +4279,10 @@
       </p:sp>
       <p:sp>
         <p:nvSpPr>
-          <p:cNvPr id="15" name="text">
-            <a:extLst xmlns:a="http://schemas.openxmlformats.org/drawingml/2006/main">
-              <a:ext uri="{FF2B5EF4-FFF2-40B4-BE49-F238E27FC236}">
-                <a16:creationId xmlns:a16="http://schemas.microsoft.com/office/drawing/2014/main" id="{AED8CF36-9EA0-48B7-A91A-F564795E4E25}"/>
+          <p:cNvPr id="13" name="text">
+            <a:extLst xmlns:a="http://schemas.openxmlformats.org/drawingml/2006/main">
+              <a:ext uri="{FF2B5EF4-FFF2-40B4-BE49-F238E27FC236}">
+                <a16:creationId xmlns:a16="http://schemas.microsoft.com/office/drawing/2014/main" id="{6D5E8363-8923-4175-9C0C-7806156DC296}"/>
               </a:ext>
             </a:extLst>
           </p:cNvPr>
@@ -4429,7 +4311,7 @@
                 <a:spcPct val="108000"/>
               </a:lnSpc>
               <a:buNone/>
-              <a:defRPr sz="4200">
+              <a:defRPr sz="3300">
                 <a:solidFill>
                   <a:srgbClr val="15803D"/>
                 </a:solidFill>
@@ -4439,7 +4321,7 @@
               </a:defRPr>
             </a:pPr>
             <a:r>
-              <a:rPr sz="4200" b="1">
+              <a:rPr sz="3300" b="1">
                 <a:solidFill>
                   <a:srgbClr val="15803D"/>
                 </a:solidFill>
@@ -4447,17 +4329,17 @@
                 <a:ea typeface="Malgun Gothic"/>
                 <a:cs typeface="Malgun Gothic"/>
               </a:rPr>
-              <a:t>KB</a:t>
-            </a:r>
-          </a:p>
-        </p:txBody>
-      </p:sp>
-      <p:sp>
-        <p:nvSpPr>
-          <p:cNvPr id="16" name="text">
-            <a:extLst xmlns:a="http://schemas.openxmlformats.org/drawingml/2006/main">
-              <a:ext uri="{FF2B5EF4-FFF2-40B4-BE49-F238E27FC236}">
-                <a16:creationId xmlns:a16="http://schemas.microsoft.com/office/drawing/2014/main" id="{D1855053-903C-4862-AE76-E1F0E3D9DE62}"/>
+              <a:t>판정</a:t>
+            </a:r>
+          </a:p>
+        </p:txBody>
+      </p:sp>
+      <p:sp>
+        <p:nvSpPr>
+          <p:cNvPr id="14" name="text">
+            <a:extLst xmlns:a="http://schemas.openxmlformats.org/drawingml/2006/main">
+              <a:ext uri="{FF2B5EF4-FFF2-40B4-BE49-F238E27FC236}">
+                <a16:creationId xmlns:a16="http://schemas.microsoft.com/office/drawing/2014/main" id="{C930EF20-EE42-4EA5-B5F0-BBE5C6843AE1}"/>
               </a:ext>
             </a:extLst>
           </p:cNvPr>
@@ -4504,86 +4386,29 @@
                 <a:ea typeface="Malgun Gothic"/>
                 <a:cs typeface="Malgun Gothic"/>
               </a:rPr>
-              <a:t>Post #367 중심 종합</a:t>
-            </a:r>
-          </a:p>
-        </p:txBody>
-      </p:sp>
-      <p:sp>
-        <p:nvSpPr>
-          <p:cNvPr id="17" name="text">
-            <a:extLst xmlns:a="http://schemas.openxmlformats.org/drawingml/2006/main">
-              <a:ext uri="{FF2B5EF4-FFF2-40B4-BE49-F238E27FC236}">
-                <a16:creationId xmlns:a16="http://schemas.microsoft.com/office/drawing/2014/main" id="{17853242-DF26-4709-93B2-A9F85B1920B4}"/>
-              </a:ext>
-            </a:extLst>
-          </p:cNvPr>
-          <p:cNvSpPr>
-            <a:spLocks xmlns:a="http://schemas.openxmlformats.org/drawingml/2006/main" noGrp="1"/>
-          </p:cNvSpPr>
-          <p:nvPr/>
-        </p:nvSpPr>
-        <p:spPr>
-          <a:xfrm xmlns:a="http://schemas.openxmlformats.org/drawingml/2006/main">
-            <a:off x="7315200" y="3105150"/>
-            <a:ext cx="2381250" cy="552450"/>
-          </a:xfrm>
-          <a:prstGeom xmlns:a="http://schemas.openxmlformats.org/drawingml/2006/main" prst="rect">
-            <a:avLst/>
-          </a:prstGeom>
-        </p:spPr>
-        <p:txBody>
-          <a:bodyPr xmlns:a="http://schemas.openxmlformats.org/drawingml/2006/main" lIns="76200" tIns="38100" rIns="76200" bIns="38100" anchor="ctr">
-            <a:normAutofit fontScale="100000"/>
-          </a:bodyPr>
-          <a:lstStyle xmlns:a="http://schemas.openxmlformats.org/drawingml/2006/main"/>
-          <a:p xmlns:a="http://schemas.openxmlformats.org/drawingml/2006/main">
-            <a:pPr algn="ctr">
-              <a:lnSpc>
-                <a:spcPct val="108000"/>
-              </a:lnSpc>
-              <a:buNone/>
-              <a:defRPr sz="2325">
-                <a:solidFill>
-                  <a:srgbClr val="15803D"/>
-                </a:solidFill>
-                <a:latin typeface="Malgun Gothic"/>
-                <a:ea typeface="Malgun Gothic"/>
-                <a:cs typeface="Malgun Gothic"/>
-              </a:defRPr>
-            </a:pPr>
-            <a:r>
-              <a:rPr sz="2325" b="1">
-                <a:solidFill>
-                  <a:srgbClr val="15803D"/>
-                </a:solidFill>
-                <a:latin typeface="Malgun Gothic"/>
-                <a:ea typeface="Malgun Gothic"/>
-                <a:cs typeface="Malgun Gothic"/>
-              </a:rPr>
-              <a:t>Post #368</a:t>
-            </a:r>
-          </a:p>
-        </p:txBody>
-      </p:sp>
-      <p:sp>
-        <p:nvSpPr>
-          <p:cNvPr id="18" name="text">
-            <a:extLst xmlns:a="http://schemas.openxmlformats.org/drawingml/2006/main">
-              <a:ext uri="{FF2B5EF4-FFF2-40B4-BE49-F238E27FC236}">
-                <a16:creationId xmlns:a16="http://schemas.microsoft.com/office/drawing/2014/main" id="{E47677FF-38AA-4BA5-B0C0-6202945B3587}"/>
-              </a:ext>
-            </a:extLst>
-          </p:cNvPr>
-          <p:cNvSpPr>
-            <a:spLocks xmlns:a="http://schemas.openxmlformats.org/drawingml/2006/main" noGrp="1"/>
-          </p:cNvSpPr>
-          <p:nvPr/>
-        </p:nvSpPr>
-        <p:spPr>
-          <a:xfrm xmlns:a="http://schemas.openxmlformats.org/drawingml/2006/main">
-            <a:off x="7315200" y="3790950"/>
-            <a:ext cx="2381250" cy="704850"/>
+              <a:t>재시도 성공 기준</a:t>
+            </a:r>
+          </a:p>
+        </p:txBody>
+      </p:sp>
+      <p:sp>
+        <p:nvSpPr>
+          <p:cNvPr id="15" name="text">
+            <a:extLst xmlns:a="http://schemas.openxmlformats.org/drawingml/2006/main">
+              <a:ext uri="{FF2B5EF4-FFF2-40B4-BE49-F238E27FC236}">
+                <a16:creationId xmlns:a16="http://schemas.microsoft.com/office/drawing/2014/main" id="{E1B9BD06-C023-4E13-915B-4E2AF1731E10}"/>
+              </a:ext>
+            </a:extLst>
+          </p:cNvPr>
+          <p:cNvSpPr>
+            <a:spLocks xmlns:a="http://schemas.openxmlformats.org/drawingml/2006/main" noGrp="1"/>
+          </p:cNvSpPr>
+          <p:nvPr/>
+        </p:nvSpPr>
+        <p:spPr>
+          <a:xfrm xmlns:a="http://schemas.openxmlformats.org/drawingml/2006/main">
+            <a:off x="7315200" y="3333750"/>
+            <a:ext cx="2381250" cy="838200"/>
           </a:xfrm>
           <a:prstGeom xmlns:a="http://schemas.openxmlformats.org/drawingml/2006/main" prst="rect">
             <a:avLst/>
@@ -4618,18 +4443,18 @@
                 <a:ea typeface="Malgun Gothic"/>
                 <a:cs typeface="Malgun Gothic"/>
               </a:rPr>
-              <a:t>Version 1 유지
-최종 솔루션 지정</a:t>
-            </a:r>
-          </a:p>
-        </p:txBody>
-      </p:sp>
-      <p:sp>
-        <p:nvSpPr>
-          <p:cNvPr id="19" name="divider-3">
-            <a:extLst xmlns:a="http://schemas.openxmlformats.org/drawingml/2006/main">
-              <a:ext uri="{FF2B5EF4-FFF2-40B4-BE49-F238E27FC236}">
-                <a16:creationId xmlns:a16="http://schemas.microsoft.com/office/drawing/2014/main" id="{875FF103-275B-4CF8-A82F-2688885D5132}"/>
+              <a:t>스냅샷·복제 성공
+Permission denied 소멸</a:t>
+            </a:r>
+          </a:p>
+        </p:txBody>
+      </p:sp>
+      <p:sp>
+        <p:nvSpPr>
+          <p:cNvPr id="16" name="divider-3">
+            <a:extLst xmlns:a="http://schemas.openxmlformats.org/drawingml/2006/main">
+              <a:ext uri="{FF2B5EF4-FFF2-40B4-BE49-F238E27FC236}">
+                <a16:creationId xmlns:a16="http://schemas.microsoft.com/office/drawing/2014/main" id="{8473F37F-AB25-425D-A6E2-2E304D467953}"/>
               </a:ext>
             </a:extLst>
           </p:cNvPr>
@@ -4657,22 +4482,22 @@
       </p:sp>
       <p:sp>
         <p:nvSpPr>
-          <p:cNvPr id="20" name="text">
-            <a:extLst xmlns:a="http://schemas.openxmlformats.org/drawingml/2006/main">
-              <a:ext uri="{FF2B5EF4-FFF2-40B4-BE49-F238E27FC236}">
-                <a16:creationId xmlns:a16="http://schemas.microsoft.com/office/drawing/2014/main" id="{655A509C-6BA3-4A9A-908A-2980B9C17DE0}"/>
-              </a:ext>
-            </a:extLst>
-          </p:cNvPr>
-          <p:cNvSpPr>
-            <a:spLocks xmlns:a="http://schemas.openxmlformats.org/drawingml/2006/main" noGrp="1"/>
-          </p:cNvSpPr>
-          <p:nvPr/>
-        </p:nvSpPr>
-        <p:spPr>
-          <a:xfrm xmlns:a="http://schemas.openxmlformats.org/drawingml/2006/main">
-            <a:off x="10420350" y="1885950"/>
-            <a:ext cx="1066800" cy="704850"/>
+          <p:cNvPr id="17" name="text">
+            <a:extLst xmlns:a="http://schemas.openxmlformats.org/drawingml/2006/main">
+              <a:ext uri="{FF2B5EF4-FFF2-40B4-BE49-F238E27FC236}">
+                <a16:creationId xmlns:a16="http://schemas.microsoft.com/office/drawing/2014/main" id="{F891AB70-0183-46F3-9EBB-F89B07C387FF}"/>
+              </a:ext>
+            </a:extLst>
+          </p:cNvPr>
+          <p:cNvSpPr>
+            <a:spLocks xmlns:a="http://schemas.openxmlformats.org/drawingml/2006/main" noGrp="1"/>
+          </p:cNvSpPr>
+          <p:nvPr/>
+        </p:nvSpPr>
+        <p:spPr>
+          <a:xfrm xmlns:a="http://schemas.openxmlformats.org/drawingml/2006/main">
+            <a:off x="10382250" y="1866900"/>
+            <a:ext cx="1143000" cy="704850"/>
           </a:xfrm>
           <a:prstGeom xmlns:a="http://schemas.openxmlformats.org/drawingml/2006/main" prst="rect">
             <a:avLst/>
@@ -4680,7 +4505,7 @@
         </p:spPr>
         <p:txBody>
           <a:bodyPr xmlns:a="http://schemas.openxmlformats.org/drawingml/2006/main" lIns="76200" tIns="38100" rIns="76200" bIns="38100" anchor="ctr">
-            <a:normAutofit fontScale="90939"/>
+            <a:normAutofit fontScale="100000"/>
           </a:bodyPr>
           <a:lstStyle xmlns:a="http://schemas.openxmlformats.org/drawingml/2006/main"/>
           <a:p xmlns:a="http://schemas.openxmlformats.org/drawingml/2006/main">
@@ -4689,9 +4514,9 @@
                 <a:spcPct val="108000"/>
               </a:lnSpc>
               <a:buNone/>
-              <a:defRPr sz="4200">
-                <a:solidFill>
-                  <a:srgbClr val="B45309"/>
+              <a:defRPr sz="3000">
+                <a:solidFill>
+                  <a:srgbClr val="15803D"/>
                 </a:solidFill>
                 <a:latin typeface="Malgun Gothic"/>
                 <a:ea typeface="Malgun Gothic"/>
@@ -4699,37 +4524,37 @@
               </a:defRPr>
             </a:pPr>
             <a:r>
-              <a:rPr sz="4200" b="1">
-                <a:solidFill>
-                  <a:srgbClr val="B45309"/>
+              <a:rPr sz="3000" b="1">
+                <a:solidFill>
+                  <a:srgbClr val="15803D"/>
                 </a:solidFill>
                 <a:latin typeface="Malgun Gothic"/>
                 <a:ea typeface="Malgun Gothic"/>
                 <a:cs typeface="Malgun Gothic"/>
               </a:rPr>
-              <a:t>0</a:t>
-            </a:r>
-          </a:p>
-        </p:txBody>
-      </p:sp>
-      <p:sp>
-        <p:nvSpPr>
-          <p:cNvPr id="21" name="text">
-            <a:extLst xmlns:a="http://schemas.openxmlformats.org/drawingml/2006/main">
-              <a:ext uri="{FF2B5EF4-FFF2-40B4-BE49-F238E27FC236}">
-                <a16:creationId xmlns:a16="http://schemas.microsoft.com/office/drawing/2014/main" id="{36F67B1A-6634-498F-A8FC-149D8910054B}"/>
-              </a:ext>
-            </a:extLst>
-          </p:cNvPr>
-          <p:cNvSpPr>
-            <a:spLocks xmlns:a="http://schemas.openxmlformats.org/drawingml/2006/main" noGrp="1"/>
-          </p:cNvSpPr>
-          <p:nvPr/>
-        </p:nvSpPr>
-        <p:spPr>
-          <a:xfrm xmlns:a="http://schemas.openxmlformats.org/drawingml/2006/main">
-            <a:off x="10420350" y="2857500"/>
-            <a:ext cx="1066800" cy="857250"/>
+              <a:t>#377</a:t>
+            </a:r>
+          </a:p>
+        </p:txBody>
+      </p:sp>
+      <p:sp>
+        <p:nvSpPr>
+          <p:cNvPr id="18" name="text">
+            <a:extLst xmlns:a="http://schemas.openxmlformats.org/drawingml/2006/main">
+              <a:ext uri="{FF2B5EF4-FFF2-40B4-BE49-F238E27FC236}">
+                <a16:creationId xmlns:a16="http://schemas.microsoft.com/office/drawing/2014/main" id="{986058D4-A7CE-4625-A9C6-363B8BB5A3C3}"/>
+              </a:ext>
+            </a:extLst>
+          </p:cNvPr>
+          <p:cNvSpPr>
+            <a:spLocks xmlns:a="http://schemas.openxmlformats.org/drawingml/2006/main" noGrp="1"/>
+          </p:cNvSpPr>
+          <p:nvPr/>
+        </p:nvSpPr>
+        <p:spPr>
+          <a:xfrm xmlns:a="http://schemas.openxmlformats.org/drawingml/2006/main">
+            <a:off x="10267950" y="2724150"/>
+            <a:ext cx="1371600" cy="533400"/>
           </a:xfrm>
           <a:prstGeom xmlns:a="http://schemas.openxmlformats.org/drawingml/2006/main" prst="rect">
             <a:avLst/>
@@ -4746,7 +4571,7 @@
                 <a:spcPct val="108000"/>
               </a:lnSpc>
               <a:buNone/>
-              <a:defRPr sz="1500">
+              <a:defRPr sz="1425">
                 <a:solidFill>
                   <a:srgbClr val="0F172A"/>
                 </a:solidFill>
@@ -4756,7 +4581,7 @@
               </a:defRPr>
             </a:pPr>
             <a:r>
-              <a:rPr sz="1500" b="1">
+              <a:rPr sz="1425" b="1">
                 <a:solidFill>
                   <a:srgbClr val="0F172A"/>
                 </a:solidFill>
@@ -4764,30 +4589,29 @@
                 <a:ea typeface="Malgun Gothic"/>
                 <a:cs typeface="Malgun Gothic"/>
               </a:rPr>
-              <a:t>내부 근거
-노출 건수</a:t>
-            </a:r>
-          </a:p>
-        </p:txBody>
-      </p:sp>
-      <p:sp>
-        <p:nvSpPr>
-          <p:cNvPr id="22" name="text">
-            <a:extLst xmlns:a="http://schemas.openxmlformats.org/drawingml/2006/main">
-              <a:ext uri="{FF2B5EF4-FFF2-40B4-BE49-F238E27FC236}">
-                <a16:creationId xmlns:a16="http://schemas.microsoft.com/office/drawing/2014/main" id="{4D68D9EC-E4D1-4B66-90B0-07D438DBD45A}"/>
-              </a:ext>
-            </a:extLst>
-          </p:cNvPr>
-          <p:cNvSpPr>
-            <a:spLocks xmlns:a="http://schemas.openxmlformats.org/drawingml/2006/main" noGrp="1"/>
-          </p:cNvSpPr>
-          <p:nvPr/>
-        </p:nvSpPr>
-        <p:spPr>
-          <a:xfrm xmlns:a="http://schemas.openxmlformats.org/drawingml/2006/main">
-            <a:off x="10420350" y="3905250"/>
-            <a:ext cx="1066800" cy="590550"/>
+              <a:t>실제 정정 답변</a:t>
+            </a:r>
+          </a:p>
+        </p:txBody>
+      </p:sp>
+      <p:sp>
+        <p:nvSpPr>
+          <p:cNvPr id="19" name="text">
+            <a:extLst xmlns:a="http://schemas.openxmlformats.org/drawingml/2006/main">
+              <a:ext uri="{FF2B5EF4-FFF2-40B4-BE49-F238E27FC236}">
+                <a16:creationId xmlns:a16="http://schemas.microsoft.com/office/drawing/2014/main" id="{E83F70CD-C0AB-4575-A818-43E9B88675F8}"/>
+              </a:ext>
+            </a:extLst>
+          </p:cNvPr>
+          <p:cNvSpPr>
+            <a:spLocks xmlns:a="http://schemas.openxmlformats.org/drawingml/2006/main" noGrp="1"/>
+          </p:cNvSpPr>
+          <p:nvPr/>
+        </p:nvSpPr>
+        <p:spPr>
+          <a:xfrm xmlns:a="http://schemas.openxmlformats.org/drawingml/2006/main">
+            <a:off x="10382250" y="3638550"/>
+            <a:ext cx="1143000" cy="590550"/>
           </a:xfrm>
           <a:prstGeom xmlns:a="http://schemas.openxmlformats.org/drawingml/2006/main" prst="rect">
             <a:avLst/>
@@ -4795,7 +4619,7 @@
         </p:spPr>
         <p:txBody>
           <a:bodyPr xmlns:a="http://schemas.openxmlformats.org/drawingml/2006/main" lIns="76200" tIns="38100" rIns="76200" bIns="38100" anchor="ctr">
-            <a:normAutofit fontScale="94697"/>
+            <a:normAutofit fontScale="100000"/>
           </a:bodyPr>
           <a:lstStyle xmlns:a="http://schemas.openxmlformats.org/drawingml/2006/main"/>
           <a:p xmlns:a="http://schemas.openxmlformats.org/drawingml/2006/main">
@@ -4804,9 +4628,9 @@
                 <a:spcPct val="108000"/>
               </a:lnSpc>
               <a:buNone/>
-              <a:defRPr sz="3300">
-                <a:solidFill>
-                  <a:srgbClr val="B45309"/>
+              <a:defRPr sz="2850">
+                <a:solidFill>
+                  <a:srgbClr val="2563EB"/>
                 </a:solidFill>
                 <a:latin typeface="Malgun Gothic"/>
                 <a:ea typeface="Malgun Gothic"/>
@@ -4814,37 +4638,37 @@
               </a:defRPr>
             </a:pPr>
             <a:r>
-              <a:rPr sz="3300" b="1">
-                <a:solidFill>
-                  <a:srgbClr val="B45309"/>
+              <a:rPr sz="2850" b="1">
+                <a:solidFill>
+                  <a:srgbClr val="2563EB"/>
                 </a:solidFill>
                 <a:latin typeface="Malgun Gothic"/>
                 <a:ea typeface="Malgun Gothic"/>
                 <a:cs typeface="Malgun Gothic"/>
               </a:rPr>
-              <a:t>0</a:t>
-            </a:r>
-          </a:p>
-        </p:txBody>
-      </p:sp>
-      <p:sp>
-        <p:nvSpPr>
-          <p:cNvPr id="23" name="text">
-            <a:extLst xmlns:a="http://schemas.openxmlformats.org/drawingml/2006/main">
-              <a:ext uri="{FF2B5EF4-FFF2-40B4-BE49-F238E27FC236}">
-                <a16:creationId xmlns:a16="http://schemas.microsoft.com/office/drawing/2014/main" id="{B1F81CFB-F6F2-4612-8C1E-8441F866134F}"/>
-              </a:ext>
-            </a:extLst>
-          </p:cNvPr>
-          <p:cNvSpPr>
-            <a:spLocks xmlns:a="http://schemas.openxmlformats.org/drawingml/2006/main" noGrp="1"/>
-          </p:cNvSpPr>
-          <p:nvPr/>
-        </p:nvSpPr>
-        <p:spPr>
-          <a:xfrm xmlns:a="http://schemas.openxmlformats.org/drawingml/2006/main">
-            <a:off x="10248900" y="4572000"/>
-            <a:ext cx="1409700" cy="304800"/>
+              <a:t>223</a:t>
+            </a:r>
+          </a:p>
+        </p:txBody>
+      </p:sp>
+      <p:sp>
+        <p:nvSpPr>
+          <p:cNvPr id="20" name="text">
+            <a:extLst xmlns:a="http://schemas.openxmlformats.org/drawingml/2006/main">
+              <a:ext uri="{FF2B5EF4-FFF2-40B4-BE49-F238E27FC236}">
+                <a16:creationId xmlns:a16="http://schemas.microsoft.com/office/drawing/2014/main" id="{8425A30C-0994-4847-A756-26C589022636}"/>
+              </a:ext>
+            </a:extLst>
+          </p:cNvPr>
+          <p:cNvSpPr>
+            <a:spLocks xmlns:a="http://schemas.openxmlformats.org/drawingml/2006/main" noGrp="1"/>
+          </p:cNvSpPr>
+          <p:nvPr/>
+        </p:nvSpPr>
+        <p:spPr>
+          <a:xfrm xmlns:a="http://schemas.openxmlformats.org/drawingml/2006/main">
+            <a:off x="10267950" y="4362450"/>
+            <a:ext cx="1371600" cy="419100"/>
           </a:xfrm>
           <a:prstGeom xmlns:a="http://schemas.openxmlformats.org/drawingml/2006/main" prst="rect">
             <a:avLst/>
@@ -4879,7 +4703,7 @@
                 <a:ea typeface="Malgun Gothic"/>
                 <a:cs typeface="Malgun Gothic"/>
               </a:rPr>
-              <a:t>중복 KB 게시</a:t>
+              <a:t>전체 시험 통과</a:t>
             </a:r>
           </a:p>
         </p:txBody>
@@ -4887,7 +4711,7 @@
     </p:spTree>
     <p:extLst>
       <p:ext uri="{BB962C8B-B14F-4D97-AF65-F5344CB8AC3E}">
-        <p14:creationId xmlns:p14="http://schemas.microsoft.com/office/powerpoint/2010/main" val="2041703681"/>
+        <p14:creationId xmlns:p14="http://schemas.microsoft.com/office/powerpoint/2010/main" val="1571015885"/>
       </p:ext>
     </p:extLst>
   </p:cSld>
@@ -4911,7 +4735,7 @@
           <p:cNvPr id="10" name="background">
             <a:extLst xmlns:a="http://schemas.openxmlformats.org/drawingml/2006/main">
               <a:ext uri="{FF2B5EF4-FFF2-40B4-BE49-F238E27FC236}">
-                <a16:creationId xmlns:a16="http://schemas.microsoft.com/office/drawing/2014/main" id="{03E6DFBA-48AD-4873-8A13-80EEBB385998}"/>
+                <a16:creationId xmlns:a16="http://schemas.microsoft.com/office/drawing/2014/main" id="{7BEA324C-5186-4DA2-A50B-5F2E319FDA20}"/>
               </a:ext>
             </a:extLst>
           </p:cNvPr>
@@ -4942,7 +4766,7 @@
           <p:cNvPr id="2" name="closing">
             <a:extLst xmlns:a="http://schemas.openxmlformats.org/drawingml/2006/main">
               <a:ext uri="{FF2B5EF4-FFF2-40B4-BE49-F238E27FC236}">
-                <a16:creationId xmlns:a16="http://schemas.microsoft.com/office/drawing/2014/main" id="{683344D9-1466-4BE0-90C0-2324EC36D979}"/>
+                <a16:creationId xmlns:a16="http://schemas.microsoft.com/office/drawing/2014/main" id="{AC302F28-AD88-4353-A5CC-278E75EA54E7}"/>
               </a:ext>
             </a:extLst>
           </p:cNvPr>
@@ -4973,7 +4797,7 @@
           <p:cNvPr id="3" name="text">
             <a:extLst xmlns:a="http://schemas.openxmlformats.org/drawingml/2006/main">
               <a:ext uri="{FF2B5EF4-FFF2-40B4-BE49-F238E27FC236}">
-                <a16:creationId xmlns:a16="http://schemas.microsoft.com/office/drawing/2014/main" id="{6E48B9FC-043A-4ACD-BE85-FC3239764940}"/>
+                <a16:creationId xmlns:a16="http://schemas.microsoft.com/office/drawing/2014/main" id="{4AC8240B-EC69-4BD7-9094-49E871B94BC2}"/>
               </a:ext>
             </a:extLst>
           </p:cNvPr>
@@ -5030,7 +4854,7 @@
           <p:cNvPr id="4" name="text">
             <a:extLst xmlns:a="http://schemas.openxmlformats.org/drawingml/2006/main">
               <a:ext uri="{FF2B5EF4-FFF2-40B4-BE49-F238E27FC236}">
-                <a16:creationId xmlns:a16="http://schemas.microsoft.com/office/drawing/2014/main" id="{4F8CA607-30A1-40AA-A201-82CBC890258E}"/>
+                <a16:creationId xmlns:a16="http://schemas.microsoft.com/office/drawing/2014/main" id="{D54E9D6F-7654-4968-8F88-11E063F3889A}"/>
               </a:ext>
             </a:extLst>
           </p:cNvPr>
@@ -5088,7 +4912,7 @@
           <p:cNvPr id="5" name="left-rule">
             <a:extLst xmlns:a="http://schemas.openxmlformats.org/drawingml/2006/main">
               <a:ext uri="{FF2B5EF4-FFF2-40B4-BE49-F238E27FC236}">
-                <a16:creationId xmlns:a16="http://schemas.microsoft.com/office/drawing/2014/main" id="{8545E848-7F5A-4FCF-A982-C0F167D22DC6}"/>
+                <a16:creationId xmlns:a16="http://schemas.microsoft.com/office/drawing/2014/main" id="{84909AA3-6603-441B-86A9-3EBBF577C010}"/>
               </a:ext>
             </a:extLst>
           </p:cNvPr>
@@ -5119,7 +4943,7 @@
           <p:cNvPr id="6" name="text">
             <a:extLst xmlns:a="http://schemas.openxmlformats.org/drawingml/2006/main">
               <a:ext uri="{FF2B5EF4-FFF2-40B4-BE49-F238E27FC236}">
-                <a16:creationId xmlns:a16="http://schemas.microsoft.com/office/drawing/2014/main" id="{632CD3B5-CBAA-4BBF-B1D6-B65763D690EC}"/>
+                <a16:creationId xmlns:a16="http://schemas.microsoft.com/office/drawing/2014/main" id="{85B2CDA4-2D76-4F40-B1E3-A831AD75BDFD}"/>
               </a:ext>
             </a:extLst>
           </p:cNvPr>
@@ -5166,7 +4990,7 @@
                 <a:ea typeface="Malgun Gothic"/>
                 <a:cs typeface="Malgun Gothic"/>
               </a:rPr>
-              <a:t>AI Gateway 0.14.2 · Migration 0013 · OpenAI</a:t>
+              <a:t>AI Gateway 0.14.3 · OpenAI · 반복 답변 차단</a:t>
             </a:r>
           </a:p>
         </p:txBody>
@@ -5176,7 +5000,7 @@
           <p:cNvPr id="7" name="text">
             <a:extLst xmlns:a="http://schemas.openxmlformats.org/drawingml/2006/main">
               <a:ext uri="{FF2B5EF4-FFF2-40B4-BE49-F238E27FC236}">
-                <a16:creationId xmlns:a16="http://schemas.microsoft.com/office/drawing/2014/main" id="{0A8E27D0-19B8-4548-9E86-78F8DFC690D1}"/>
+                <a16:creationId xmlns:a16="http://schemas.microsoft.com/office/drawing/2014/main" id="{B357EEBB-4499-4146-81C0-54558A359FE2}"/>
               </a:ext>
             </a:extLst>
           </p:cNvPr>
@@ -5233,7 +5057,7 @@
           <p:cNvPr id="8" name="text">
             <a:extLst xmlns:a="http://schemas.openxmlformats.org/drawingml/2006/main">
               <a:ext uri="{FF2B5EF4-FFF2-40B4-BE49-F238E27FC236}">
-                <a16:creationId xmlns:a16="http://schemas.microsoft.com/office/drawing/2014/main" id="{BAA97524-9BA8-43F2-BC3D-BFEA4A9D7457}"/>
+                <a16:creationId xmlns:a16="http://schemas.microsoft.com/office/drawing/2014/main" id="{2ABF70C2-83E6-4467-BC4B-70050F27CA74}"/>
               </a:ext>
             </a:extLst>
           </p:cNvPr>
@@ -5280,7 +5104,7 @@
                 <a:ea typeface="Malgun Gothic"/>
                 <a:cs typeface="Malgun Gothic"/>
               </a:rPr>
-              <a:t>전체 DB 백업 · 루트 여유 927 GB · 보호 서비스 무변경</a:t>
+              <a:t>전체 DB 백업 · 루트 여유 921 GB · 보호 서비스 무변경</a:t>
             </a:r>
           </a:p>
         </p:txBody>
@@ -5290,7 +5114,7 @@
           <p:cNvPr id="9" name="text">
             <a:extLst xmlns:a="http://schemas.openxmlformats.org/drawingml/2006/main">
               <a:ext uri="{FF2B5EF4-FFF2-40B4-BE49-F238E27FC236}">
-                <a16:creationId xmlns:a16="http://schemas.microsoft.com/office/drawing/2014/main" id="{B6600A65-0040-4328-A8B0-D7FE61E20BEA}"/>
+                <a16:creationId xmlns:a16="http://schemas.microsoft.com/office/drawing/2014/main" id="{BA0AA834-0B82-48DF-9AD7-41BC83B2CFB3}"/>
               </a:ext>
             </a:extLst>
           </p:cNvPr>
@@ -5345,7 +5169,7 @@
     </p:spTree>
     <p:extLst>
       <p:ext uri="{BB962C8B-B14F-4D97-AF65-F5344CB8AC3E}">
-        <p14:creationId xmlns:p14="http://schemas.microsoft.com/office/powerpoint/2010/main" val="740802506"/>
+        <p14:creationId xmlns:p14="http://schemas.microsoft.com/office/powerpoint/2010/main" val="677423588"/>
       </p:ext>
     </p:extLst>
   </p:cSld>

--- a/output/presentation/techflow-community-auto-publish-kb.pptx
+++ b/output/presentation/techflow-community-auto-publish-kb.pptx
@@ -2,17 +2,17 @@
 <file path=ppt/presentation.xml><?xml version="1.0" encoding="utf-8"?>
 <p:presentation xmlns:p="http://schemas.openxmlformats.org/presentationml/2006/main">
   <p:sldMasterIdLst>
-    <p:sldMasterId xmlns:r="http://schemas.openxmlformats.org/officeDocument/2006/relationships" id="2147483648" r:id="Rbcdc592acd024237"/>
+    <p:sldMasterId xmlns:r="http://schemas.openxmlformats.org/officeDocument/2006/relationships" id="2147483648" r:id="R1ab0b42b401d435a"/>
   </p:sldMasterIdLst>
   <p:notesMasterIdLst>
-    <p:notesMasterId xmlns:r="http://schemas.openxmlformats.org/officeDocument/2006/relationships" r:id="Re825d9e9d33c4891"/>
+    <p:notesMasterId xmlns:r="http://schemas.openxmlformats.org/officeDocument/2006/relationships" r:id="Ra26a5633cb8a4ab1"/>
   </p:notesMasterIdLst>
   <p:sldIdLst>
-    <p:sldId xmlns:r="http://schemas.openxmlformats.org/officeDocument/2006/relationships" id="256" r:id="R1fcdc7b3e6ca45fb"/>
-    <p:sldId xmlns:r="http://schemas.openxmlformats.org/officeDocument/2006/relationships" id="257" r:id="Rb390837117b84f66"/>
-    <p:sldId xmlns:r="http://schemas.openxmlformats.org/officeDocument/2006/relationships" id="258" r:id="Rd407531c05fa401d"/>
-    <p:sldId xmlns:r="http://schemas.openxmlformats.org/officeDocument/2006/relationships" id="259" r:id="R61c80380c7ca42f3"/>
-    <p:sldId xmlns:r="http://schemas.openxmlformats.org/officeDocument/2006/relationships" id="260" r:id="R82934bad8b34411d"/>
+    <p:sldId xmlns:r="http://schemas.openxmlformats.org/officeDocument/2006/relationships" id="256" r:id="R4364056884314940"/>
+    <p:sldId xmlns:r="http://schemas.openxmlformats.org/officeDocument/2006/relationships" id="257" r:id="Rc6e95d43d1614cf9"/>
+    <p:sldId xmlns:r="http://schemas.openxmlformats.org/officeDocument/2006/relationships" id="258" r:id="R27b12a50480e49cd"/>
+    <p:sldId xmlns:r="http://schemas.openxmlformats.org/officeDocument/2006/relationships" id="259" r:id="Rcf1a3811a4174740"/>
+    <p:sldId xmlns:r="http://schemas.openxmlformats.org/officeDocument/2006/relationships" id="260" r:id="R33cd3317b03a4250"/>
   </p:sldIdLst>
   <p:sldSz cx="12192000" cy="6858000"/>
   <p:notesSz cx="6858000" cy="9144000"/>
@@ -681,12 +681,12 @@
           </a:p>
           <a:p xmlns:a="http://schemas.openxmlformats.org/drawingml/2006/main">
             <a:r>
-              <a:t>- docs/reports/issue-69-community-auto-publish-kb-validation.md#3.4</a:t>
-            </a:r>
-          </a:p>
-          <a:p xmlns:a="http://schemas.openxmlformats.org/drawingml/2006/main">
-            <a:r>
-              <a:t>- https://community.ablecloud.io/d/166/377</a:t>
+              <a:t>- docs/reports/issue-69-community-auto-publish-kb-validation.md#3.5</a:t>
+            </a:r>
+          </a:p>
+          <a:p xmlns:a="http://schemas.openxmlformats.org/drawingml/2006/main">
+            <a:r>
+              <a:t>- https://community.ablecloud.io/d/167/381</a:t>
             </a:r>
           </a:p>
         </p:txBody>
@@ -834,7 +834,7 @@
   </p:cSld>
   <p:clrMap bg1="lt1" tx1="dk1" bg2="lt2" tx2="dk2" accent1="accent1" accent2="accent2" accent3="accent3" accent4="accent4" accent5="accent5" accent6="accent6" hlink="hlink" folHlink="folHlink"/>
   <p:sldLayoutIdLst>
-    <p:sldLayoutId xmlns:r="http://schemas.openxmlformats.org/officeDocument/2006/relationships" id="2147483649" r:id="R5b29123ecf7e4445"/>
+    <p:sldLayoutId xmlns:r="http://schemas.openxmlformats.org/officeDocument/2006/relationships" id="2147483649" r:id="R298f716cc171444f"/>
   </p:sldLayoutIdLst>
   <p:txStyles>
     <p:titleStyle>
@@ -1378,7 +1378,7 @@
           <p:cNvPr id="9" name="background">
             <a:extLst xmlns:a="http://schemas.openxmlformats.org/drawingml/2006/main">
               <a:ext uri="{FF2B5EF4-FFF2-40B4-BE49-F238E27FC236}">
-                <a16:creationId xmlns:a16="http://schemas.microsoft.com/office/drawing/2014/main" id="{E3861B12-9B90-4262-B7E4-233FD56D68E6}"/>
+                <a16:creationId xmlns:a16="http://schemas.microsoft.com/office/drawing/2014/main" id="{0EBD1901-1015-4E08-980C-09737F051C50}"/>
               </a:ext>
             </a:extLst>
           </p:cNvPr>
@@ -1409,7 +1409,7 @@
           <p:cNvPr id="2" name="cover">
             <a:extLst xmlns:a="http://schemas.openxmlformats.org/drawingml/2006/main">
               <a:ext uri="{FF2B5EF4-FFF2-40B4-BE49-F238E27FC236}">
-                <a16:creationId xmlns:a16="http://schemas.microsoft.com/office/drawing/2014/main" id="{DE730D82-0E08-4419-B978-0901A305246A}"/>
+                <a16:creationId xmlns:a16="http://schemas.microsoft.com/office/drawing/2014/main" id="{ED4272D9-8873-447F-B1C0-123552E79D7C}"/>
               </a:ext>
             </a:extLst>
           </p:cNvPr>
@@ -1440,7 +1440,7 @@
           <p:cNvPr id="3" name="text">
             <a:extLst xmlns:a="http://schemas.openxmlformats.org/drawingml/2006/main">
               <a:ext uri="{FF2B5EF4-FFF2-40B4-BE49-F238E27FC236}">
-                <a16:creationId xmlns:a16="http://schemas.microsoft.com/office/drawing/2014/main" id="{4F266D21-8332-4A1B-A6FD-8C1A5C06F9ED}"/>
+                <a16:creationId xmlns:a16="http://schemas.microsoft.com/office/drawing/2014/main" id="{DD2F82A4-B4CE-4ADE-AC8F-92B902A60ED6}"/>
               </a:ext>
             </a:extLst>
           </p:cNvPr>
@@ -1497,7 +1497,7 @@
           <p:cNvPr id="4" name="text">
             <a:extLst xmlns:a="http://schemas.openxmlformats.org/drawingml/2006/main">
               <a:ext uri="{FF2B5EF4-FFF2-40B4-BE49-F238E27FC236}">
-                <a16:creationId xmlns:a16="http://schemas.microsoft.com/office/drawing/2014/main" id="{C4CAD0F9-B10A-4224-8067-786C6ABF0317}"/>
+                <a16:creationId xmlns:a16="http://schemas.microsoft.com/office/drawing/2014/main" id="{8B1772F2-07DB-4327-BD28-3B99F21A9BCE}"/>
               </a:ext>
             </a:extLst>
           </p:cNvPr>
@@ -1555,7 +1555,7 @@
           <p:cNvPr id="5" name="text">
             <a:extLst xmlns:a="http://schemas.openxmlformats.org/drawingml/2006/main">
               <a:ext uri="{FF2B5EF4-FFF2-40B4-BE49-F238E27FC236}">
-                <a16:creationId xmlns:a16="http://schemas.microsoft.com/office/drawing/2014/main" id="{3FD07A48-050A-46A7-8F6B-9E8CE9DA51C1}"/>
+                <a16:creationId xmlns:a16="http://schemas.microsoft.com/office/drawing/2014/main" id="{C0B432E8-E39A-4115-B532-459B338DE1DF}"/>
               </a:ext>
             </a:extLst>
           </p:cNvPr>
@@ -1612,7 +1612,7 @@
           <p:cNvPr id="6" name="result">
             <a:extLst xmlns:a="http://schemas.openxmlformats.org/drawingml/2006/main">
               <a:ext uri="{FF2B5EF4-FFF2-40B4-BE49-F238E27FC236}">
-                <a16:creationId xmlns:a16="http://schemas.microsoft.com/office/drawing/2014/main" id="{4F04554B-96CA-4E89-ACDD-50E6BC674DC3}"/>
+                <a16:creationId xmlns:a16="http://schemas.microsoft.com/office/drawing/2014/main" id="{E7F0ECE1-7377-4B04-9631-E6CF4B57535D}"/>
               </a:ext>
             </a:extLst>
           </p:cNvPr>
@@ -1643,7 +1643,7 @@
           <p:cNvPr id="7" name="text">
             <a:extLst xmlns:a="http://schemas.openxmlformats.org/drawingml/2006/main">
               <a:ext uri="{FF2B5EF4-FFF2-40B4-BE49-F238E27FC236}">
-                <a16:creationId xmlns:a16="http://schemas.microsoft.com/office/drawing/2014/main" id="{3D9D282C-F44A-4369-81B0-32464F461455}"/>
+                <a16:creationId xmlns:a16="http://schemas.microsoft.com/office/drawing/2014/main" id="{60D5782C-3E41-40A8-A465-3860B7DCC858}"/>
               </a:ext>
             </a:extLst>
           </p:cNvPr>
@@ -1690,7 +1690,7 @@
                 <a:ea typeface="Malgun Gothic"/>
                 <a:cs typeface="Malgun Gothic"/>
               </a:rPr>
-              <a:t>AI Gateway 0.14.3</a:t>
+              <a:t>AI Gateway 0.14.4</a:t>
             </a:r>
           </a:p>
         </p:txBody>
@@ -1700,7 +1700,7 @@
           <p:cNvPr id="8" name="text">
             <a:extLst xmlns:a="http://schemas.openxmlformats.org/drawingml/2006/main">
               <a:ext uri="{FF2B5EF4-FFF2-40B4-BE49-F238E27FC236}">
-                <a16:creationId xmlns:a16="http://schemas.microsoft.com/office/drawing/2014/main" id="{9CD21798-4E97-4E09-BEA4-1389AACF5CF3}"/>
+                <a16:creationId xmlns:a16="http://schemas.microsoft.com/office/drawing/2014/main" id="{C1280437-0720-4335-9BFD-2290E9DBBF5B}"/>
               </a:ext>
             </a:extLst>
           </p:cNvPr>
@@ -1755,7 +1755,7 @@
     </p:spTree>
     <p:extLst>
       <p:ext uri="{BB962C8B-B14F-4D97-AF65-F5344CB8AC3E}">
-        <p14:creationId xmlns:p14="http://schemas.microsoft.com/office/powerpoint/2010/main" val="166103454"/>
+        <p14:creationId xmlns:p14="http://schemas.microsoft.com/office/powerpoint/2010/main" val="188160651"/>
       </p:ext>
     </p:extLst>
   </p:cSld>
@@ -1779,7 +1779,7 @@
           <p:cNvPr id="17" name="background">
             <a:extLst xmlns:a="http://schemas.openxmlformats.org/drawingml/2006/main">
               <a:ext uri="{FF2B5EF4-FFF2-40B4-BE49-F238E27FC236}">
-                <a16:creationId xmlns:a16="http://schemas.microsoft.com/office/drawing/2014/main" id="{C6EB3B9E-FA83-4F13-864B-7A077A96D7CE}"/>
+                <a16:creationId xmlns:a16="http://schemas.microsoft.com/office/drawing/2014/main" id="{1BF1BEA4-615F-4E95-BA63-C2EBD20832FE}"/>
               </a:ext>
             </a:extLst>
           </p:cNvPr>
@@ -1810,7 +1810,7 @@
           <p:cNvPr id="2" name="text">
             <a:extLst xmlns:a="http://schemas.openxmlformats.org/drawingml/2006/main">
               <a:ext uri="{FF2B5EF4-FFF2-40B4-BE49-F238E27FC236}">
-                <a16:creationId xmlns:a16="http://schemas.microsoft.com/office/drawing/2014/main" id="{2B9BC606-2E7A-4650-81EB-19A957C6FEA1}"/>
+                <a16:creationId xmlns:a16="http://schemas.microsoft.com/office/drawing/2014/main" id="{61267398-603F-4FE8-9271-ADAFBD5ED3BC}"/>
               </a:ext>
             </a:extLst>
           </p:cNvPr>
@@ -1867,7 +1867,7 @@
           <p:cNvPr id="3" name="rule">
             <a:extLst xmlns:a="http://schemas.openxmlformats.org/drawingml/2006/main">
               <a:ext uri="{FF2B5EF4-FFF2-40B4-BE49-F238E27FC236}">
-                <a16:creationId xmlns:a16="http://schemas.microsoft.com/office/drawing/2014/main" id="{EAC46E5C-D0DC-4987-872F-242D09C6B84A}"/>
+                <a16:creationId xmlns:a16="http://schemas.microsoft.com/office/drawing/2014/main" id="{FE004980-4F6B-450C-896A-87353C8C2760}"/>
               </a:ext>
             </a:extLst>
           </p:cNvPr>
@@ -1898,7 +1898,7 @@
           <p:cNvPr id="4" name="page">
             <a:extLst xmlns:a="http://schemas.openxmlformats.org/drawingml/2006/main">
               <a:ext uri="{FF2B5EF4-FFF2-40B4-BE49-F238E27FC236}">
-                <a16:creationId xmlns:a16="http://schemas.microsoft.com/office/drawing/2014/main" id="{6F9A27FE-D15C-4741-8164-E430D04FF2DC}"/>
+                <a16:creationId xmlns:a16="http://schemas.microsoft.com/office/drawing/2014/main" id="{3C3F3EA0-5E2F-4046-9356-795B17FFBD83}"/>
               </a:ext>
             </a:extLst>
           </p:cNvPr>
@@ -1955,7 +1955,7 @@
           <p:cNvPr id="5" name="before">
             <a:extLst xmlns:a="http://schemas.openxmlformats.org/drawingml/2006/main">
               <a:ext uri="{FF2B5EF4-FFF2-40B4-BE49-F238E27FC236}">
-                <a16:creationId xmlns:a16="http://schemas.microsoft.com/office/drawing/2014/main" id="{48A6BE8E-DBB9-4C22-A985-73798FBE1307}"/>
+                <a16:creationId xmlns:a16="http://schemas.microsoft.com/office/drawing/2014/main" id="{A9BB6B1B-465B-4A4E-91EB-3364DFE4430F}"/>
               </a:ext>
             </a:extLst>
           </p:cNvPr>
@@ -1988,7 +1988,7 @@
           <p:cNvPr id="6" name="text">
             <a:extLst xmlns:a="http://schemas.openxmlformats.org/drawingml/2006/main">
               <a:ext uri="{FF2B5EF4-FFF2-40B4-BE49-F238E27FC236}">
-                <a16:creationId xmlns:a16="http://schemas.microsoft.com/office/drawing/2014/main" id="{F9050E40-8C16-4467-8BCA-71E6CDF850BB}"/>
+                <a16:creationId xmlns:a16="http://schemas.microsoft.com/office/drawing/2014/main" id="{A783DEAC-DF7B-4AC7-98F4-5B8DE4F38252}"/>
               </a:ext>
             </a:extLst>
           </p:cNvPr>
@@ -2045,7 +2045,7 @@
           <p:cNvPr id="7" name="text">
             <a:extLst xmlns:a="http://schemas.openxmlformats.org/drawingml/2006/main">
               <a:ext uri="{FF2B5EF4-FFF2-40B4-BE49-F238E27FC236}">
-                <a16:creationId xmlns:a16="http://schemas.microsoft.com/office/drawing/2014/main" id="{770CC320-F512-4EE5-A6EB-00083530F5AF}"/>
+                <a16:creationId xmlns:a16="http://schemas.microsoft.com/office/drawing/2014/main" id="{F36897E5-6646-421E-BDA6-C7FDEA0E602B}"/>
               </a:ext>
             </a:extLst>
           </p:cNvPr>
@@ -2127,7 +2127,7 @@
           <p:cNvPr id="9" name="ongoing">
             <a:extLst xmlns:a="http://schemas.openxmlformats.org/drawingml/2006/main">
               <a:ext uri="{FF2B5EF4-FFF2-40B4-BE49-F238E27FC236}">
-                <a16:creationId xmlns:a16="http://schemas.microsoft.com/office/drawing/2014/main" id="{E6862FF8-B7C3-499A-9A75-DC59426880F6}"/>
+                <a16:creationId xmlns:a16="http://schemas.microsoft.com/office/drawing/2014/main" id="{D14F551F-47EF-43FF-B3F8-95A25E87DDB4}"/>
               </a:ext>
             </a:extLst>
           </p:cNvPr>
@@ -2160,7 +2160,7 @@
           <p:cNvPr id="10" name="text">
             <a:extLst xmlns:a="http://schemas.openxmlformats.org/drawingml/2006/main">
               <a:ext uri="{FF2B5EF4-FFF2-40B4-BE49-F238E27FC236}">
-                <a16:creationId xmlns:a16="http://schemas.microsoft.com/office/drawing/2014/main" id="{F8730F62-35A6-4EA5-A6DF-5798CB11E27D}"/>
+                <a16:creationId xmlns:a16="http://schemas.microsoft.com/office/drawing/2014/main" id="{9B4F3167-E51A-4222-A8B5-21137DA80FFB}"/>
               </a:ext>
             </a:extLst>
           </p:cNvPr>
@@ -2217,7 +2217,7 @@
           <p:cNvPr id="11" name="text">
             <a:extLst xmlns:a="http://schemas.openxmlformats.org/drawingml/2006/main">
               <a:ext uri="{FF2B5EF4-FFF2-40B4-BE49-F238E27FC236}">
-                <a16:creationId xmlns:a16="http://schemas.microsoft.com/office/drawing/2014/main" id="{C36ECE00-180F-4897-A685-722F903CA2EE}"/>
+                <a16:creationId xmlns:a16="http://schemas.microsoft.com/office/drawing/2014/main" id="{4A51073D-6860-4368-8331-D66607A2910D}"/>
               </a:ext>
             </a:extLst>
           </p:cNvPr>
@@ -2265,8 +2265,8 @@
                 <a:cs typeface="Malgun Gothic"/>
               </a:rPr>
               <a:t>해결책과 CLI 우선
-성공 기준 제시
-실패 시에만 자료 요청
+명령은 코드 블록
+모든 사람의 후속 질문
 반복 답변 게시 차단</a:t>
             </a:r>
           </a:p>
@@ -2299,7 +2299,7 @@
           <p:cNvPr id="13" name="final">
             <a:extLst xmlns:a="http://schemas.openxmlformats.org/drawingml/2006/main">
               <a:ext uri="{FF2B5EF4-FFF2-40B4-BE49-F238E27FC236}">
-                <a16:creationId xmlns:a16="http://schemas.microsoft.com/office/drawing/2014/main" id="{C2E7507E-C1CC-45C4-B163-01E9511FC1DF}"/>
+                <a16:creationId xmlns:a16="http://schemas.microsoft.com/office/drawing/2014/main" id="{EC728098-1984-445C-89D6-0E70142ABA9E}"/>
               </a:ext>
             </a:extLst>
           </p:cNvPr>
@@ -2332,7 +2332,7 @@
           <p:cNvPr id="14" name="text">
             <a:extLst xmlns:a="http://schemas.openxmlformats.org/drawingml/2006/main">
               <a:ext uri="{FF2B5EF4-FFF2-40B4-BE49-F238E27FC236}">
-                <a16:creationId xmlns:a16="http://schemas.microsoft.com/office/drawing/2014/main" id="{A113009C-95D8-49E2-9D99-9378D9D5AA95}"/>
+                <a16:creationId xmlns:a16="http://schemas.microsoft.com/office/drawing/2014/main" id="{24CD5A10-40D3-403B-851C-F4F208688150}"/>
               </a:ext>
             </a:extLst>
           </p:cNvPr>
@@ -2389,7 +2389,7 @@
           <p:cNvPr id="15" name="text">
             <a:extLst xmlns:a="http://schemas.openxmlformats.org/drawingml/2006/main">
               <a:ext uri="{FF2B5EF4-FFF2-40B4-BE49-F238E27FC236}">
-                <a16:creationId xmlns:a16="http://schemas.microsoft.com/office/drawing/2014/main" id="{1FE220CA-9910-4DCB-B997-D823D5363A92}"/>
+                <a16:creationId xmlns:a16="http://schemas.microsoft.com/office/drawing/2014/main" id="{0D678FE5-228A-4B0C-8B1E-65043853ED30}"/>
               </a:ext>
             </a:extLst>
           </p:cNvPr>
@@ -2448,7 +2448,7 @@
           <p:cNvPr id="16" name="text">
             <a:extLst xmlns:a="http://schemas.openxmlformats.org/drawingml/2006/main">
               <a:ext uri="{FF2B5EF4-FFF2-40B4-BE49-F238E27FC236}">
-                <a16:creationId xmlns:a16="http://schemas.microsoft.com/office/drawing/2014/main" id="{1F0DCBCC-490A-44FF-BCED-E365570B2226}"/>
+                <a16:creationId xmlns:a16="http://schemas.microsoft.com/office/drawing/2014/main" id="{1DCDDB5B-B800-4FE2-BD3F-0EF3C73CC75C}"/>
               </a:ext>
             </a:extLst>
           </p:cNvPr>
@@ -2503,7 +2503,7 @@
     </p:spTree>
     <p:extLst>
       <p:ext uri="{BB962C8B-B14F-4D97-AF65-F5344CB8AC3E}">
-        <p14:creationId xmlns:p14="http://schemas.microsoft.com/office/powerpoint/2010/main" val="1031505683"/>
+        <p14:creationId xmlns:p14="http://schemas.microsoft.com/office/powerpoint/2010/main" val="1892961925"/>
       </p:ext>
     </p:extLst>
   </p:cSld>
@@ -2527,7 +2527,7 @@
           <p:cNvPr id="26" name="background">
             <a:extLst xmlns:a="http://schemas.openxmlformats.org/drawingml/2006/main">
               <a:ext uri="{FF2B5EF4-FFF2-40B4-BE49-F238E27FC236}">
-                <a16:creationId xmlns:a16="http://schemas.microsoft.com/office/drawing/2014/main" id="{B1096CE3-BE7B-48B6-AECE-8E95EC2D5A1F}"/>
+                <a16:creationId xmlns:a16="http://schemas.microsoft.com/office/drawing/2014/main" id="{A7A0E6A7-9FAC-4486-BDAE-B5166BCB866A}"/>
               </a:ext>
             </a:extLst>
           </p:cNvPr>
@@ -2558,7 +2558,7 @@
           <p:cNvPr id="2" name="text">
             <a:extLst xmlns:a="http://schemas.openxmlformats.org/drawingml/2006/main">
               <a:ext uri="{FF2B5EF4-FFF2-40B4-BE49-F238E27FC236}">
-                <a16:creationId xmlns:a16="http://schemas.microsoft.com/office/drawing/2014/main" id="{1011E44B-9436-4177-9387-F430BD235120}"/>
+                <a16:creationId xmlns:a16="http://schemas.microsoft.com/office/drawing/2014/main" id="{E7F26F23-034B-4C99-AD34-41B43D8F8F20}"/>
               </a:ext>
             </a:extLst>
           </p:cNvPr>
@@ -2615,7 +2615,7 @@
           <p:cNvPr id="3" name="rule">
             <a:extLst xmlns:a="http://schemas.openxmlformats.org/drawingml/2006/main">
               <a:ext uri="{FF2B5EF4-FFF2-40B4-BE49-F238E27FC236}">
-                <a16:creationId xmlns:a16="http://schemas.microsoft.com/office/drawing/2014/main" id="{E64B82FE-1B65-4AFF-9989-34F2E6EC4E4B}"/>
+                <a16:creationId xmlns:a16="http://schemas.microsoft.com/office/drawing/2014/main" id="{4BFCCE85-188B-46FE-88B3-486E78B891A3}"/>
               </a:ext>
             </a:extLst>
           </p:cNvPr>
@@ -2646,7 +2646,7 @@
           <p:cNvPr id="4" name="page">
             <a:extLst xmlns:a="http://schemas.openxmlformats.org/drawingml/2006/main">
               <a:ext uri="{FF2B5EF4-FFF2-40B4-BE49-F238E27FC236}">
-                <a16:creationId xmlns:a16="http://schemas.microsoft.com/office/drawing/2014/main" id="{7B430200-FD6C-4D8A-9536-8E52DB7EAEB9}"/>
+                <a16:creationId xmlns:a16="http://schemas.microsoft.com/office/drawing/2014/main" id="{9060986C-634E-491D-AF8F-12412A45D8B4}"/>
               </a:ext>
             </a:extLst>
           </p:cNvPr>
@@ -2725,7 +2725,7 @@
           <p:cNvPr id="6" name="flow-0">
             <a:extLst xmlns:a="http://schemas.openxmlformats.org/drawingml/2006/main">
               <a:ext uri="{FF2B5EF4-FFF2-40B4-BE49-F238E27FC236}">
-                <a16:creationId xmlns:a16="http://schemas.microsoft.com/office/drawing/2014/main" id="{E459212F-A2A0-43F9-AC81-8615D1EFD71B}"/>
+                <a16:creationId xmlns:a16="http://schemas.microsoft.com/office/drawing/2014/main" id="{FA99AD45-1D2B-4186-A286-6C5B348D0D96}"/>
               </a:ext>
             </a:extLst>
           </p:cNvPr>
@@ -2758,7 +2758,7 @@
           <p:cNvPr id="7" name="text">
             <a:extLst xmlns:a="http://schemas.openxmlformats.org/drawingml/2006/main">
               <a:ext uri="{FF2B5EF4-FFF2-40B4-BE49-F238E27FC236}">
-                <a16:creationId xmlns:a16="http://schemas.microsoft.com/office/drawing/2014/main" id="{8728F6BC-64F5-4782-8D4D-D7ABB03F9B0F}"/>
+                <a16:creationId xmlns:a16="http://schemas.microsoft.com/office/drawing/2014/main" id="{56843DF6-A7D4-487A-861B-599268A903AD}"/>
               </a:ext>
             </a:extLst>
           </p:cNvPr>
@@ -2815,7 +2815,7 @@
           <p:cNvPr id="8" name="text">
             <a:extLst xmlns:a="http://schemas.openxmlformats.org/drawingml/2006/main">
               <a:ext uri="{FF2B5EF4-FFF2-40B4-BE49-F238E27FC236}">
-                <a16:creationId xmlns:a16="http://schemas.microsoft.com/office/drawing/2014/main" id="{5428534C-47D9-4942-BED3-4C8D7BB9109B}"/>
+                <a16:creationId xmlns:a16="http://schemas.microsoft.com/office/drawing/2014/main" id="{9AB47949-6070-4FB1-B3ED-159C8293972D}"/>
               </a:ext>
             </a:extLst>
           </p:cNvPr>
@@ -2872,7 +2872,7 @@
           <p:cNvPr id="9" name="text">
             <a:extLst xmlns:a="http://schemas.openxmlformats.org/drawingml/2006/main">
               <a:ext uri="{FF2B5EF4-FFF2-40B4-BE49-F238E27FC236}">
-                <a16:creationId xmlns:a16="http://schemas.microsoft.com/office/drawing/2014/main" id="{EAD15CE5-34E5-4110-A055-5EB423C7936F}"/>
+                <a16:creationId xmlns:a16="http://schemas.microsoft.com/office/drawing/2014/main" id="{0EFF436A-D9DE-44C1-8E53-E65469F83BDD}"/>
               </a:ext>
             </a:extLst>
           </p:cNvPr>
@@ -2919,8 +2919,8 @@
                 <a:ea typeface="Malgun Gothic"/>
                 <a:cs typeface="Malgun Gothic"/>
               </a:rPr>
-              <a:t>텍스트·이미지
-로그·압축</a:t>
+              <a:t>모든 참여자
+첨부 자료</a:t>
             </a:r>
           </a:p>
         </p:txBody>
@@ -2952,7 +2952,7 @@
           <p:cNvPr id="11" name="flow-1">
             <a:extLst xmlns:a="http://schemas.openxmlformats.org/drawingml/2006/main">
               <a:ext uri="{FF2B5EF4-FFF2-40B4-BE49-F238E27FC236}">
-                <a16:creationId xmlns:a16="http://schemas.microsoft.com/office/drawing/2014/main" id="{206B83C4-F8D7-47F2-A3FE-65680BB4F3D2}"/>
+                <a16:creationId xmlns:a16="http://schemas.microsoft.com/office/drawing/2014/main" id="{3CFEE2BE-0989-45C5-92EE-90CF04E11549}"/>
               </a:ext>
             </a:extLst>
           </p:cNvPr>
@@ -2985,7 +2985,7 @@
           <p:cNvPr id="12" name="text">
             <a:extLst xmlns:a="http://schemas.openxmlformats.org/drawingml/2006/main">
               <a:ext uri="{FF2B5EF4-FFF2-40B4-BE49-F238E27FC236}">
-                <a16:creationId xmlns:a16="http://schemas.microsoft.com/office/drawing/2014/main" id="{CD0D6727-0A2C-4A3D-BFF5-DF50ED967E96}"/>
+                <a16:creationId xmlns:a16="http://schemas.microsoft.com/office/drawing/2014/main" id="{91E220AB-5200-474D-9847-3564EE3A8F88}"/>
               </a:ext>
             </a:extLst>
           </p:cNvPr>
@@ -3042,7 +3042,7 @@
           <p:cNvPr id="13" name="text">
             <a:extLst xmlns:a="http://schemas.openxmlformats.org/drawingml/2006/main">
               <a:ext uri="{FF2B5EF4-FFF2-40B4-BE49-F238E27FC236}">
-                <a16:creationId xmlns:a16="http://schemas.microsoft.com/office/drawing/2014/main" id="{22D0DFA8-1329-4B5F-B51D-E0ABA54306A7}"/>
+                <a16:creationId xmlns:a16="http://schemas.microsoft.com/office/drawing/2014/main" id="{DCC7B3BB-4AA3-497B-878D-AC337CF20678}"/>
               </a:ext>
             </a:extLst>
           </p:cNvPr>
@@ -3099,7 +3099,7 @@
           <p:cNvPr id="14" name="text">
             <a:extLst xmlns:a="http://schemas.openxmlformats.org/drawingml/2006/main">
               <a:ext uri="{FF2B5EF4-FFF2-40B4-BE49-F238E27FC236}">
-                <a16:creationId xmlns:a16="http://schemas.microsoft.com/office/drawing/2014/main" id="{2A5909E6-5116-4361-8CDB-9120B93CA7D6}"/>
+                <a16:creationId xmlns:a16="http://schemas.microsoft.com/office/drawing/2014/main" id="{4B021AB1-04E4-4821-8618-EB3A5E67A50E}"/>
               </a:ext>
             </a:extLst>
           </p:cNvPr>
@@ -3147,7 +3147,7 @@
                 <a:cs typeface="Malgun Gothic"/>
               </a:rPr>
               <a:t>쉬운 설명
-다음 행동</a:t>
+CLI 코드 블록</a:t>
             </a:r>
           </a:p>
         </p:txBody>
@@ -3179,7 +3179,7 @@
           <p:cNvPr id="16" name="flow-2">
             <a:extLst xmlns:a="http://schemas.openxmlformats.org/drawingml/2006/main">
               <a:ext uri="{FF2B5EF4-FFF2-40B4-BE49-F238E27FC236}">
-                <a16:creationId xmlns:a16="http://schemas.microsoft.com/office/drawing/2014/main" id="{1720BA18-0889-4A5E-85E7-A489F0EEFA80}"/>
+                <a16:creationId xmlns:a16="http://schemas.microsoft.com/office/drawing/2014/main" id="{84F251AE-3EC3-4CB6-88D8-45581B6E2AA7}"/>
               </a:ext>
             </a:extLst>
           </p:cNvPr>
@@ -3212,7 +3212,7 @@
           <p:cNvPr id="17" name="text">
             <a:extLst xmlns:a="http://schemas.openxmlformats.org/drawingml/2006/main">
               <a:ext uri="{FF2B5EF4-FFF2-40B4-BE49-F238E27FC236}">
-                <a16:creationId xmlns:a16="http://schemas.microsoft.com/office/drawing/2014/main" id="{5E2B276C-A75F-4AE2-87D1-AEF10CD9E36B}"/>
+                <a16:creationId xmlns:a16="http://schemas.microsoft.com/office/drawing/2014/main" id="{6EBAED42-8090-4008-9FAE-5D065738C033}"/>
               </a:ext>
             </a:extLst>
           </p:cNvPr>
@@ -3269,7 +3269,7 @@
           <p:cNvPr id="18" name="text">
             <a:extLst xmlns:a="http://schemas.openxmlformats.org/drawingml/2006/main">
               <a:ext uri="{FF2B5EF4-FFF2-40B4-BE49-F238E27FC236}">
-                <a16:creationId xmlns:a16="http://schemas.microsoft.com/office/drawing/2014/main" id="{4C3E6BEC-1941-436B-A0F2-9675F4E450BD}"/>
+                <a16:creationId xmlns:a16="http://schemas.microsoft.com/office/drawing/2014/main" id="{AD612BA8-1AC9-40B8-85C6-C0F4C27BC025}"/>
               </a:ext>
             </a:extLst>
           </p:cNvPr>
@@ -3326,7 +3326,7 @@
           <p:cNvPr id="19" name="text">
             <a:extLst xmlns:a="http://schemas.openxmlformats.org/drawingml/2006/main">
               <a:ext uri="{FF2B5EF4-FFF2-40B4-BE49-F238E27FC236}">
-                <a16:creationId xmlns:a16="http://schemas.microsoft.com/office/drawing/2014/main" id="{B0DB12ED-4D90-4E23-8ADA-DDF1169AF0E1}"/>
+                <a16:creationId xmlns:a16="http://schemas.microsoft.com/office/drawing/2014/main" id="{A6AEB3E5-39EC-46EF-9B31-594DC0092A96}"/>
               </a:ext>
             </a:extLst>
           </p:cNvPr>
@@ -3384,7 +3384,7 @@
           <p:cNvPr id="20" name="flow-3">
             <a:extLst xmlns:a="http://schemas.openxmlformats.org/drawingml/2006/main">
               <a:ext uri="{FF2B5EF4-FFF2-40B4-BE49-F238E27FC236}">
-                <a16:creationId xmlns:a16="http://schemas.microsoft.com/office/drawing/2014/main" id="{3C40FE54-60EE-4FA3-AACB-6C6DA185326C}"/>
+                <a16:creationId xmlns:a16="http://schemas.microsoft.com/office/drawing/2014/main" id="{3CB14019-D88B-47BA-9B4C-F93C8EADEF65}"/>
               </a:ext>
             </a:extLst>
           </p:cNvPr>
@@ -3417,7 +3417,7 @@
           <p:cNvPr id="21" name="text">
             <a:extLst xmlns:a="http://schemas.openxmlformats.org/drawingml/2006/main">
               <a:ext uri="{FF2B5EF4-FFF2-40B4-BE49-F238E27FC236}">
-                <a16:creationId xmlns:a16="http://schemas.microsoft.com/office/drawing/2014/main" id="{3029FED3-6FFB-4AEF-88B9-01BF00E5E9A1}"/>
+                <a16:creationId xmlns:a16="http://schemas.microsoft.com/office/drawing/2014/main" id="{B483B50F-35A5-49CC-8BFD-D19CFC7E7723}"/>
               </a:ext>
             </a:extLst>
           </p:cNvPr>
@@ -3474,7 +3474,7 @@
           <p:cNvPr id="22" name="text">
             <a:extLst xmlns:a="http://schemas.openxmlformats.org/drawingml/2006/main">
               <a:ext uri="{FF2B5EF4-FFF2-40B4-BE49-F238E27FC236}">
-                <a16:creationId xmlns:a16="http://schemas.microsoft.com/office/drawing/2014/main" id="{1F7B2095-3C52-47AA-BE23-CF889604FAFF}"/>
+                <a16:creationId xmlns:a16="http://schemas.microsoft.com/office/drawing/2014/main" id="{2601785E-A6F9-41E3-8342-F35CBFDBE08D}"/>
               </a:ext>
             </a:extLst>
           </p:cNvPr>
@@ -3531,7 +3531,7 @@
           <p:cNvPr id="23" name="text">
             <a:extLst xmlns:a="http://schemas.openxmlformats.org/drawingml/2006/main">
               <a:ext uri="{FF2B5EF4-FFF2-40B4-BE49-F238E27FC236}">
-                <a16:creationId xmlns:a16="http://schemas.microsoft.com/office/drawing/2014/main" id="{E560A22E-0D34-48CA-87C3-D67F0DF7D1C4}"/>
+                <a16:creationId xmlns:a16="http://schemas.microsoft.com/office/drawing/2014/main" id="{8519104D-84E3-4B37-991D-231A7B279393}"/>
               </a:ext>
             </a:extLst>
           </p:cNvPr>
@@ -3589,7 +3589,7 @@
           <p:cNvPr id="24" name="chat">
             <a:extLst xmlns:a="http://schemas.openxmlformats.org/drawingml/2006/main">
               <a:ext uri="{FF2B5EF4-FFF2-40B4-BE49-F238E27FC236}">
-                <a16:creationId xmlns:a16="http://schemas.microsoft.com/office/drawing/2014/main" id="{1ED42C74-339D-443C-B9DB-9B45CE2567F4}"/>
+                <a16:creationId xmlns:a16="http://schemas.microsoft.com/office/drawing/2014/main" id="{9D5587E0-9B99-4252-BE16-9BE7C0C93E17}"/>
               </a:ext>
             </a:extLst>
           </p:cNvPr>
@@ -3620,7 +3620,7 @@
           <p:cNvPr id="25" name="text">
             <a:extLst xmlns:a="http://schemas.openxmlformats.org/drawingml/2006/main">
               <a:ext uri="{FF2B5EF4-FFF2-40B4-BE49-F238E27FC236}">
-                <a16:creationId xmlns:a16="http://schemas.microsoft.com/office/drawing/2014/main" id="{BDFF2203-C0E2-49B9-8F56-D64F4CC86971}"/>
+                <a16:creationId xmlns:a16="http://schemas.microsoft.com/office/drawing/2014/main" id="{B2FF4D4F-B69F-44B5-B50D-271443DDA66A}"/>
               </a:ext>
             </a:extLst>
           </p:cNvPr>
@@ -3675,7 +3675,7 @@
     </p:spTree>
     <p:extLst>
       <p:ext uri="{BB962C8B-B14F-4D97-AF65-F5344CB8AC3E}">
-        <p14:creationId xmlns:p14="http://schemas.microsoft.com/office/powerpoint/2010/main" val="133814118"/>
+        <p14:creationId xmlns:p14="http://schemas.microsoft.com/office/powerpoint/2010/main" val="902366875"/>
       </p:ext>
     </p:extLst>
   </p:cSld>
@@ -3699,7 +3699,7 @@
           <p:cNvPr id="21" name="background">
             <a:extLst xmlns:a="http://schemas.openxmlformats.org/drawingml/2006/main">
               <a:ext uri="{FF2B5EF4-FFF2-40B4-BE49-F238E27FC236}">
-                <a16:creationId xmlns:a16="http://schemas.microsoft.com/office/drawing/2014/main" id="{763156E2-504D-4650-9B4D-F8C9D0F8ACB0}"/>
+                <a16:creationId xmlns:a16="http://schemas.microsoft.com/office/drawing/2014/main" id="{D39B7378-87D3-4E87-A48D-C02A34F54A24}"/>
               </a:ext>
             </a:extLst>
           </p:cNvPr>
@@ -3730,7 +3730,7 @@
           <p:cNvPr id="2" name="text">
             <a:extLst xmlns:a="http://schemas.openxmlformats.org/drawingml/2006/main">
               <a:ext uri="{FF2B5EF4-FFF2-40B4-BE49-F238E27FC236}">
-                <a16:creationId xmlns:a16="http://schemas.microsoft.com/office/drawing/2014/main" id="{CBD17D98-C9AF-43F8-8716-7BD96962055F}"/>
+                <a16:creationId xmlns:a16="http://schemas.microsoft.com/office/drawing/2014/main" id="{A9C81BAF-714E-43DD-8921-A9AB632ACCE1}"/>
               </a:ext>
             </a:extLst>
           </p:cNvPr>
@@ -3777,7 +3777,7 @@
                 <a:ea typeface="Malgun Gothic"/>
                 <a:cs typeface="Malgun Gothic"/>
               </a:rPr>
-              <a:t>Discussion #166에서 반복 상담을 실제 해결 단계로 바꿨습니다</a:t>
+              <a:t>Discussion #167의 후속 응답 누락과 CLI 가독성을 해결했습니다</a:t>
             </a:r>
           </a:p>
         </p:txBody>
@@ -3787,7 +3787,7 @@
           <p:cNvPr id="3" name="rule">
             <a:extLst xmlns:a="http://schemas.openxmlformats.org/drawingml/2006/main">
               <a:ext uri="{FF2B5EF4-FFF2-40B4-BE49-F238E27FC236}">
-                <a16:creationId xmlns:a16="http://schemas.microsoft.com/office/drawing/2014/main" id="{755B4E15-4004-4ADF-A93D-3DBF5D977FDA}"/>
+                <a16:creationId xmlns:a16="http://schemas.microsoft.com/office/drawing/2014/main" id="{162E28D3-0286-47F9-8D39-8B3BA4825870}"/>
               </a:ext>
             </a:extLst>
           </p:cNvPr>
@@ -3818,7 +3818,7 @@
           <p:cNvPr id="4" name="page">
             <a:extLst xmlns:a="http://schemas.openxmlformats.org/drawingml/2006/main">
               <a:ext uri="{FF2B5EF4-FFF2-40B4-BE49-F238E27FC236}">
-                <a16:creationId xmlns:a16="http://schemas.microsoft.com/office/drawing/2014/main" id="{82C36A8F-C671-4513-A456-6E31C20EEB59}"/>
+                <a16:creationId xmlns:a16="http://schemas.microsoft.com/office/drawing/2014/main" id="{7D4F89E9-CE89-47AF-9D01-9E87D23DB28F}"/>
               </a:ext>
             </a:extLst>
           </p:cNvPr>
@@ -3875,7 +3875,7 @@
           <p:cNvPr id="5" name="text">
             <a:extLst xmlns:a="http://schemas.openxmlformats.org/drawingml/2006/main">
               <a:ext uri="{FF2B5EF4-FFF2-40B4-BE49-F238E27FC236}">
-                <a16:creationId xmlns:a16="http://schemas.microsoft.com/office/drawing/2014/main" id="{23AADD99-5053-41E7-B176-5A97FF65DACB}"/>
+                <a16:creationId xmlns:a16="http://schemas.microsoft.com/office/drawing/2014/main" id="{49330F75-01F6-4C93-B5AB-6D162EBDB342}"/>
               </a:ext>
             </a:extLst>
           </p:cNvPr>
@@ -3922,7 +3922,7 @@
                 <a:ea typeface="Malgun Gothic"/>
                 <a:cs typeface="Malgun Gothic"/>
               </a:rPr>
-              <a:t>반복</a:t>
+              <a:t>누락</a:t>
             </a:r>
           </a:p>
         </p:txBody>
@@ -3932,7 +3932,7 @@
           <p:cNvPr id="6" name="text">
             <a:extLst xmlns:a="http://schemas.openxmlformats.org/drawingml/2006/main">
               <a:ext uri="{FF2B5EF4-FFF2-40B4-BE49-F238E27FC236}">
-                <a16:creationId xmlns:a16="http://schemas.microsoft.com/office/drawing/2014/main" id="{90D112CC-5EA1-49D0-98D1-FE5A37FAE771}"/>
+                <a16:creationId xmlns:a16="http://schemas.microsoft.com/office/drawing/2014/main" id="{D3D27FB4-9FF3-4C93-83D5-9C0FD68F7E97}"/>
               </a:ext>
             </a:extLst>
           </p:cNvPr>
@@ -3979,7 +3979,7 @@
                 <a:ea typeface="Malgun Gothic"/>
                 <a:cs typeface="Malgun Gothic"/>
               </a:rPr>
-              <a:t>Post #374 · #376</a:t>
+              <a:t>Post #380</a:t>
             </a:r>
           </a:p>
         </p:txBody>
@@ -3989,7 +3989,7 @@
           <p:cNvPr id="7" name="text">
             <a:extLst xmlns:a="http://schemas.openxmlformats.org/drawingml/2006/main">
               <a:ext uri="{FF2B5EF4-FFF2-40B4-BE49-F238E27FC236}">
-                <a16:creationId xmlns:a16="http://schemas.microsoft.com/office/drawing/2014/main" id="{443AD65C-3B59-4BFD-8F37-BFB2DCC2D2EC}"/>
+                <a16:creationId xmlns:a16="http://schemas.microsoft.com/office/drawing/2014/main" id="{FFFB5262-B99E-4DEB-8BBF-1FBF5B0FC869}"/>
               </a:ext>
             </a:extLst>
           </p:cNvPr>
@@ -4036,8 +4036,8 @@
                 <a:ea typeface="Malgun Gothic"/>
                 <a:cs typeface="Malgun Gothic"/>
               </a:rPr>
-              <a:t>서비스·마운트·SELinux
-같은 점검 목록 반복</a:t>
+              <a:t>다른 참여자를 STAFF로
+기록만 하고 응답하지 않음</a:t>
             </a:r>
           </a:p>
         </p:txBody>
@@ -4047,7 +4047,7 @@
           <p:cNvPr id="8" name="divider-1">
             <a:extLst xmlns:a="http://schemas.openxmlformats.org/drawingml/2006/main">
               <a:ext uri="{FF2B5EF4-FFF2-40B4-BE49-F238E27FC236}">
-                <a16:creationId xmlns:a16="http://schemas.microsoft.com/office/drawing/2014/main" id="{9D34D854-ABBF-4F0F-BE52-B4751F6B52D9}"/>
+                <a16:creationId xmlns:a16="http://schemas.microsoft.com/office/drawing/2014/main" id="{56DF4CA8-855B-4402-9689-24C5F669832D}"/>
               </a:ext>
             </a:extLst>
           </p:cNvPr>
@@ -4078,7 +4078,7 @@
           <p:cNvPr id="9" name="text">
             <a:extLst xmlns:a="http://schemas.openxmlformats.org/drawingml/2006/main">
               <a:ext uri="{FF2B5EF4-FFF2-40B4-BE49-F238E27FC236}">
-                <a16:creationId xmlns:a16="http://schemas.microsoft.com/office/drawing/2014/main" id="{BBC1BDB3-6AFF-4CD5-B408-AD7DCA242358}"/>
+                <a16:creationId xmlns:a16="http://schemas.microsoft.com/office/drawing/2014/main" id="{DA778A78-BC4D-46C2-B5DE-EC0455BC906D}"/>
               </a:ext>
             </a:extLst>
           </p:cNvPr>
@@ -4125,7 +4125,7 @@
                 <a:ea typeface="Malgun Gothic"/>
                 <a:cs typeface="Malgun Gothic"/>
               </a:rPr>
-              <a:t>먼저</a:t>
+              <a:t>연결</a:t>
             </a:r>
           </a:p>
         </p:txBody>
@@ -4135,7 +4135,7 @@
           <p:cNvPr id="10" name="text">
             <a:extLst xmlns:a="http://schemas.openxmlformats.org/drawingml/2006/main">
               <a:ext uri="{FF2B5EF4-FFF2-40B4-BE49-F238E27FC236}">
-                <a16:creationId xmlns:a16="http://schemas.microsoft.com/office/drawing/2014/main" id="{15EA8B63-5704-419B-AA06-C8AAE402AB39}"/>
+                <a16:creationId xmlns:a16="http://schemas.microsoft.com/office/drawing/2014/main" id="{B6A10206-DCFF-4C5E-9D7D-FCEFBAC2E111}"/>
               </a:ext>
             </a:extLst>
           </p:cNvPr>
@@ -4182,7 +4182,7 @@
                 <a:ea typeface="Malgun Gothic"/>
                 <a:cs typeface="Malgun Gothic"/>
               </a:rPr>
-              <a:t>정확한 CLI</a:t>
+              <a:t>모든 사람 입력</a:t>
             </a:r>
           </a:p>
         </p:txBody>
@@ -4192,7 +4192,7 @@
           <p:cNvPr id="11" name="text">
             <a:extLst xmlns:a="http://schemas.openxmlformats.org/drawingml/2006/main">
               <a:ext uri="{FF2B5EF4-FFF2-40B4-BE49-F238E27FC236}">
-                <a16:creationId xmlns:a16="http://schemas.microsoft.com/office/drawing/2014/main" id="{A98304DF-445B-432F-9881-63CC491C2439}"/>
+                <a16:creationId xmlns:a16="http://schemas.microsoft.com/office/drawing/2014/main" id="{1E583847-A578-46F4-BB79-E13AE0C522CF}"/>
               </a:ext>
             </a:extLst>
           </p:cNvPr>
@@ -4239,9 +4239,8 @@
                 <a:ea typeface="Malgun Gothic"/>
                 <a:cs typeface="Malgun Gothic"/>
               </a:rPr>
-              <a:t>ausearch
-matchpathcon
-조건부 restorecon</a:t>
+              <a:t>REQUESTER · STAFF 응답
+Assistant 자신만 제외</a:t>
             </a:r>
           </a:p>
         </p:txBody>
@@ -4251,7 +4250,7 @@
           <p:cNvPr id="12" name="divider-2">
             <a:extLst xmlns:a="http://schemas.openxmlformats.org/drawingml/2006/main">
               <a:ext uri="{FF2B5EF4-FFF2-40B4-BE49-F238E27FC236}">
-                <a16:creationId xmlns:a16="http://schemas.microsoft.com/office/drawing/2014/main" id="{97662A0B-42FF-4583-9114-DB7F1B4A8D08}"/>
+                <a16:creationId xmlns:a16="http://schemas.microsoft.com/office/drawing/2014/main" id="{F6ED9FD2-FE50-40C1-9626-9899DDB7D717}"/>
               </a:ext>
             </a:extLst>
           </p:cNvPr>
@@ -4282,7 +4281,7 @@
           <p:cNvPr id="13" name="text">
             <a:extLst xmlns:a="http://schemas.openxmlformats.org/drawingml/2006/main">
               <a:ext uri="{FF2B5EF4-FFF2-40B4-BE49-F238E27FC236}">
-                <a16:creationId xmlns:a16="http://schemas.microsoft.com/office/drawing/2014/main" id="{6D5E8363-8923-4175-9C0C-7806156DC296}"/>
+                <a16:creationId xmlns:a16="http://schemas.microsoft.com/office/drawing/2014/main" id="{A6508167-7EDB-4EA5-AC6E-9ECD67FAD636}"/>
               </a:ext>
             </a:extLst>
           </p:cNvPr>
@@ -4329,7 +4328,7 @@
                 <a:ea typeface="Malgun Gothic"/>
                 <a:cs typeface="Malgun Gothic"/>
               </a:rPr>
-              <a:t>판정</a:t>
+              <a:t>표시</a:t>
             </a:r>
           </a:p>
         </p:txBody>
@@ -4339,7 +4338,7 @@
           <p:cNvPr id="14" name="text">
             <a:extLst xmlns:a="http://schemas.openxmlformats.org/drawingml/2006/main">
               <a:ext uri="{FF2B5EF4-FFF2-40B4-BE49-F238E27FC236}">
-                <a16:creationId xmlns:a16="http://schemas.microsoft.com/office/drawing/2014/main" id="{C930EF20-EE42-4EA5-B5F0-BBE5C6843AE1}"/>
+                <a16:creationId xmlns:a16="http://schemas.microsoft.com/office/drawing/2014/main" id="{24F30423-F159-4F8D-9042-71049EFBCE92}"/>
               </a:ext>
             </a:extLst>
           </p:cNvPr>
@@ -4386,7 +4385,7 @@
                 <a:ea typeface="Malgun Gothic"/>
                 <a:cs typeface="Malgun Gothic"/>
               </a:rPr>
-              <a:t>재시도 성공 기준</a:t>
+              <a:t>CLI 코드 블록</a:t>
             </a:r>
           </a:p>
         </p:txBody>
@@ -4396,19 +4395,19 @@
           <p:cNvPr id="15" name="text">
             <a:extLst xmlns:a="http://schemas.openxmlformats.org/drawingml/2006/main">
               <a:ext uri="{FF2B5EF4-FFF2-40B4-BE49-F238E27FC236}">
-                <a16:creationId xmlns:a16="http://schemas.microsoft.com/office/drawing/2014/main" id="{E1B9BD06-C023-4E13-915B-4E2AF1731E10}"/>
-              </a:ext>
-            </a:extLst>
-          </p:cNvPr>
-          <p:cNvSpPr>
-            <a:spLocks xmlns:a="http://schemas.openxmlformats.org/drawingml/2006/main" noGrp="1"/>
-          </p:cNvSpPr>
-          <p:nvPr/>
-        </p:nvSpPr>
-        <p:spPr>
-          <a:xfrm xmlns:a="http://schemas.openxmlformats.org/drawingml/2006/main">
-            <a:off x="7315200" y="3333750"/>
-            <a:ext cx="2381250" cy="838200"/>
+                <a16:creationId xmlns:a16="http://schemas.microsoft.com/office/drawing/2014/main" id="{908D918F-0B4E-4EBC-8FC6-39AFC6F0AAFE}"/>
+              </a:ext>
+            </a:extLst>
+          </p:cNvPr>
+          <p:cNvSpPr>
+            <a:spLocks xmlns:a="http://schemas.openxmlformats.org/drawingml/2006/main" noGrp="1"/>
+          </p:cNvSpPr>
+          <p:nvPr/>
+        </p:nvSpPr>
+        <p:spPr>
+          <a:xfrm xmlns:a="http://schemas.openxmlformats.org/drawingml/2006/main">
+            <a:off x="7315200" y="3181350"/>
+            <a:ext cx="2381250" cy="1066800"/>
           </a:xfrm>
           <a:prstGeom xmlns:a="http://schemas.openxmlformats.org/drawingml/2006/main" prst="rect">
             <a:avLst/>
@@ -4443,8 +4442,9 @@
                 <a:ea typeface="Malgun Gothic"/>
                 <a:cs typeface="Malgun Gothic"/>
               </a:rPr>
-              <a:t>스냅샷·복제 성공
-Permission denied 소멸</a:t>
+              <a:t>설명 먼저
+복사 가능한 bash 명령
+인라인 CLI 0개</a:t>
             </a:r>
           </a:p>
         </p:txBody>
@@ -4454,7 +4454,7 @@
           <p:cNvPr id="16" name="divider-3">
             <a:extLst xmlns:a="http://schemas.openxmlformats.org/drawingml/2006/main">
               <a:ext uri="{FF2B5EF4-FFF2-40B4-BE49-F238E27FC236}">
-                <a16:creationId xmlns:a16="http://schemas.microsoft.com/office/drawing/2014/main" id="{8473F37F-AB25-425D-A6E2-2E304D467953}"/>
+                <a16:creationId xmlns:a16="http://schemas.microsoft.com/office/drawing/2014/main" id="{A22B5A61-8D70-4227-8BAE-CCCE2530A61D}"/>
               </a:ext>
             </a:extLst>
           </p:cNvPr>
@@ -4485,7 +4485,7 @@
           <p:cNvPr id="17" name="text">
             <a:extLst xmlns:a="http://schemas.openxmlformats.org/drawingml/2006/main">
               <a:ext uri="{FF2B5EF4-FFF2-40B4-BE49-F238E27FC236}">
-                <a16:creationId xmlns:a16="http://schemas.microsoft.com/office/drawing/2014/main" id="{F891AB70-0183-46F3-9EBB-F89B07C387FF}"/>
+                <a16:creationId xmlns:a16="http://schemas.microsoft.com/office/drawing/2014/main" id="{FC223BCF-0281-47D3-9F9A-320B72C194FB}"/>
               </a:ext>
             </a:extLst>
           </p:cNvPr>
@@ -4532,7 +4532,7 @@
                 <a:ea typeface="Malgun Gothic"/>
                 <a:cs typeface="Malgun Gothic"/>
               </a:rPr>
-              <a:t>#377</a:t>
+              <a:t>#381</a:t>
             </a:r>
           </a:p>
         </p:txBody>
@@ -4542,7 +4542,7 @@
           <p:cNvPr id="18" name="text">
             <a:extLst xmlns:a="http://schemas.openxmlformats.org/drawingml/2006/main">
               <a:ext uri="{FF2B5EF4-FFF2-40B4-BE49-F238E27FC236}">
-                <a16:creationId xmlns:a16="http://schemas.microsoft.com/office/drawing/2014/main" id="{986058D4-A7CE-4625-A9C6-363B8BB5A3C3}"/>
+                <a16:creationId xmlns:a16="http://schemas.microsoft.com/office/drawing/2014/main" id="{FD5425D4-1B9E-4F8C-835B-9BA7F987D0E5}"/>
               </a:ext>
             </a:extLst>
           </p:cNvPr>
@@ -4589,7 +4589,7 @@
                 <a:ea typeface="Malgun Gothic"/>
                 <a:cs typeface="Malgun Gothic"/>
               </a:rPr>
-              <a:t>실제 정정 답변</a:t>
+              <a:t>코드 블록 5개</a:t>
             </a:r>
           </a:p>
         </p:txBody>
@@ -4599,7 +4599,7 @@
           <p:cNvPr id="19" name="text">
             <a:extLst xmlns:a="http://schemas.openxmlformats.org/drawingml/2006/main">
               <a:ext uri="{FF2B5EF4-FFF2-40B4-BE49-F238E27FC236}">
-                <a16:creationId xmlns:a16="http://schemas.microsoft.com/office/drawing/2014/main" id="{E83F70CD-C0AB-4575-A818-43E9B88675F8}"/>
+                <a16:creationId xmlns:a16="http://schemas.microsoft.com/office/drawing/2014/main" id="{4647609E-3371-4D9B-A17C-976BAF036A32}"/>
               </a:ext>
             </a:extLst>
           </p:cNvPr>
@@ -4646,7 +4646,7 @@
                 <a:ea typeface="Malgun Gothic"/>
                 <a:cs typeface="Malgun Gothic"/>
               </a:rPr>
-              <a:t>223</a:t>
+              <a:t>225</a:t>
             </a:r>
           </a:p>
         </p:txBody>
@@ -4656,7 +4656,7 @@
           <p:cNvPr id="20" name="text">
             <a:extLst xmlns:a="http://schemas.openxmlformats.org/drawingml/2006/main">
               <a:ext uri="{FF2B5EF4-FFF2-40B4-BE49-F238E27FC236}">
-                <a16:creationId xmlns:a16="http://schemas.microsoft.com/office/drawing/2014/main" id="{8425A30C-0994-4847-A756-26C589022636}"/>
+                <a16:creationId xmlns:a16="http://schemas.microsoft.com/office/drawing/2014/main" id="{E5CC800F-7608-461F-9C21-D511CC4B15EB}"/>
               </a:ext>
             </a:extLst>
           </p:cNvPr>
@@ -4711,7 +4711,7 @@
     </p:spTree>
     <p:extLst>
       <p:ext uri="{BB962C8B-B14F-4D97-AF65-F5344CB8AC3E}">
-        <p14:creationId xmlns:p14="http://schemas.microsoft.com/office/powerpoint/2010/main" val="1571015885"/>
+        <p14:creationId xmlns:p14="http://schemas.microsoft.com/office/powerpoint/2010/main" val="1623689290"/>
       </p:ext>
     </p:extLst>
   </p:cSld>
@@ -4735,7 +4735,7 @@
           <p:cNvPr id="10" name="background">
             <a:extLst xmlns:a="http://schemas.openxmlformats.org/drawingml/2006/main">
               <a:ext uri="{FF2B5EF4-FFF2-40B4-BE49-F238E27FC236}">
-                <a16:creationId xmlns:a16="http://schemas.microsoft.com/office/drawing/2014/main" id="{7BEA324C-5186-4DA2-A50B-5F2E319FDA20}"/>
+                <a16:creationId xmlns:a16="http://schemas.microsoft.com/office/drawing/2014/main" id="{AE1F76A5-30F4-486B-AD7C-DF1B45A97824}"/>
               </a:ext>
             </a:extLst>
           </p:cNvPr>
@@ -4766,7 +4766,7 @@
           <p:cNvPr id="2" name="closing">
             <a:extLst xmlns:a="http://schemas.openxmlformats.org/drawingml/2006/main">
               <a:ext uri="{FF2B5EF4-FFF2-40B4-BE49-F238E27FC236}">
-                <a16:creationId xmlns:a16="http://schemas.microsoft.com/office/drawing/2014/main" id="{AC302F28-AD88-4353-A5CC-278E75EA54E7}"/>
+                <a16:creationId xmlns:a16="http://schemas.microsoft.com/office/drawing/2014/main" id="{02AE4DCC-288A-4A41-9423-903C5AC2041A}"/>
               </a:ext>
             </a:extLst>
           </p:cNvPr>
@@ -4797,7 +4797,7 @@
           <p:cNvPr id="3" name="text">
             <a:extLst xmlns:a="http://schemas.openxmlformats.org/drawingml/2006/main">
               <a:ext uri="{FF2B5EF4-FFF2-40B4-BE49-F238E27FC236}">
-                <a16:creationId xmlns:a16="http://schemas.microsoft.com/office/drawing/2014/main" id="{4AC8240B-EC69-4BD7-9094-49E871B94BC2}"/>
+                <a16:creationId xmlns:a16="http://schemas.microsoft.com/office/drawing/2014/main" id="{749D7720-420B-43BB-98A2-6349F70083B7}"/>
               </a:ext>
             </a:extLst>
           </p:cNvPr>
@@ -4854,7 +4854,7 @@
           <p:cNvPr id="4" name="text">
             <a:extLst xmlns:a="http://schemas.openxmlformats.org/drawingml/2006/main">
               <a:ext uri="{FF2B5EF4-FFF2-40B4-BE49-F238E27FC236}">
-                <a16:creationId xmlns:a16="http://schemas.microsoft.com/office/drawing/2014/main" id="{D54E9D6F-7654-4968-8F88-11E063F3889A}"/>
+                <a16:creationId xmlns:a16="http://schemas.microsoft.com/office/drawing/2014/main" id="{56609FDF-F41A-41E0-AECF-D87857C88D4B}"/>
               </a:ext>
             </a:extLst>
           </p:cNvPr>
@@ -4912,7 +4912,7 @@
           <p:cNvPr id="5" name="left-rule">
             <a:extLst xmlns:a="http://schemas.openxmlformats.org/drawingml/2006/main">
               <a:ext uri="{FF2B5EF4-FFF2-40B4-BE49-F238E27FC236}">
-                <a16:creationId xmlns:a16="http://schemas.microsoft.com/office/drawing/2014/main" id="{84909AA3-6603-441B-86A9-3EBBF577C010}"/>
+                <a16:creationId xmlns:a16="http://schemas.microsoft.com/office/drawing/2014/main" id="{04993846-3E68-4766-8D69-E0951CFBD651}"/>
               </a:ext>
             </a:extLst>
           </p:cNvPr>
@@ -4943,7 +4943,7 @@
           <p:cNvPr id="6" name="text">
             <a:extLst xmlns:a="http://schemas.openxmlformats.org/drawingml/2006/main">
               <a:ext uri="{FF2B5EF4-FFF2-40B4-BE49-F238E27FC236}">
-                <a16:creationId xmlns:a16="http://schemas.microsoft.com/office/drawing/2014/main" id="{85B2CDA4-2D76-4F40-B1E3-A831AD75BDFD}"/>
+                <a16:creationId xmlns:a16="http://schemas.microsoft.com/office/drawing/2014/main" id="{CD567434-F37D-4644-98B5-364425813FD4}"/>
               </a:ext>
             </a:extLst>
           </p:cNvPr>
@@ -4990,7 +4990,7 @@
                 <a:ea typeface="Malgun Gothic"/>
                 <a:cs typeface="Malgun Gothic"/>
               </a:rPr>
-              <a:t>AI Gateway 0.14.3 · OpenAI · 반복 답변 차단</a:t>
+              <a:t>AI Gateway 0.14.4 · OpenAI · 다중 참여자 후속 응답</a:t>
             </a:r>
           </a:p>
         </p:txBody>
@@ -5000,7 +5000,7 @@
           <p:cNvPr id="7" name="text">
             <a:extLst xmlns:a="http://schemas.openxmlformats.org/drawingml/2006/main">
               <a:ext uri="{FF2B5EF4-FFF2-40B4-BE49-F238E27FC236}">
-                <a16:creationId xmlns:a16="http://schemas.microsoft.com/office/drawing/2014/main" id="{B357EEBB-4499-4146-81C0-54558A359FE2}"/>
+                <a16:creationId xmlns:a16="http://schemas.microsoft.com/office/drawing/2014/main" id="{0C24936D-D8D6-4A62-9251-3A6275660546}"/>
               </a:ext>
             </a:extLst>
           </p:cNvPr>
@@ -5057,7 +5057,7 @@
           <p:cNvPr id="8" name="text">
             <a:extLst xmlns:a="http://schemas.openxmlformats.org/drawingml/2006/main">
               <a:ext uri="{FF2B5EF4-FFF2-40B4-BE49-F238E27FC236}">
-                <a16:creationId xmlns:a16="http://schemas.microsoft.com/office/drawing/2014/main" id="{2ABF70C2-83E6-4467-BC4B-70050F27CA74}"/>
+                <a16:creationId xmlns:a16="http://schemas.microsoft.com/office/drawing/2014/main" id="{67E11D8B-2CE2-47EC-84C9-8240F7F61C86}"/>
               </a:ext>
             </a:extLst>
           </p:cNvPr>
@@ -5114,7 +5114,7 @@
           <p:cNvPr id="9" name="text">
             <a:extLst xmlns:a="http://schemas.openxmlformats.org/drawingml/2006/main">
               <a:ext uri="{FF2B5EF4-FFF2-40B4-BE49-F238E27FC236}">
-                <a16:creationId xmlns:a16="http://schemas.microsoft.com/office/drawing/2014/main" id="{BA0AA834-0B82-48DF-9AD7-41BC83B2CFB3}"/>
+                <a16:creationId xmlns:a16="http://schemas.microsoft.com/office/drawing/2014/main" id="{6949BA39-C798-4682-B54B-01BA776C31F3}"/>
               </a:ext>
             </a:extLst>
           </p:cNvPr>
@@ -5169,7 +5169,7 @@
     </p:spTree>
     <p:extLst>
       <p:ext uri="{BB962C8B-B14F-4D97-AF65-F5344CB8AC3E}">
-        <p14:creationId xmlns:p14="http://schemas.microsoft.com/office/powerpoint/2010/main" val="677423588"/>
+        <p14:creationId xmlns:p14="http://schemas.microsoft.com/office/powerpoint/2010/main" val="848562894"/>
       </p:ext>
     </p:extLst>
   </p:cSld>

--- a/output/presentation/techflow-community-auto-publish-kb.pptx
+++ b/output/presentation/techflow-community-auto-publish-kb.pptx
@@ -2,17 +2,17 @@
 <file path=ppt/presentation.xml><?xml version="1.0" encoding="utf-8"?>
 <p:presentation xmlns:p="http://schemas.openxmlformats.org/presentationml/2006/main">
   <p:sldMasterIdLst>
-    <p:sldMasterId xmlns:r="http://schemas.openxmlformats.org/officeDocument/2006/relationships" id="2147483648" r:id="R1ab0b42b401d435a"/>
+    <p:sldMasterId xmlns:r="http://schemas.openxmlformats.org/officeDocument/2006/relationships" id="2147483648" r:id="R3bd0d5943022496e"/>
   </p:sldMasterIdLst>
   <p:notesMasterIdLst>
-    <p:notesMasterId xmlns:r="http://schemas.openxmlformats.org/officeDocument/2006/relationships" r:id="Ra26a5633cb8a4ab1"/>
+    <p:notesMasterId xmlns:r="http://schemas.openxmlformats.org/officeDocument/2006/relationships" r:id="Rc2590cdb08174e53"/>
   </p:notesMasterIdLst>
   <p:sldIdLst>
-    <p:sldId xmlns:r="http://schemas.openxmlformats.org/officeDocument/2006/relationships" id="256" r:id="R4364056884314940"/>
-    <p:sldId xmlns:r="http://schemas.openxmlformats.org/officeDocument/2006/relationships" id="257" r:id="Rc6e95d43d1614cf9"/>
-    <p:sldId xmlns:r="http://schemas.openxmlformats.org/officeDocument/2006/relationships" id="258" r:id="R27b12a50480e49cd"/>
-    <p:sldId xmlns:r="http://schemas.openxmlformats.org/officeDocument/2006/relationships" id="259" r:id="Rcf1a3811a4174740"/>
-    <p:sldId xmlns:r="http://schemas.openxmlformats.org/officeDocument/2006/relationships" id="260" r:id="R33cd3317b03a4250"/>
+    <p:sldId xmlns:r="http://schemas.openxmlformats.org/officeDocument/2006/relationships" id="256" r:id="R23e41c727d164841"/>
+    <p:sldId xmlns:r="http://schemas.openxmlformats.org/officeDocument/2006/relationships" id="257" r:id="R089bc48c92c7432e"/>
+    <p:sldId xmlns:r="http://schemas.openxmlformats.org/officeDocument/2006/relationships" id="258" r:id="R37b156bde81e4238"/>
+    <p:sldId xmlns:r="http://schemas.openxmlformats.org/officeDocument/2006/relationships" id="259" r:id="Raeb5d2d42cce4aa0"/>
+    <p:sldId xmlns:r="http://schemas.openxmlformats.org/officeDocument/2006/relationships" id="260" r:id="R5077d4a1beb44144"/>
   </p:sldIdLst>
   <p:sldSz cx="12192000" cy="6858000"/>
   <p:notesSz cx="6858000" cy="9144000"/>
@@ -681,12 +681,12 @@
           </a:p>
           <a:p xmlns:a="http://schemas.openxmlformats.org/drawingml/2006/main">
             <a:r>
-              <a:t>- docs/reports/issue-69-community-auto-publish-kb-validation.md#3.5</a:t>
-            </a:r>
-          </a:p>
-          <a:p xmlns:a="http://schemas.openxmlformats.org/drawingml/2006/main">
-            <a:r>
-              <a:t>- https://community.ablecloud.io/d/167/381</a:t>
+              <a:t>- docs/reports/issue-69-community-auto-publish-kb-validation.md#3.6</a:t>
+            </a:r>
+          </a:p>
+          <a:p xmlns:a="http://schemas.openxmlformats.org/drawingml/2006/main">
+            <a:r>
+              <a:t>- https://community.ablecloud.io/d/167/383</a:t>
             </a:r>
           </a:p>
         </p:txBody>
@@ -834,7 +834,7 @@
   </p:cSld>
   <p:clrMap bg1="lt1" tx1="dk1" bg2="lt2" tx2="dk2" accent1="accent1" accent2="accent2" accent3="accent3" accent4="accent4" accent5="accent5" accent6="accent6" hlink="hlink" folHlink="folHlink"/>
   <p:sldLayoutIdLst>
-    <p:sldLayoutId xmlns:r="http://schemas.openxmlformats.org/officeDocument/2006/relationships" id="2147483649" r:id="R298f716cc171444f"/>
+    <p:sldLayoutId xmlns:r="http://schemas.openxmlformats.org/officeDocument/2006/relationships" id="2147483649" r:id="R0130eedaf25448aa"/>
   </p:sldLayoutIdLst>
   <p:txStyles>
     <p:titleStyle>
@@ -1378,7 +1378,7 @@
           <p:cNvPr id="9" name="background">
             <a:extLst xmlns:a="http://schemas.openxmlformats.org/drawingml/2006/main">
               <a:ext uri="{FF2B5EF4-FFF2-40B4-BE49-F238E27FC236}">
-                <a16:creationId xmlns:a16="http://schemas.microsoft.com/office/drawing/2014/main" id="{0EBD1901-1015-4E08-980C-09737F051C50}"/>
+                <a16:creationId xmlns:a16="http://schemas.microsoft.com/office/drawing/2014/main" id="{5751AFB7-E0D2-40D3-82B7-224E2AE2E808}"/>
               </a:ext>
             </a:extLst>
           </p:cNvPr>
@@ -1409,7 +1409,7 @@
           <p:cNvPr id="2" name="cover">
             <a:extLst xmlns:a="http://schemas.openxmlformats.org/drawingml/2006/main">
               <a:ext uri="{FF2B5EF4-FFF2-40B4-BE49-F238E27FC236}">
-                <a16:creationId xmlns:a16="http://schemas.microsoft.com/office/drawing/2014/main" id="{ED4272D9-8873-447F-B1C0-123552E79D7C}"/>
+                <a16:creationId xmlns:a16="http://schemas.microsoft.com/office/drawing/2014/main" id="{0CEA71A9-9EE7-4144-8035-9088C0390EDE}"/>
               </a:ext>
             </a:extLst>
           </p:cNvPr>
@@ -1440,7 +1440,7 @@
           <p:cNvPr id="3" name="text">
             <a:extLst xmlns:a="http://schemas.openxmlformats.org/drawingml/2006/main">
               <a:ext uri="{FF2B5EF4-FFF2-40B4-BE49-F238E27FC236}">
-                <a16:creationId xmlns:a16="http://schemas.microsoft.com/office/drawing/2014/main" id="{DD2F82A4-B4CE-4ADE-AC8F-92B902A60ED6}"/>
+                <a16:creationId xmlns:a16="http://schemas.microsoft.com/office/drawing/2014/main" id="{500B0FA8-422D-4227-AFB9-4C60A150B07E}"/>
               </a:ext>
             </a:extLst>
           </p:cNvPr>
@@ -1497,7 +1497,7 @@
           <p:cNvPr id="4" name="text">
             <a:extLst xmlns:a="http://schemas.openxmlformats.org/drawingml/2006/main">
               <a:ext uri="{FF2B5EF4-FFF2-40B4-BE49-F238E27FC236}">
-                <a16:creationId xmlns:a16="http://schemas.microsoft.com/office/drawing/2014/main" id="{8B1772F2-07DB-4327-BD28-3B99F21A9BCE}"/>
+                <a16:creationId xmlns:a16="http://schemas.microsoft.com/office/drawing/2014/main" id="{0087C10D-A38F-4880-A3ED-0F82759B7224}"/>
               </a:ext>
             </a:extLst>
           </p:cNvPr>
@@ -1555,7 +1555,7 @@
           <p:cNvPr id="5" name="text">
             <a:extLst xmlns:a="http://schemas.openxmlformats.org/drawingml/2006/main">
               <a:ext uri="{FF2B5EF4-FFF2-40B4-BE49-F238E27FC236}">
-                <a16:creationId xmlns:a16="http://schemas.microsoft.com/office/drawing/2014/main" id="{C0B432E8-E39A-4115-B532-459B338DE1DF}"/>
+                <a16:creationId xmlns:a16="http://schemas.microsoft.com/office/drawing/2014/main" id="{98B08DFA-389F-4151-BD43-8BE7EFBC173E}"/>
               </a:ext>
             </a:extLst>
           </p:cNvPr>
@@ -1612,7 +1612,7 @@
           <p:cNvPr id="6" name="result">
             <a:extLst xmlns:a="http://schemas.openxmlformats.org/drawingml/2006/main">
               <a:ext uri="{FF2B5EF4-FFF2-40B4-BE49-F238E27FC236}">
-                <a16:creationId xmlns:a16="http://schemas.microsoft.com/office/drawing/2014/main" id="{E7F0ECE1-7377-4B04-9631-E6CF4B57535D}"/>
+                <a16:creationId xmlns:a16="http://schemas.microsoft.com/office/drawing/2014/main" id="{474E6E5D-B218-45DD-9557-DAE147AC332A}"/>
               </a:ext>
             </a:extLst>
           </p:cNvPr>
@@ -1643,7 +1643,7 @@
           <p:cNvPr id="7" name="text">
             <a:extLst xmlns:a="http://schemas.openxmlformats.org/drawingml/2006/main">
               <a:ext uri="{FF2B5EF4-FFF2-40B4-BE49-F238E27FC236}">
-                <a16:creationId xmlns:a16="http://schemas.microsoft.com/office/drawing/2014/main" id="{60D5782C-3E41-40A8-A465-3860B7DCC858}"/>
+                <a16:creationId xmlns:a16="http://schemas.microsoft.com/office/drawing/2014/main" id="{D1825393-A97E-4DC3-B9C4-35B409EF5323}"/>
               </a:ext>
             </a:extLst>
           </p:cNvPr>
@@ -1690,7 +1690,7 @@
                 <a:ea typeface="Malgun Gothic"/>
                 <a:cs typeface="Malgun Gothic"/>
               </a:rPr>
-              <a:t>AI Gateway 0.14.4</a:t>
+              <a:t>AI Gateway 0.14.5</a:t>
             </a:r>
           </a:p>
         </p:txBody>
@@ -1700,7 +1700,7 @@
           <p:cNvPr id="8" name="text">
             <a:extLst xmlns:a="http://schemas.openxmlformats.org/drawingml/2006/main">
               <a:ext uri="{FF2B5EF4-FFF2-40B4-BE49-F238E27FC236}">
-                <a16:creationId xmlns:a16="http://schemas.microsoft.com/office/drawing/2014/main" id="{C1280437-0720-4335-9BFD-2290E9DBBF5B}"/>
+                <a16:creationId xmlns:a16="http://schemas.microsoft.com/office/drawing/2014/main" id="{112A0B7A-86CA-45B6-AB38-BD0F5D051A2A}"/>
               </a:ext>
             </a:extLst>
           </p:cNvPr>
@@ -1755,7 +1755,7 @@
     </p:spTree>
     <p:extLst>
       <p:ext uri="{BB962C8B-B14F-4D97-AF65-F5344CB8AC3E}">
-        <p14:creationId xmlns:p14="http://schemas.microsoft.com/office/powerpoint/2010/main" val="188160651"/>
+        <p14:creationId xmlns:p14="http://schemas.microsoft.com/office/powerpoint/2010/main" val="1166127263"/>
       </p:ext>
     </p:extLst>
   </p:cSld>
@@ -1779,7 +1779,7 @@
           <p:cNvPr id="17" name="background">
             <a:extLst xmlns:a="http://schemas.openxmlformats.org/drawingml/2006/main">
               <a:ext uri="{FF2B5EF4-FFF2-40B4-BE49-F238E27FC236}">
-                <a16:creationId xmlns:a16="http://schemas.microsoft.com/office/drawing/2014/main" id="{1BF1BEA4-615F-4E95-BA63-C2EBD20832FE}"/>
+                <a16:creationId xmlns:a16="http://schemas.microsoft.com/office/drawing/2014/main" id="{059DAFFE-53CB-4806-88EE-5DBC87417920}"/>
               </a:ext>
             </a:extLst>
           </p:cNvPr>
@@ -1810,7 +1810,7 @@
           <p:cNvPr id="2" name="text">
             <a:extLst xmlns:a="http://schemas.openxmlformats.org/drawingml/2006/main">
               <a:ext uri="{FF2B5EF4-FFF2-40B4-BE49-F238E27FC236}">
-                <a16:creationId xmlns:a16="http://schemas.microsoft.com/office/drawing/2014/main" id="{61267398-603F-4FE8-9271-ADAFBD5ED3BC}"/>
+                <a16:creationId xmlns:a16="http://schemas.microsoft.com/office/drawing/2014/main" id="{28599CE9-B0EA-4DC4-8D39-2F06EFCA6595}"/>
               </a:ext>
             </a:extLst>
           </p:cNvPr>
@@ -1867,7 +1867,7 @@
           <p:cNvPr id="3" name="rule">
             <a:extLst xmlns:a="http://schemas.openxmlformats.org/drawingml/2006/main">
               <a:ext uri="{FF2B5EF4-FFF2-40B4-BE49-F238E27FC236}">
-                <a16:creationId xmlns:a16="http://schemas.microsoft.com/office/drawing/2014/main" id="{FE004980-4F6B-450C-896A-87353C8C2760}"/>
+                <a16:creationId xmlns:a16="http://schemas.microsoft.com/office/drawing/2014/main" id="{C7AF7C4D-5116-43EF-A55E-2F0A9F3E3832}"/>
               </a:ext>
             </a:extLst>
           </p:cNvPr>
@@ -1898,7 +1898,7 @@
           <p:cNvPr id="4" name="page">
             <a:extLst xmlns:a="http://schemas.openxmlformats.org/drawingml/2006/main">
               <a:ext uri="{FF2B5EF4-FFF2-40B4-BE49-F238E27FC236}">
-                <a16:creationId xmlns:a16="http://schemas.microsoft.com/office/drawing/2014/main" id="{3C3F3EA0-5E2F-4046-9356-795B17FFBD83}"/>
+                <a16:creationId xmlns:a16="http://schemas.microsoft.com/office/drawing/2014/main" id="{594A7167-2449-4B34-BF12-92BEB3F666D4}"/>
               </a:ext>
             </a:extLst>
           </p:cNvPr>
@@ -1955,7 +1955,7 @@
           <p:cNvPr id="5" name="before">
             <a:extLst xmlns:a="http://schemas.openxmlformats.org/drawingml/2006/main">
               <a:ext uri="{FF2B5EF4-FFF2-40B4-BE49-F238E27FC236}">
-                <a16:creationId xmlns:a16="http://schemas.microsoft.com/office/drawing/2014/main" id="{A9BB6B1B-465B-4A4E-91EB-3364DFE4430F}"/>
+                <a16:creationId xmlns:a16="http://schemas.microsoft.com/office/drawing/2014/main" id="{31ED59C9-A232-41E4-83BD-517DD11A80DE}"/>
               </a:ext>
             </a:extLst>
           </p:cNvPr>
@@ -1988,7 +1988,7 @@
           <p:cNvPr id="6" name="text">
             <a:extLst xmlns:a="http://schemas.openxmlformats.org/drawingml/2006/main">
               <a:ext uri="{FF2B5EF4-FFF2-40B4-BE49-F238E27FC236}">
-                <a16:creationId xmlns:a16="http://schemas.microsoft.com/office/drawing/2014/main" id="{A783DEAC-DF7B-4AC7-98F4-5B8DE4F38252}"/>
+                <a16:creationId xmlns:a16="http://schemas.microsoft.com/office/drawing/2014/main" id="{FF23068C-3FCD-4CB8-9A50-573254D47819}"/>
               </a:ext>
             </a:extLst>
           </p:cNvPr>
@@ -2045,7 +2045,7 @@
           <p:cNvPr id="7" name="text">
             <a:extLst xmlns:a="http://schemas.openxmlformats.org/drawingml/2006/main">
               <a:ext uri="{FF2B5EF4-FFF2-40B4-BE49-F238E27FC236}">
-                <a16:creationId xmlns:a16="http://schemas.microsoft.com/office/drawing/2014/main" id="{F36897E5-6646-421E-BDA6-C7FDEA0E602B}"/>
+                <a16:creationId xmlns:a16="http://schemas.microsoft.com/office/drawing/2014/main" id="{3053D27A-F96A-41C5-B25E-68C7305AEE4E}"/>
               </a:ext>
             </a:extLst>
           </p:cNvPr>
@@ -2127,7 +2127,7 @@
           <p:cNvPr id="9" name="ongoing">
             <a:extLst xmlns:a="http://schemas.openxmlformats.org/drawingml/2006/main">
               <a:ext uri="{FF2B5EF4-FFF2-40B4-BE49-F238E27FC236}">
-                <a16:creationId xmlns:a16="http://schemas.microsoft.com/office/drawing/2014/main" id="{D14F551F-47EF-43FF-B3F8-95A25E87DDB4}"/>
+                <a16:creationId xmlns:a16="http://schemas.microsoft.com/office/drawing/2014/main" id="{53FC607F-9BE4-4272-8004-167B7A9C4FD1}"/>
               </a:ext>
             </a:extLst>
           </p:cNvPr>
@@ -2160,7 +2160,7 @@
           <p:cNvPr id="10" name="text">
             <a:extLst xmlns:a="http://schemas.openxmlformats.org/drawingml/2006/main">
               <a:ext uri="{FF2B5EF4-FFF2-40B4-BE49-F238E27FC236}">
-                <a16:creationId xmlns:a16="http://schemas.microsoft.com/office/drawing/2014/main" id="{9B4F3167-E51A-4222-A8B5-21137DA80FFB}"/>
+                <a16:creationId xmlns:a16="http://schemas.microsoft.com/office/drawing/2014/main" id="{B0744C8F-038D-4676-ABD4-1F7B6D4B0A8E}"/>
               </a:ext>
             </a:extLst>
           </p:cNvPr>
@@ -2217,7 +2217,7 @@
           <p:cNvPr id="11" name="text">
             <a:extLst xmlns:a="http://schemas.openxmlformats.org/drawingml/2006/main">
               <a:ext uri="{FF2B5EF4-FFF2-40B4-BE49-F238E27FC236}">
-                <a16:creationId xmlns:a16="http://schemas.microsoft.com/office/drawing/2014/main" id="{4A51073D-6860-4368-8331-D66607A2910D}"/>
+                <a16:creationId xmlns:a16="http://schemas.microsoft.com/office/drawing/2014/main" id="{47E8400E-F05B-44C5-B481-E421A919F257}"/>
               </a:ext>
             </a:extLst>
           </p:cNvPr>
@@ -2299,7 +2299,7 @@
           <p:cNvPr id="13" name="final">
             <a:extLst xmlns:a="http://schemas.openxmlformats.org/drawingml/2006/main">
               <a:ext uri="{FF2B5EF4-FFF2-40B4-BE49-F238E27FC236}">
-                <a16:creationId xmlns:a16="http://schemas.microsoft.com/office/drawing/2014/main" id="{EC728098-1984-445C-89D6-0E70142ABA9E}"/>
+                <a16:creationId xmlns:a16="http://schemas.microsoft.com/office/drawing/2014/main" id="{A412C802-4F30-42FA-B5E9-3FC129B76D1E}"/>
               </a:ext>
             </a:extLst>
           </p:cNvPr>
@@ -2332,7 +2332,7 @@
           <p:cNvPr id="14" name="text">
             <a:extLst xmlns:a="http://schemas.openxmlformats.org/drawingml/2006/main">
               <a:ext uri="{FF2B5EF4-FFF2-40B4-BE49-F238E27FC236}">
-                <a16:creationId xmlns:a16="http://schemas.microsoft.com/office/drawing/2014/main" id="{24CD5A10-40D3-403B-851C-F4F208688150}"/>
+                <a16:creationId xmlns:a16="http://schemas.microsoft.com/office/drawing/2014/main" id="{8D412DFB-E061-4769-94BD-8006E98BA5AA}"/>
               </a:ext>
             </a:extLst>
           </p:cNvPr>
@@ -2389,7 +2389,7 @@
           <p:cNvPr id="15" name="text">
             <a:extLst xmlns:a="http://schemas.openxmlformats.org/drawingml/2006/main">
               <a:ext uri="{FF2B5EF4-FFF2-40B4-BE49-F238E27FC236}">
-                <a16:creationId xmlns:a16="http://schemas.microsoft.com/office/drawing/2014/main" id="{0D678FE5-228A-4B0C-8B1E-65043853ED30}"/>
+                <a16:creationId xmlns:a16="http://schemas.microsoft.com/office/drawing/2014/main" id="{FC4871B6-C6AB-47A8-87F6-4D79C9E16CE7}"/>
               </a:ext>
             </a:extLst>
           </p:cNvPr>
@@ -2448,7 +2448,7 @@
           <p:cNvPr id="16" name="text">
             <a:extLst xmlns:a="http://schemas.openxmlformats.org/drawingml/2006/main">
               <a:ext uri="{FF2B5EF4-FFF2-40B4-BE49-F238E27FC236}">
-                <a16:creationId xmlns:a16="http://schemas.microsoft.com/office/drawing/2014/main" id="{1DCDDB5B-B800-4FE2-BD3F-0EF3C73CC75C}"/>
+                <a16:creationId xmlns:a16="http://schemas.microsoft.com/office/drawing/2014/main" id="{2966C663-C66D-4B3F-98AB-3432A78A3B95}"/>
               </a:ext>
             </a:extLst>
           </p:cNvPr>
@@ -2503,7 +2503,7 @@
     </p:spTree>
     <p:extLst>
       <p:ext uri="{BB962C8B-B14F-4D97-AF65-F5344CB8AC3E}">
-        <p14:creationId xmlns:p14="http://schemas.microsoft.com/office/powerpoint/2010/main" val="1892961925"/>
+        <p14:creationId xmlns:p14="http://schemas.microsoft.com/office/powerpoint/2010/main" val="166948314"/>
       </p:ext>
     </p:extLst>
   </p:cSld>
@@ -2527,7 +2527,7 @@
           <p:cNvPr id="26" name="background">
             <a:extLst xmlns:a="http://schemas.openxmlformats.org/drawingml/2006/main">
               <a:ext uri="{FF2B5EF4-FFF2-40B4-BE49-F238E27FC236}">
-                <a16:creationId xmlns:a16="http://schemas.microsoft.com/office/drawing/2014/main" id="{A7A0E6A7-9FAC-4486-BDAE-B5166BCB866A}"/>
+                <a16:creationId xmlns:a16="http://schemas.microsoft.com/office/drawing/2014/main" id="{E08E1DD9-5788-487A-8087-32B4C8D3F706}"/>
               </a:ext>
             </a:extLst>
           </p:cNvPr>
@@ -2558,7 +2558,7 @@
           <p:cNvPr id="2" name="text">
             <a:extLst xmlns:a="http://schemas.openxmlformats.org/drawingml/2006/main">
               <a:ext uri="{FF2B5EF4-FFF2-40B4-BE49-F238E27FC236}">
-                <a16:creationId xmlns:a16="http://schemas.microsoft.com/office/drawing/2014/main" id="{E7F26F23-034B-4C99-AD34-41B43D8F8F20}"/>
+                <a16:creationId xmlns:a16="http://schemas.microsoft.com/office/drawing/2014/main" id="{7D151613-B2FA-438A-A922-16C93E1EE3E1}"/>
               </a:ext>
             </a:extLst>
           </p:cNvPr>
@@ -2615,7 +2615,7 @@
           <p:cNvPr id="3" name="rule">
             <a:extLst xmlns:a="http://schemas.openxmlformats.org/drawingml/2006/main">
               <a:ext uri="{FF2B5EF4-FFF2-40B4-BE49-F238E27FC236}">
-                <a16:creationId xmlns:a16="http://schemas.microsoft.com/office/drawing/2014/main" id="{4BFCCE85-188B-46FE-88B3-486E78B891A3}"/>
+                <a16:creationId xmlns:a16="http://schemas.microsoft.com/office/drawing/2014/main" id="{9D35AA78-F2BB-43F0-B82D-2154AAB97E02}"/>
               </a:ext>
             </a:extLst>
           </p:cNvPr>
@@ -2646,7 +2646,7 @@
           <p:cNvPr id="4" name="page">
             <a:extLst xmlns:a="http://schemas.openxmlformats.org/drawingml/2006/main">
               <a:ext uri="{FF2B5EF4-FFF2-40B4-BE49-F238E27FC236}">
-                <a16:creationId xmlns:a16="http://schemas.microsoft.com/office/drawing/2014/main" id="{9060986C-634E-491D-AF8F-12412A45D8B4}"/>
+                <a16:creationId xmlns:a16="http://schemas.microsoft.com/office/drawing/2014/main" id="{02E397BE-B865-41D5-A696-92DC9279F25A}"/>
               </a:ext>
             </a:extLst>
           </p:cNvPr>
@@ -2725,7 +2725,7 @@
           <p:cNvPr id="6" name="flow-0">
             <a:extLst xmlns:a="http://schemas.openxmlformats.org/drawingml/2006/main">
               <a:ext uri="{FF2B5EF4-FFF2-40B4-BE49-F238E27FC236}">
-                <a16:creationId xmlns:a16="http://schemas.microsoft.com/office/drawing/2014/main" id="{FA99AD45-1D2B-4186-A286-6C5B348D0D96}"/>
+                <a16:creationId xmlns:a16="http://schemas.microsoft.com/office/drawing/2014/main" id="{0B495B55-DA26-446E-BA0D-4CEFE911A753}"/>
               </a:ext>
             </a:extLst>
           </p:cNvPr>
@@ -2758,7 +2758,7 @@
           <p:cNvPr id="7" name="text">
             <a:extLst xmlns:a="http://schemas.openxmlformats.org/drawingml/2006/main">
               <a:ext uri="{FF2B5EF4-FFF2-40B4-BE49-F238E27FC236}">
-                <a16:creationId xmlns:a16="http://schemas.microsoft.com/office/drawing/2014/main" id="{56843DF6-A7D4-487A-861B-599268A903AD}"/>
+                <a16:creationId xmlns:a16="http://schemas.microsoft.com/office/drawing/2014/main" id="{E4326F5A-6549-4B9A-83CE-489C9CE5D0AD}"/>
               </a:ext>
             </a:extLst>
           </p:cNvPr>
@@ -2815,7 +2815,7 @@
           <p:cNvPr id="8" name="text">
             <a:extLst xmlns:a="http://schemas.openxmlformats.org/drawingml/2006/main">
               <a:ext uri="{FF2B5EF4-FFF2-40B4-BE49-F238E27FC236}">
-                <a16:creationId xmlns:a16="http://schemas.microsoft.com/office/drawing/2014/main" id="{9AB47949-6070-4FB1-B3ED-159C8293972D}"/>
+                <a16:creationId xmlns:a16="http://schemas.microsoft.com/office/drawing/2014/main" id="{7A70076C-CDDA-4B09-9D4F-21FD187B5F02}"/>
               </a:ext>
             </a:extLst>
           </p:cNvPr>
@@ -2872,7 +2872,7 @@
           <p:cNvPr id="9" name="text">
             <a:extLst xmlns:a="http://schemas.openxmlformats.org/drawingml/2006/main">
               <a:ext uri="{FF2B5EF4-FFF2-40B4-BE49-F238E27FC236}">
-                <a16:creationId xmlns:a16="http://schemas.microsoft.com/office/drawing/2014/main" id="{0EFF436A-D9DE-44C1-8E53-E65469F83BDD}"/>
+                <a16:creationId xmlns:a16="http://schemas.microsoft.com/office/drawing/2014/main" id="{F8A68BB0-152C-4F08-ADA5-A0542C897A37}"/>
               </a:ext>
             </a:extLst>
           </p:cNvPr>
@@ -2952,7 +2952,7 @@
           <p:cNvPr id="11" name="flow-1">
             <a:extLst xmlns:a="http://schemas.openxmlformats.org/drawingml/2006/main">
               <a:ext uri="{FF2B5EF4-FFF2-40B4-BE49-F238E27FC236}">
-                <a16:creationId xmlns:a16="http://schemas.microsoft.com/office/drawing/2014/main" id="{3CFEE2BE-0989-45C5-92EE-90CF04E11549}"/>
+                <a16:creationId xmlns:a16="http://schemas.microsoft.com/office/drawing/2014/main" id="{17AD9708-9934-4406-8005-211F74504FE2}"/>
               </a:ext>
             </a:extLst>
           </p:cNvPr>
@@ -2985,7 +2985,7 @@
           <p:cNvPr id="12" name="text">
             <a:extLst xmlns:a="http://schemas.openxmlformats.org/drawingml/2006/main">
               <a:ext uri="{FF2B5EF4-FFF2-40B4-BE49-F238E27FC236}">
-                <a16:creationId xmlns:a16="http://schemas.microsoft.com/office/drawing/2014/main" id="{91E220AB-5200-474D-9847-3564EE3A8F88}"/>
+                <a16:creationId xmlns:a16="http://schemas.microsoft.com/office/drawing/2014/main" id="{01806951-0944-45FD-88CE-775D507B6AF1}"/>
               </a:ext>
             </a:extLst>
           </p:cNvPr>
@@ -3042,7 +3042,7 @@
           <p:cNvPr id="13" name="text">
             <a:extLst xmlns:a="http://schemas.openxmlformats.org/drawingml/2006/main">
               <a:ext uri="{FF2B5EF4-FFF2-40B4-BE49-F238E27FC236}">
-                <a16:creationId xmlns:a16="http://schemas.microsoft.com/office/drawing/2014/main" id="{DCC7B3BB-4AA3-497B-878D-AC337CF20678}"/>
+                <a16:creationId xmlns:a16="http://schemas.microsoft.com/office/drawing/2014/main" id="{B4F13A78-9948-4FDB-B701-7B9A78597262}"/>
               </a:ext>
             </a:extLst>
           </p:cNvPr>
@@ -3099,7 +3099,7 @@
           <p:cNvPr id="14" name="text">
             <a:extLst xmlns:a="http://schemas.openxmlformats.org/drawingml/2006/main">
               <a:ext uri="{FF2B5EF4-FFF2-40B4-BE49-F238E27FC236}">
-                <a16:creationId xmlns:a16="http://schemas.microsoft.com/office/drawing/2014/main" id="{4B021AB1-04E4-4821-8618-EB3A5E67A50E}"/>
+                <a16:creationId xmlns:a16="http://schemas.microsoft.com/office/drawing/2014/main" id="{745BFD02-EDA3-4547-9EC0-B78CA5C0672C}"/>
               </a:ext>
             </a:extLst>
           </p:cNvPr>
@@ -3179,7 +3179,7 @@
           <p:cNvPr id="16" name="flow-2">
             <a:extLst xmlns:a="http://schemas.openxmlformats.org/drawingml/2006/main">
               <a:ext uri="{FF2B5EF4-FFF2-40B4-BE49-F238E27FC236}">
-                <a16:creationId xmlns:a16="http://schemas.microsoft.com/office/drawing/2014/main" id="{84F251AE-3EC3-4CB6-88D8-45581B6E2AA7}"/>
+                <a16:creationId xmlns:a16="http://schemas.microsoft.com/office/drawing/2014/main" id="{275B2BC9-8C7E-43B8-8A67-F77E6B94687E}"/>
               </a:ext>
             </a:extLst>
           </p:cNvPr>
@@ -3212,7 +3212,7 @@
           <p:cNvPr id="17" name="text">
             <a:extLst xmlns:a="http://schemas.openxmlformats.org/drawingml/2006/main">
               <a:ext uri="{FF2B5EF4-FFF2-40B4-BE49-F238E27FC236}">
-                <a16:creationId xmlns:a16="http://schemas.microsoft.com/office/drawing/2014/main" id="{6EBAED42-8090-4008-9FAE-5D065738C033}"/>
+                <a16:creationId xmlns:a16="http://schemas.microsoft.com/office/drawing/2014/main" id="{E5D55631-917A-49D3-8372-616744198562}"/>
               </a:ext>
             </a:extLst>
           </p:cNvPr>
@@ -3269,7 +3269,7 @@
           <p:cNvPr id="18" name="text">
             <a:extLst xmlns:a="http://schemas.openxmlformats.org/drawingml/2006/main">
               <a:ext uri="{FF2B5EF4-FFF2-40B4-BE49-F238E27FC236}">
-                <a16:creationId xmlns:a16="http://schemas.microsoft.com/office/drawing/2014/main" id="{AD612BA8-1AC9-40B8-85C6-C0F4C27BC025}"/>
+                <a16:creationId xmlns:a16="http://schemas.microsoft.com/office/drawing/2014/main" id="{C74A23FF-6D0B-49E2-8C49-124D8306E5DD}"/>
               </a:ext>
             </a:extLst>
           </p:cNvPr>
@@ -3326,7 +3326,7 @@
           <p:cNvPr id="19" name="text">
             <a:extLst xmlns:a="http://schemas.openxmlformats.org/drawingml/2006/main">
               <a:ext uri="{FF2B5EF4-FFF2-40B4-BE49-F238E27FC236}">
-                <a16:creationId xmlns:a16="http://schemas.microsoft.com/office/drawing/2014/main" id="{A6AEB3E5-39EC-46EF-9B31-594DC0092A96}"/>
+                <a16:creationId xmlns:a16="http://schemas.microsoft.com/office/drawing/2014/main" id="{AFFBEADD-005C-4306-8F7E-E3C47E2696EE}"/>
               </a:ext>
             </a:extLst>
           </p:cNvPr>
@@ -3384,7 +3384,7 @@
           <p:cNvPr id="20" name="flow-3">
             <a:extLst xmlns:a="http://schemas.openxmlformats.org/drawingml/2006/main">
               <a:ext uri="{FF2B5EF4-FFF2-40B4-BE49-F238E27FC236}">
-                <a16:creationId xmlns:a16="http://schemas.microsoft.com/office/drawing/2014/main" id="{3CB14019-D88B-47BA-9B4C-F93C8EADEF65}"/>
+                <a16:creationId xmlns:a16="http://schemas.microsoft.com/office/drawing/2014/main" id="{A840C3AB-9414-4D77-AD1D-B26B37E42F16}"/>
               </a:ext>
             </a:extLst>
           </p:cNvPr>
@@ -3417,7 +3417,7 @@
           <p:cNvPr id="21" name="text">
             <a:extLst xmlns:a="http://schemas.openxmlformats.org/drawingml/2006/main">
               <a:ext uri="{FF2B5EF4-FFF2-40B4-BE49-F238E27FC236}">
-                <a16:creationId xmlns:a16="http://schemas.microsoft.com/office/drawing/2014/main" id="{B483B50F-35A5-49CC-8BFD-D19CFC7E7723}"/>
+                <a16:creationId xmlns:a16="http://schemas.microsoft.com/office/drawing/2014/main" id="{D9B87075-F5E4-440D-998F-8C0AA8EC3965}"/>
               </a:ext>
             </a:extLst>
           </p:cNvPr>
@@ -3474,7 +3474,7 @@
           <p:cNvPr id="22" name="text">
             <a:extLst xmlns:a="http://schemas.openxmlformats.org/drawingml/2006/main">
               <a:ext uri="{FF2B5EF4-FFF2-40B4-BE49-F238E27FC236}">
-                <a16:creationId xmlns:a16="http://schemas.microsoft.com/office/drawing/2014/main" id="{2601785E-A6F9-41E3-8342-F35CBFDBE08D}"/>
+                <a16:creationId xmlns:a16="http://schemas.microsoft.com/office/drawing/2014/main" id="{B643B084-21F7-410C-A369-3E61A65E135D}"/>
               </a:ext>
             </a:extLst>
           </p:cNvPr>
@@ -3531,7 +3531,7 @@
           <p:cNvPr id="23" name="text">
             <a:extLst xmlns:a="http://schemas.openxmlformats.org/drawingml/2006/main">
               <a:ext uri="{FF2B5EF4-FFF2-40B4-BE49-F238E27FC236}">
-                <a16:creationId xmlns:a16="http://schemas.microsoft.com/office/drawing/2014/main" id="{8519104D-84E3-4B37-991D-231A7B279393}"/>
+                <a16:creationId xmlns:a16="http://schemas.microsoft.com/office/drawing/2014/main" id="{8FC9BF0D-5121-4489-AF03-66A44ADC2B1E}"/>
               </a:ext>
             </a:extLst>
           </p:cNvPr>
@@ -3589,7 +3589,7 @@
           <p:cNvPr id="24" name="chat">
             <a:extLst xmlns:a="http://schemas.openxmlformats.org/drawingml/2006/main">
               <a:ext uri="{FF2B5EF4-FFF2-40B4-BE49-F238E27FC236}">
-                <a16:creationId xmlns:a16="http://schemas.microsoft.com/office/drawing/2014/main" id="{9D5587E0-9B99-4252-BE16-9BE7C0C93E17}"/>
+                <a16:creationId xmlns:a16="http://schemas.microsoft.com/office/drawing/2014/main" id="{A7ED1F10-079B-4386-B080-56BA7464FEEF}"/>
               </a:ext>
             </a:extLst>
           </p:cNvPr>
@@ -3620,7 +3620,7 @@
           <p:cNvPr id="25" name="text">
             <a:extLst xmlns:a="http://schemas.openxmlformats.org/drawingml/2006/main">
               <a:ext uri="{FF2B5EF4-FFF2-40B4-BE49-F238E27FC236}">
-                <a16:creationId xmlns:a16="http://schemas.microsoft.com/office/drawing/2014/main" id="{B2FF4D4F-B69F-44B5-B50D-271443DDA66A}"/>
+                <a16:creationId xmlns:a16="http://schemas.microsoft.com/office/drawing/2014/main" id="{3071592F-4741-41B8-A9D7-DCE0F8C7F946}"/>
               </a:ext>
             </a:extLst>
           </p:cNvPr>
@@ -3675,7 +3675,7 @@
     </p:spTree>
     <p:extLst>
       <p:ext uri="{BB962C8B-B14F-4D97-AF65-F5344CB8AC3E}">
-        <p14:creationId xmlns:p14="http://schemas.microsoft.com/office/powerpoint/2010/main" val="902366875"/>
+        <p14:creationId xmlns:p14="http://schemas.microsoft.com/office/powerpoint/2010/main" val="1626646104"/>
       </p:ext>
     </p:extLst>
   </p:cSld>
@@ -3699,7 +3699,7 @@
           <p:cNvPr id="21" name="background">
             <a:extLst xmlns:a="http://schemas.openxmlformats.org/drawingml/2006/main">
               <a:ext uri="{FF2B5EF4-FFF2-40B4-BE49-F238E27FC236}">
-                <a16:creationId xmlns:a16="http://schemas.microsoft.com/office/drawing/2014/main" id="{D39B7378-87D3-4E87-A48D-C02A34F54A24}"/>
+                <a16:creationId xmlns:a16="http://schemas.microsoft.com/office/drawing/2014/main" id="{F88C17C4-2591-463F-8BB2-C3E3FD473726}"/>
               </a:ext>
             </a:extLst>
           </p:cNvPr>
@@ -3730,7 +3730,7 @@
           <p:cNvPr id="2" name="text">
             <a:extLst xmlns:a="http://schemas.openxmlformats.org/drawingml/2006/main">
               <a:ext uri="{FF2B5EF4-FFF2-40B4-BE49-F238E27FC236}">
-                <a16:creationId xmlns:a16="http://schemas.microsoft.com/office/drawing/2014/main" id="{A9C81BAF-714E-43DD-8921-A9AB632ACCE1}"/>
+                <a16:creationId xmlns:a16="http://schemas.microsoft.com/office/drawing/2014/main" id="{D4C44A32-C6D9-4214-B0BF-3FED098177BF}"/>
               </a:ext>
             </a:extLst>
           </p:cNvPr>
@@ -3777,7 +3777,7 @@
                 <a:ea typeface="Malgun Gothic"/>
                 <a:cs typeface="Malgun Gothic"/>
               </a:rPr>
-              <a:t>Discussion #167의 후속 응답 누락과 CLI 가독성을 해결했습니다</a:t>
+              <a:t>Discussion #167의 4,000자 입력 오류를 복구했습니다</a:t>
             </a:r>
           </a:p>
         </p:txBody>
@@ -3787,7 +3787,7 @@
           <p:cNvPr id="3" name="rule">
             <a:extLst xmlns:a="http://schemas.openxmlformats.org/drawingml/2006/main">
               <a:ext uri="{FF2B5EF4-FFF2-40B4-BE49-F238E27FC236}">
-                <a16:creationId xmlns:a16="http://schemas.microsoft.com/office/drawing/2014/main" id="{162E28D3-0286-47F9-8D39-8B3BA4825870}"/>
+                <a16:creationId xmlns:a16="http://schemas.microsoft.com/office/drawing/2014/main" id="{E6C53D10-A550-483F-BA64-6011AA9EEAFA}"/>
               </a:ext>
             </a:extLst>
           </p:cNvPr>
@@ -3818,7 +3818,7 @@
           <p:cNvPr id="4" name="page">
             <a:extLst xmlns:a="http://schemas.openxmlformats.org/drawingml/2006/main">
               <a:ext uri="{FF2B5EF4-FFF2-40B4-BE49-F238E27FC236}">
-                <a16:creationId xmlns:a16="http://schemas.microsoft.com/office/drawing/2014/main" id="{7D4F89E9-CE89-47AF-9D01-9E87D23DB28F}"/>
+                <a16:creationId xmlns:a16="http://schemas.microsoft.com/office/drawing/2014/main" id="{B3A44364-CC73-415A-A371-DDD3A893955E}"/>
               </a:ext>
             </a:extLst>
           </p:cNvPr>
@@ -3875,7 +3875,7 @@
           <p:cNvPr id="5" name="text">
             <a:extLst xmlns:a="http://schemas.openxmlformats.org/drawingml/2006/main">
               <a:ext uri="{FF2B5EF4-FFF2-40B4-BE49-F238E27FC236}">
-                <a16:creationId xmlns:a16="http://schemas.microsoft.com/office/drawing/2014/main" id="{49330F75-01F6-4C93-B5AB-6D162EBDB342}"/>
+                <a16:creationId xmlns:a16="http://schemas.microsoft.com/office/drawing/2014/main" id="{05A9E360-5B5B-436D-8010-96EC4B341164}"/>
               </a:ext>
             </a:extLst>
           </p:cNvPr>
@@ -3922,7 +3922,7 @@
                 <a:ea typeface="Malgun Gothic"/>
                 <a:cs typeface="Malgun Gothic"/>
               </a:rPr>
-              <a:t>누락</a:t>
+              <a:t>오류</a:t>
             </a:r>
           </a:p>
         </p:txBody>
@@ -3932,7 +3932,7 @@
           <p:cNvPr id="6" name="text">
             <a:extLst xmlns:a="http://schemas.openxmlformats.org/drawingml/2006/main">
               <a:ext uri="{FF2B5EF4-FFF2-40B4-BE49-F238E27FC236}">
-                <a16:creationId xmlns:a16="http://schemas.microsoft.com/office/drawing/2014/main" id="{D3D27FB4-9FF3-4C93-83D5-9C0FD68F7E97}"/>
+                <a16:creationId xmlns:a16="http://schemas.microsoft.com/office/drawing/2014/main" id="{54787956-DD67-4CF9-8237-387105F19507}"/>
               </a:ext>
             </a:extLst>
           </p:cNvPr>
@@ -3979,7 +3979,7 @@
                 <a:ea typeface="Malgun Gothic"/>
                 <a:cs typeface="Malgun Gothic"/>
               </a:rPr>
-              <a:t>Post #380</a:t>
+              <a:t>Post #382</a:t>
             </a:r>
           </a:p>
         </p:txBody>
@@ -3989,7 +3989,7 @@
           <p:cNvPr id="7" name="text">
             <a:extLst xmlns:a="http://schemas.openxmlformats.org/drawingml/2006/main">
               <a:ext uri="{FF2B5EF4-FFF2-40B4-BE49-F238E27FC236}">
-                <a16:creationId xmlns:a16="http://schemas.microsoft.com/office/drawing/2014/main" id="{FFFB5262-B99E-4DEB-8BBF-1FBF5B0FC869}"/>
+                <a16:creationId xmlns:a16="http://schemas.microsoft.com/office/drawing/2014/main" id="{2E0DCAE6-C4E2-45C5-8E23-FE7780A0C0CD}"/>
               </a:ext>
             </a:extLst>
           </p:cNvPr>
@@ -4036,8 +4036,8 @@
                 <a:ea typeface="Malgun Gothic"/>
                 <a:cs typeface="Malgun Gothic"/>
               </a:rPr>
-              <a:t>다른 참여자를 STAFF로
-기록만 하고 응답하지 않음</a:t>
+              <a:t>누적 대화 4,000자
+Activepieces HTTP 500</a:t>
             </a:r>
           </a:p>
         </p:txBody>
@@ -4047,7 +4047,7 @@
           <p:cNvPr id="8" name="divider-1">
             <a:extLst xmlns:a="http://schemas.openxmlformats.org/drawingml/2006/main">
               <a:ext uri="{FF2B5EF4-FFF2-40B4-BE49-F238E27FC236}">
-                <a16:creationId xmlns:a16="http://schemas.microsoft.com/office/drawing/2014/main" id="{56DF4CA8-855B-4402-9689-24C5F669832D}"/>
+                <a16:creationId xmlns:a16="http://schemas.microsoft.com/office/drawing/2014/main" id="{F349A14F-C1BA-45FB-9143-40EF4C7C1C5A}"/>
               </a:ext>
             </a:extLst>
           </p:cNvPr>
@@ -4078,7 +4078,7 @@
           <p:cNvPr id="9" name="text">
             <a:extLst xmlns:a="http://schemas.openxmlformats.org/drawingml/2006/main">
               <a:ext uri="{FF2B5EF4-FFF2-40B4-BE49-F238E27FC236}">
-                <a16:creationId xmlns:a16="http://schemas.microsoft.com/office/drawing/2014/main" id="{DA778A78-BC4D-46C2-B5DE-EC0455BC906D}"/>
+                <a16:creationId xmlns:a16="http://schemas.microsoft.com/office/drawing/2014/main" id="{2E0F96E8-9787-4A64-9D09-836452916DED}"/>
               </a:ext>
             </a:extLst>
           </p:cNvPr>
@@ -4109,7 +4109,7 @@
               <a:buNone/>
               <a:defRPr sz="3300">
                 <a:solidFill>
-                  <a:srgbClr val="2563EB"/>
+                  <a:srgbClr val="B45309"/>
                 </a:solidFill>
                 <a:latin typeface="Malgun Gothic"/>
                 <a:ea typeface="Malgun Gothic"/>
@@ -4119,13 +4119,13 @@
             <a:r>
               <a:rPr sz="3300" b="1">
                 <a:solidFill>
-                  <a:srgbClr val="2563EB"/>
+                  <a:srgbClr val="B45309"/>
                 </a:solidFill>
                 <a:latin typeface="Malgun Gothic"/>
                 <a:ea typeface="Malgun Gothic"/>
                 <a:cs typeface="Malgun Gothic"/>
               </a:rPr>
-              <a:t>연결</a:t>
+              <a:t>원인</a:t>
             </a:r>
           </a:p>
         </p:txBody>
@@ -4135,7 +4135,7 @@
           <p:cNvPr id="10" name="text">
             <a:extLst xmlns:a="http://schemas.openxmlformats.org/drawingml/2006/main">
               <a:ext uri="{FF2B5EF4-FFF2-40B4-BE49-F238E27FC236}">
-                <a16:creationId xmlns:a16="http://schemas.microsoft.com/office/drawing/2014/main" id="{B6A10206-DCFF-4C5E-9D7D-FCEFBAC2E111}"/>
+                <a16:creationId xmlns:a16="http://schemas.microsoft.com/office/drawing/2014/main" id="{E7D3146D-3AD7-41F9-B398-D6EF4E078F27}"/>
               </a:ext>
             </a:extLst>
           </p:cNvPr>
@@ -4182,7 +4182,7 @@
                 <a:ea typeface="Malgun Gothic"/>
                 <a:cs typeface="Malgun Gothic"/>
               </a:rPr>
-              <a:t>모든 사람 입력</a:t>
+              <a:t>ValidationError</a:t>
             </a:r>
           </a:p>
         </p:txBody>
@@ -4192,7 +4192,7 @@
           <p:cNvPr id="11" name="text">
             <a:extLst xmlns:a="http://schemas.openxmlformats.org/drawingml/2006/main">
               <a:ext uri="{FF2B5EF4-FFF2-40B4-BE49-F238E27FC236}">
-                <a16:creationId xmlns:a16="http://schemas.microsoft.com/office/drawing/2014/main" id="{1E583847-A578-46F4-BB79-E13AE0C522CF}"/>
+                <a16:creationId xmlns:a16="http://schemas.microsoft.com/office/drawing/2014/main" id="{6DA16AF6-9BCD-4412-8592-D4D60E5843E1}"/>
               </a:ext>
             </a:extLst>
           </p:cNvPr>
@@ -4239,8 +4239,8 @@
                 <a:ea typeface="Malgun Gothic"/>
                 <a:cs typeface="Malgun Gothic"/>
               </a:rPr>
-              <a:t>REQUESTER · STAFF 응답
-Assistant 자신만 제외</a:t>
+              <a:t>검색 키워드와
+재작성 지침을 뒤에 추가</a:t>
             </a:r>
           </a:p>
         </p:txBody>
@@ -4250,7 +4250,7 @@
           <p:cNvPr id="12" name="divider-2">
             <a:extLst xmlns:a="http://schemas.openxmlformats.org/drawingml/2006/main">
               <a:ext uri="{FF2B5EF4-FFF2-40B4-BE49-F238E27FC236}">
-                <a16:creationId xmlns:a16="http://schemas.microsoft.com/office/drawing/2014/main" id="{F6ED9FD2-FE50-40C1-9626-9899DDB7D717}"/>
+                <a16:creationId xmlns:a16="http://schemas.microsoft.com/office/drawing/2014/main" id="{248DFBE1-FB03-4A70-8F2C-7548F7D33DDC}"/>
               </a:ext>
             </a:extLst>
           </p:cNvPr>
@@ -4281,7 +4281,7 @@
           <p:cNvPr id="13" name="text">
             <a:extLst xmlns:a="http://schemas.openxmlformats.org/drawingml/2006/main">
               <a:ext uri="{FF2B5EF4-FFF2-40B4-BE49-F238E27FC236}">
-                <a16:creationId xmlns:a16="http://schemas.microsoft.com/office/drawing/2014/main" id="{A6508167-7EDB-4EA5-AC6E-9ECD67FAD636}"/>
+                <a16:creationId xmlns:a16="http://schemas.microsoft.com/office/drawing/2014/main" id="{D98D6E1E-33CD-4E63-BA79-6F3D9E2FF4A0}"/>
               </a:ext>
             </a:extLst>
           </p:cNvPr>
@@ -4312,7 +4312,7 @@
               <a:buNone/>
               <a:defRPr sz="3300">
                 <a:solidFill>
-                  <a:srgbClr val="15803D"/>
+                  <a:srgbClr val="2563EB"/>
                 </a:solidFill>
                 <a:latin typeface="Malgun Gothic"/>
                 <a:ea typeface="Malgun Gothic"/>
@@ -4322,13 +4322,13 @@
             <a:r>
               <a:rPr sz="3300" b="1">
                 <a:solidFill>
-                  <a:srgbClr val="15803D"/>
+                  <a:srgbClr val="2563EB"/>
                 </a:solidFill>
                 <a:latin typeface="Malgun Gothic"/>
                 <a:ea typeface="Malgun Gothic"/>
                 <a:cs typeface="Malgun Gothic"/>
               </a:rPr>
-              <a:t>표시</a:t>
+              <a:t>수정</a:t>
             </a:r>
           </a:p>
         </p:txBody>
@@ -4338,7 +4338,7 @@
           <p:cNvPr id="14" name="text">
             <a:extLst xmlns:a="http://schemas.openxmlformats.org/drawingml/2006/main">
               <a:ext uri="{FF2B5EF4-FFF2-40B4-BE49-F238E27FC236}">
-                <a16:creationId xmlns:a16="http://schemas.microsoft.com/office/drawing/2014/main" id="{24F30423-F159-4F8D-9042-71049EFBCE92}"/>
+                <a16:creationId xmlns:a16="http://schemas.microsoft.com/office/drawing/2014/main" id="{8C25AC1D-82C1-4F40-BA05-4E5F4AC016E1}"/>
               </a:ext>
             </a:extLst>
           </p:cNvPr>
@@ -4385,7 +4385,7 @@
                 <a:ea typeface="Malgun Gothic"/>
                 <a:cs typeface="Malgun Gothic"/>
               </a:rPr>
-              <a:t>CLI 코드 블록</a:t>
+              <a:t>공간 선예약</a:t>
             </a:r>
           </a:p>
         </p:txBody>
@@ -4395,7 +4395,7 @@
           <p:cNvPr id="15" name="text">
             <a:extLst xmlns:a="http://schemas.openxmlformats.org/drawingml/2006/main">
               <a:ext uri="{FF2B5EF4-FFF2-40B4-BE49-F238E27FC236}">
-                <a16:creationId xmlns:a16="http://schemas.microsoft.com/office/drawing/2014/main" id="{908D918F-0B4E-4EBC-8FC6-39AFC6F0AAFE}"/>
+                <a16:creationId xmlns:a16="http://schemas.microsoft.com/office/drawing/2014/main" id="{F39BAF28-207D-4808-B697-2376DE08706E}"/>
               </a:ext>
             </a:extLst>
           </p:cNvPr>
@@ -4442,9 +4442,9 @@
                 <a:ea typeface="Malgun Gothic"/>
                 <a:cs typeface="Malgun Gothic"/>
               </a:rPr>
-              <a:t>설명 먼저
-복사 가능한 bash 명령
-인라인 CLI 0개</a:t>
+              <a:t>부가 지침 길이를 빼고
+대화 본문을 4,000자
+안에 맞춤</a:t>
             </a:r>
           </a:p>
         </p:txBody>
@@ -4454,7 +4454,7 @@
           <p:cNvPr id="16" name="divider-3">
             <a:extLst xmlns:a="http://schemas.openxmlformats.org/drawingml/2006/main">
               <a:ext uri="{FF2B5EF4-FFF2-40B4-BE49-F238E27FC236}">
-                <a16:creationId xmlns:a16="http://schemas.microsoft.com/office/drawing/2014/main" id="{A22B5A61-8D70-4227-8BAE-CCCE2530A61D}"/>
+                <a16:creationId xmlns:a16="http://schemas.microsoft.com/office/drawing/2014/main" id="{0B8DE827-49D1-44D6-8521-4C8A390571F3}"/>
               </a:ext>
             </a:extLst>
           </p:cNvPr>
@@ -4485,7 +4485,7 @@
           <p:cNvPr id="17" name="text">
             <a:extLst xmlns:a="http://schemas.openxmlformats.org/drawingml/2006/main">
               <a:ext uri="{FF2B5EF4-FFF2-40B4-BE49-F238E27FC236}">
-                <a16:creationId xmlns:a16="http://schemas.microsoft.com/office/drawing/2014/main" id="{FC223BCF-0281-47D3-9F9A-320B72C194FB}"/>
+                <a16:creationId xmlns:a16="http://schemas.microsoft.com/office/drawing/2014/main" id="{E0998317-2579-4A90-A03A-E3F26A1369F2}"/>
               </a:ext>
             </a:extLst>
           </p:cNvPr>
@@ -4532,7 +4532,7 @@
                 <a:ea typeface="Malgun Gothic"/>
                 <a:cs typeface="Malgun Gothic"/>
               </a:rPr>
-              <a:t>#381</a:t>
+              <a:t>#383</a:t>
             </a:r>
           </a:p>
         </p:txBody>
@@ -4542,7 +4542,7 @@
           <p:cNvPr id="18" name="text">
             <a:extLst xmlns:a="http://schemas.openxmlformats.org/drawingml/2006/main">
               <a:ext uri="{FF2B5EF4-FFF2-40B4-BE49-F238E27FC236}">
-                <a16:creationId xmlns:a16="http://schemas.microsoft.com/office/drawing/2014/main" id="{FD5425D4-1B9E-4F8C-835B-9BA7F987D0E5}"/>
+                <a16:creationId xmlns:a16="http://schemas.microsoft.com/office/drawing/2014/main" id="{417DEBCD-A02D-432C-A2BE-C6F0C65B2936}"/>
               </a:ext>
             </a:extLst>
           </p:cNvPr>
@@ -4589,7 +4589,7 @@
                 <a:ea typeface="Malgun Gothic"/>
                 <a:cs typeface="Malgun Gothic"/>
               </a:rPr>
-              <a:t>코드 블록 5개</a:t>
+              <a:t>HTTP 201</a:t>
             </a:r>
           </a:p>
         </p:txBody>
@@ -4599,7 +4599,7 @@
           <p:cNvPr id="19" name="text">
             <a:extLst xmlns:a="http://schemas.openxmlformats.org/drawingml/2006/main">
               <a:ext uri="{FF2B5EF4-FFF2-40B4-BE49-F238E27FC236}">
-                <a16:creationId xmlns:a16="http://schemas.microsoft.com/office/drawing/2014/main" id="{4647609E-3371-4D9B-A17C-976BAF036A32}"/>
+                <a16:creationId xmlns:a16="http://schemas.microsoft.com/office/drawing/2014/main" id="{40A0D582-6EE8-47FF-89D3-42FEDD2B0A33}"/>
               </a:ext>
             </a:extLst>
           </p:cNvPr>
@@ -4646,7 +4646,7 @@
                 <a:ea typeface="Malgun Gothic"/>
                 <a:cs typeface="Malgun Gothic"/>
               </a:rPr>
-              <a:t>225</a:t>
+              <a:t>227</a:t>
             </a:r>
           </a:p>
         </p:txBody>
@@ -4656,7 +4656,7 @@
           <p:cNvPr id="20" name="text">
             <a:extLst xmlns:a="http://schemas.openxmlformats.org/drawingml/2006/main">
               <a:ext uri="{FF2B5EF4-FFF2-40B4-BE49-F238E27FC236}">
-                <a16:creationId xmlns:a16="http://schemas.microsoft.com/office/drawing/2014/main" id="{E5CC800F-7608-461F-9C21-D511CC4B15EB}"/>
+                <a16:creationId xmlns:a16="http://schemas.microsoft.com/office/drawing/2014/main" id="{5248F462-C089-41A7-A8A1-77C7D443819A}"/>
               </a:ext>
             </a:extLst>
           </p:cNvPr>
@@ -4711,7 +4711,7 @@
     </p:spTree>
     <p:extLst>
       <p:ext uri="{BB962C8B-B14F-4D97-AF65-F5344CB8AC3E}">
-        <p14:creationId xmlns:p14="http://schemas.microsoft.com/office/powerpoint/2010/main" val="1623689290"/>
+        <p14:creationId xmlns:p14="http://schemas.microsoft.com/office/powerpoint/2010/main" val="1161314903"/>
       </p:ext>
     </p:extLst>
   </p:cSld>
@@ -4735,7 +4735,7 @@
           <p:cNvPr id="10" name="background">
             <a:extLst xmlns:a="http://schemas.openxmlformats.org/drawingml/2006/main">
               <a:ext uri="{FF2B5EF4-FFF2-40B4-BE49-F238E27FC236}">
-                <a16:creationId xmlns:a16="http://schemas.microsoft.com/office/drawing/2014/main" id="{AE1F76A5-30F4-486B-AD7C-DF1B45A97824}"/>
+                <a16:creationId xmlns:a16="http://schemas.microsoft.com/office/drawing/2014/main" id="{FA263E87-C2EF-4CC8-82D3-B8A543E3A1DF}"/>
               </a:ext>
             </a:extLst>
           </p:cNvPr>
@@ -4766,7 +4766,7 @@
           <p:cNvPr id="2" name="closing">
             <a:extLst xmlns:a="http://schemas.openxmlformats.org/drawingml/2006/main">
               <a:ext uri="{FF2B5EF4-FFF2-40B4-BE49-F238E27FC236}">
-                <a16:creationId xmlns:a16="http://schemas.microsoft.com/office/drawing/2014/main" id="{02AE4DCC-288A-4A41-9423-903C5AC2041A}"/>
+                <a16:creationId xmlns:a16="http://schemas.microsoft.com/office/drawing/2014/main" id="{7FFAA82A-40B5-42E8-88AE-ACB7A765F98C}"/>
               </a:ext>
             </a:extLst>
           </p:cNvPr>
@@ -4797,7 +4797,7 @@
           <p:cNvPr id="3" name="text">
             <a:extLst xmlns:a="http://schemas.openxmlformats.org/drawingml/2006/main">
               <a:ext uri="{FF2B5EF4-FFF2-40B4-BE49-F238E27FC236}">
-                <a16:creationId xmlns:a16="http://schemas.microsoft.com/office/drawing/2014/main" id="{749D7720-420B-43BB-98A2-6349F70083B7}"/>
+                <a16:creationId xmlns:a16="http://schemas.microsoft.com/office/drawing/2014/main" id="{D786087E-2563-4EB1-99ED-C57719A2D3A4}"/>
               </a:ext>
             </a:extLst>
           </p:cNvPr>
@@ -4854,7 +4854,7 @@
           <p:cNvPr id="4" name="text">
             <a:extLst xmlns:a="http://schemas.openxmlformats.org/drawingml/2006/main">
               <a:ext uri="{FF2B5EF4-FFF2-40B4-BE49-F238E27FC236}">
-                <a16:creationId xmlns:a16="http://schemas.microsoft.com/office/drawing/2014/main" id="{56609FDF-F41A-41E0-AECF-D87857C88D4B}"/>
+                <a16:creationId xmlns:a16="http://schemas.microsoft.com/office/drawing/2014/main" id="{650D866B-2212-4881-9319-7AD00A2AC95E}"/>
               </a:ext>
             </a:extLst>
           </p:cNvPr>
@@ -4912,7 +4912,7 @@
           <p:cNvPr id="5" name="left-rule">
             <a:extLst xmlns:a="http://schemas.openxmlformats.org/drawingml/2006/main">
               <a:ext uri="{FF2B5EF4-FFF2-40B4-BE49-F238E27FC236}">
-                <a16:creationId xmlns:a16="http://schemas.microsoft.com/office/drawing/2014/main" id="{04993846-3E68-4766-8D69-E0951CFBD651}"/>
+                <a16:creationId xmlns:a16="http://schemas.microsoft.com/office/drawing/2014/main" id="{8F34661E-9BAA-4641-B5A3-082AF3C94127}"/>
               </a:ext>
             </a:extLst>
           </p:cNvPr>
@@ -4943,7 +4943,7 @@
           <p:cNvPr id="6" name="text">
             <a:extLst xmlns:a="http://schemas.openxmlformats.org/drawingml/2006/main">
               <a:ext uri="{FF2B5EF4-FFF2-40B4-BE49-F238E27FC236}">
-                <a16:creationId xmlns:a16="http://schemas.microsoft.com/office/drawing/2014/main" id="{CD567434-F37D-4644-98B5-364425813FD4}"/>
+                <a16:creationId xmlns:a16="http://schemas.microsoft.com/office/drawing/2014/main" id="{4AFBF89B-D375-4AA5-8558-2F1C3A2E460D}"/>
               </a:ext>
             </a:extLst>
           </p:cNvPr>
@@ -4990,7 +4990,7 @@
                 <a:ea typeface="Malgun Gothic"/>
                 <a:cs typeface="Malgun Gothic"/>
               </a:rPr>
-              <a:t>AI Gateway 0.14.4 · OpenAI · 다중 참여자 후속 응답</a:t>
+              <a:t>AI Gateway 0.14.5 · OpenAI · 긴 대화 입력 상한 보호</a:t>
             </a:r>
           </a:p>
         </p:txBody>
@@ -5000,7 +5000,7 @@
           <p:cNvPr id="7" name="text">
             <a:extLst xmlns:a="http://schemas.openxmlformats.org/drawingml/2006/main">
               <a:ext uri="{FF2B5EF4-FFF2-40B4-BE49-F238E27FC236}">
-                <a16:creationId xmlns:a16="http://schemas.microsoft.com/office/drawing/2014/main" id="{0C24936D-D8D6-4A62-9251-3A6275660546}"/>
+                <a16:creationId xmlns:a16="http://schemas.microsoft.com/office/drawing/2014/main" id="{37AD21C3-4599-477A-8065-0AEC0CF67D78}"/>
               </a:ext>
             </a:extLst>
           </p:cNvPr>
@@ -5057,7 +5057,7 @@
           <p:cNvPr id="8" name="text">
             <a:extLst xmlns:a="http://schemas.openxmlformats.org/drawingml/2006/main">
               <a:ext uri="{FF2B5EF4-FFF2-40B4-BE49-F238E27FC236}">
-                <a16:creationId xmlns:a16="http://schemas.microsoft.com/office/drawing/2014/main" id="{67E11D8B-2CE2-47EC-84C9-8240F7F61C86}"/>
+                <a16:creationId xmlns:a16="http://schemas.microsoft.com/office/drawing/2014/main" id="{E9760DFA-A05E-4072-ABA0-A5FA45555F9F}"/>
               </a:ext>
             </a:extLst>
           </p:cNvPr>
@@ -5114,7 +5114,7 @@
           <p:cNvPr id="9" name="text">
             <a:extLst xmlns:a="http://schemas.openxmlformats.org/drawingml/2006/main">
               <a:ext uri="{FF2B5EF4-FFF2-40B4-BE49-F238E27FC236}">
-                <a16:creationId xmlns:a16="http://schemas.microsoft.com/office/drawing/2014/main" id="{6949BA39-C798-4682-B54B-01BA776C31F3}"/>
+                <a16:creationId xmlns:a16="http://schemas.microsoft.com/office/drawing/2014/main" id="{8DDFBFB7-A190-42E0-AE6B-7EB738B01B4B}"/>
               </a:ext>
             </a:extLst>
           </p:cNvPr>
@@ -5169,7 +5169,7 @@
     </p:spTree>
     <p:extLst>
       <p:ext uri="{BB962C8B-B14F-4D97-AF65-F5344CB8AC3E}">
-        <p14:creationId xmlns:p14="http://schemas.microsoft.com/office/powerpoint/2010/main" val="848562894"/>
+        <p14:creationId xmlns:p14="http://schemas.microsoft.com/office/powerpoint/2010/main" val="536863604"/>
       </p:ext>
     </p:extLst>
   </p:cSld>

--- a/output/presentation/techflow-community-auto-publish-kb.pptx
+++ b/output/presentation/techflow-community-auto-publish-kb.pptx
@@ -2,17 +2,17 @@
 <file path=ppt/presentation.xml><?xml version="1.0" encoding="utf-8"?>
 <p:presentation xmlns:p="http://schemas.openxmlformats.org/presentationml/2006/main">
   <p:sldMasterIdLst>
-    <p:sldMasterId xmlns:r="http://schemas.openxmlformats.org/officeDocument/2006/relationships" id="2147483648" r:id="R3bd0d5943022496e"/>
+    <p:sldMasterId xmlns:r="http://schemas.openxmlformats.org/officeDocument/2006/relationships" id="2147483648" r:id="R0ef79fe1a57744ec"/>
   </p:sldMasterIdLst>
   <p:notesMasterIdLst>
-    <p:notesMasterId xmlns:r="http://schemas.openxmlformats.org/officeDocument/2006/relationships" r:id="Rc2590cdb08174e53"/>
+    <p:notesMasterId xmlns:r="http://schemas.openxmlformats.org/officeDocument/2006/relationships" r:id="R3941efff966a42db"/>
   </p:notesMasterIdLst>
   <p:sldIdLst>
-    <p:sldId xmlns:r="http://schemas.openxmlformats.org/officeDocument/2006/relationships" id="256" r:id="R23e41c727d164841"/>
-    <p:sldId xmlns:r="http://schemas.openxmlformats.org/officeDocument/2006/relationships" id="257" r:id="R089bc48c92c7432e"/>
-    <p:sldId xmlns:r="http://schemas.openxmlformats.org/officeDocument/2006/relationships" id="258" r:id="R37b156bde81e4238"/>
-    <p:sldId xmlns:r="http://schemas.openxmlformats.org/officeDocument/2006/relationships" id="259" r:id="Raeb5d2d42cce4aa0"/>
-    <p:sldId xmlns:r="http://schemas.openxmlformats.org/officeDocument/2006/relationships" id="260" r:id="R5077d4a1beb44144"/>
+    <p:sldId xmlns:r="http://schemas.openxmlformats.org/officeDocument/2006/relationships" id="256" r:id="R6ffda805ea4f4356"/>
+    <p:sldId xmlns:r="http://schemas.openxmlformats.org/officeDocument/2006/relationships" id="257" r:id="R26aff7be61e0464b"/>
+    <p:sldId xmlns:r="http://schemas.openxmlformats.org/officeDocument/2006/relationships" id="258" r:id="Rf0c6ce9628494bde"/>
+    <p:sldId xmlns:r="http://schemas.openxmlformats.org/officeDocument/2006/relationships" id="259" r:id="Rebfa75753fb348ba"/>
+    <p:sldId xmlns:r="http://schemas.openxmlformats.org/officeDocument/2006/relationships" id="260" r:id="Rc7e7f5e0bc89478e"/>
   </p:sldIdLst>
   <p:sldSz cx="12192000" cy="6858000"/>
   <p:notesSz cx="6858000" cy="9144000"/>
@@ -681,12 +681,12 @@
           </a:p>
           <a:p xmlns:a="http://schemas.openxmlformats.org/drawingml/2006/main">
             <a:r>
-              <a:t>- docs/reports/issue-69-community-auto-publish-kb-validation.md#3.6</a:t>
-            </a:r>
-          </a:p>
-          <a:p xmlns:a="http://schemas.openxmlformats.org/drawingml/2006/main">
-            <a:r>
-              <a:t>- https://community.ablecloud.io/d/167/383</a:t>
+              <a:t>- docs/reports/issue-69-community-auto-publish-kb-validation.md#3.7</a:t>
+            </a:r>
+          </a:p>
+          <a:p xmlns:a="http://schemas.openxmlformats.org/drawingml/2006/main">
+            <a:r>
+              <a:t>- https://community.ablecloud.io/d/167/384</a:t>
             </a:r>
           </a:p>
         </p:txBody>
@@ -834,7 +834,7 @@
   </p:cSld>
   <p:clrMap bg1="lt1" tx1="dk1" bg2="lt2" tx2="dk2" accent1="accent1" accent2="accent2" accent3="accent3" accent4="accent4" accent5="accent5" accent6="accent6" hlink="hlink" folHlink="folHlink"/>
   <p:sldLayoutIdLst>
-    <p:sldLayoutId xmlns:r="http://schemas.openxmlformats.org/officeDocument/2006/relationships" id="2147483649" r:id="R0130eedaf25448aa"/>
+    <p:sldLayoutId xmlns:r="http://schemas.openxmlformats.org/officeDocument/2006/relationships" id="2147483649" r:id="R244ead8a948b480c"/>
   </p:sldLayoutIdLst>
   <p:txStyles>
     <p:titleStyle>
@@ -1378,7 +1378,7 @@
           <p:cNvPr id="9" name="background">
             <a:extLst xmlns:a="http://schemas.openxmlformats.org/drawingml/2006/main">
               <a:ext uri="{FF2B5EF4-FFF2-40B4-BE49-F238E27FC236}">
-                <a16:creationId xmlns:a16="http://schemas.microsoft.com/office/drawing/2014/main" id="{5751AFB7-E0D2-40D3-82B7-224E2AE2E808}"/>
+                <a16:creationId xmlns:a16="http://schemas.microsoft.com/office/drawing/2014/main" id="{071198FD-D0FF-4295-A118-504CFD70CB1D}"/>
               </a:ext>
             </a:extLst>
           </p:cNvPr>
@@ -1409,7 +1409,7 @@
           <p:cNvPr id="2" name="cover">
             <a:extLst xmlns:a="http://schemas.openxmlformats.org/drawingml/2006/main">
               <a:ext uri="{FF2B5EF4-FFF2-40B4-BE49-F238E27FC236}">
-                <a16:creationId xmlns:a16="http://schemas.microsoft.com/office/drawing/2014/main" id="{0CEA71A9-9EE7-4144-8035-9088C0390EDE}"/>
+                <a16:creationId xmlns:a16="http://schemas.microsoft.com/office/drawing/2014/main" id="{9E771994-F286-4E23-9D14-C326256D6FE4}"/>
               </a:ext>
             </a:extLst>
           </p:cNvPr>
@@ -1440,7 +1440,7 @@
           <p:cNvPr id="3" name="text">
             <a:extLst xmlns:a="http://schemas.openxmlformats.org/drawingml/2006/main">
               <a:ext uri="{FF2B5EF4-FFF2-40B4-BE49-F238E27FC236}">
-                <a16:creationId xmlns:a16="http://schemas.microsoft.com/office/drawing/2014/main" id="{500B0FA8-422D-4227-AFB9-4C60A150B07E}"/>
+                <a16:creationId xmlns:a16="http://schemas.microsoft.com/office/drawing/2014/main" id="{6D03BB11-F7B2-42F8-A0FF-81583C789B49}"/>
               </a:ext>
             </a:extLst>
           </p:cNvPr>
@@ -1497,7 +1497,7 @@
           <p:cNvPr id="4" name="text">
             <a:extLst xmlns:a="http://schemas.openxmlformats.org/drawingml/2006/main">
               <a:ext uri="{FF2B5EF4-FFF2-40B4-BE49-F238E27FC236}">
-                <a16:creationId xmlns:a16="http://schemas.microsoft.com/office/drawing/2014/main" id="{0087C10D-A38F-4880-A3ED-0F82759B7224}"/>
+                <a16:creationId xmlns:a16="http://schemas.microsoft.com/office/drawing/2014/main" id="{CC0F9C11-F9EE-4D4E-82B2-185D06967CCB}"/>
               </a:ext>
             </a:extLst>
           </p:cNvPr>
@@ -1555,7 +1555,7 @@
           <p:cNvPr id="5" name="text">
             <a:extLst xmlns:a="http://schemas.openxmlformats.org/drawingml/2006/main">
               <a:ext uri="{FF2B5EF4-FFF2-40B4-BE49-F238E27FC236}">
-                <a16:creationId xmlns:a16="http://schemas.microsoft.com/office/drawing/2014/main" id="{98B08DFA-389F-4151-BD43-8BE7EFBC173E}"/>
+                <a16:creationId xmlns:a16="http://schemas.microsoft.com/office/drawing/2014/main" id="{80FD9982-AD77-4FC4-8763-BA2965CBF027}"/>
               </a:ext>
             </a:extLst>
           </p:cNvPr>
@@ -1612,7 +1612,7 @@
           <p:cNvPr id="6" name="result">
             <a:extLst xmlns:a="http://schemas.openxmlformats.org/drawingml/2006/main">
               <a:ext uri="{FF2B5EF4-FFF2-40B4-BE49-F238E27FC236}">
-                <a16:creationId xmlns:a16="http://schemas.microsoft.com/office/drawing/2014/main" id="{474E6E5D-B218-45DD-9557-DAE147AC332A}"/>
+                <a16:creationId xmlns:a16="http://schemas.microsoft.com/office/drawing/2014/main" id="{F83E2449-A543-466F-975A-CE7C62717EC8}"/>
               </a:ext>
             </a:extLst>
           </p:cNvPr>
@@ -1643,7 +1643,7 @@
           <p:cNvPr id="7" name="text">
             <a:extLst xmlns:a="http://schemas.openxmlformats.org/drawingml/2006/main">
               <a:ext uri="{FF2B5EF4-FFF2-40B4-BE49-F238E27FC236}">
-                <a16:creationId xmlns:a16="http://schemas.microsoft.com/office/drawing/2014/main" id="{D1825393-A97E-4DC3-B9C4-35B409EF5323}"/>
+                <a16:creationId xmlns:a16="http://schemas.microsoft.com/office/drawing/2014/main" id="{6B2DE202-B305-449F-A6C1-1D56EB8D885E}"/>
               </a:ext>
             </a:extLst>
           </p:cNvPr>
@@ -1690,7 +1690,7 @@
                 <a:ea typeface="Malgun Gothic"/>
                 <a:cs typeface="Malgun Gothic"/>
               </a:rPr>
-              <a:t>AI Gateway 0.14.5</a:t>
+              <a:t>AI Gateway 0.14.6</a:t>
             </a:r>
           </a:p>
         </p:txBody>
@@ -1700,7 +1700,7 @@
           <p:cNvPr id="8" name="text">
             <a:extLst xmlns:a="http://schemas.openxmlformats.org/drawingml/2006/main">
               <a:ext uri="{FF2B5EF4-FFF2-40B4-BE49-F238E27FC236}">
-                <a16:creationId xmlns:a16="http://schemas.microsoft.com/office/drawing/2014/main" id="{112A0B7A-86CA-45B6-AB38-BD0F5D051A2A}"/>
+                <a16:creationId xmlns:a16="http://schemas.microsoft.com/office/drawing/2014/main" id="{DF64BD65-CA37-4AE0-BD98-BF01746AF358}"/>
               </a:ext>
             </a:extLst>
           </p:cNvPr>
@@ -1755,7 +1755,7 @@
     </p:spTree>
     <p:extLst>
       <p:ext uri="{BB962C8B-B14F-4D97-AF65-F5344CB8AC3E}">
-        <p14:creationId xmlns:p14="http://schemas.microsoft.com/office/powerpoint/2010/main" val="1166127263"/>
+        <p14:creationId xmlns:p14="http://schemas.microsoft.com/office/powerpoint/2010/main" val="1391034001"/>
       </p:ext>
     </p:extLst>
   </p:cSld>
@@ -1779,7 +1779,7 @@
           <p:cNvPr id="17" name="background">
             <a:extLst xmlns:a="http://schemas.openxmlformats.org/drawingml/2006/main">
               <a:ext uri="{FF2B5EF4-FFF2-40B4-BE49-F238E27FC236}">
-                <a16:creationId xmlns:a16="http://schemas.microsoft.com/office/drawing/2014/main" id="{059DAFFE-53CB-4806-88EE-5DBC87417920}"/>
+                <a16:creationId xmlns:a16="http://schemas.microsoft.com/office/drawing/2014/main" id="{E7025D83-6883-48AC-AE74-3DF4A79D1615}"/>
               </a:ext>
             </a:extLst>
           </p:cNvPr>
@@ -1810,7 +1810,7 @@
           <p:cNvPr id="2" name="text">
             <a:extLst xmlns:a="http://schemas.openxmlformats.org/drawingml/2006/main">
               <a:ext uri="{FF2B5EF4-FFF2-40B4-BE49-F238E27FC236}">
-                <a16:creationId xmlns:a16="http://schemas.microsoft.com/office/drawing/2014/main" id="{28599CE9-B0EA-4DC4-8D39-2F06EFCA6595}"/>
+                <a16:creationId xmlns:a16="http://schemas.microsoft.com/office/drawing/2014/main" id="{A387A7F9-B694-4F06-9D8B-8A91CE3F73DE}"/>
               </a:ext>
             </a:extLst>
           </p:cNvPr>
@@ -1867,7 +1867,7 @@
           <p:cNvPr id="3" name="rule">
             <a:extLst xmlns:a="http://schemas.openxmlformats.org/drawingml/2006/main">
               <a:ext uri="{FF2B5EF4-FFF2-40B4-BE49-F238E27FC236}">
-                <a16:creationId xmlns:a16="http://schemas.microsoft.com/office/drawing/2014/main" id="{C7AF7C4D-5116-43EF-A55E-2F0A9F3E3832}"/>
+                <a16:creationId xmlns:a16="http://schemas.microsoft.com/office/drawing/2014/main" id="{E7DDFE15-36B8-476F-979C-FB5F3A08AFA3}"/>
               </a:ext>
             </a:extLst>
           </p:cNvPr>
@@ -1898,7 +1898,7 @@
           <p:cNvPr id="4" name="page">
             <a:extLst xmlns:a="http://schemas.openxmlformats.org/drawingml/2006/main">
               <a:ext uri="{FF2B5EF4-FFF2-40B4-BE49-F238E27FC236}">
-                <a16:creationId xmlns:a16="http://schemas.microsoft.com/office/drawing/2014/main" id="{594A7167-2449-4B34-BF12-92BEB3F666D4}"/>
+                <a16:creationId xmlns:a16="http://schemas.microsoft.com/office/drawing/2014/main" id="{CEFCBF23-E139-4BA6-A73A-BFF5897AAFD7}"/>
               </a:ext>
             </a:extLst>
           </p:cNvPr>
@@ -1955,7 +1955,7 @@
           <p:cNvPr id="5" name="before">
             <a:extLst xmlns:a="http://schemas.openxmlformats.org/drawingml/2006/main">
               <a:ext uri="{FF2B5EF4-FFF2-40B4-BE49-F238E27FC236}">
-                <a16:creationId xmlns:a16="http://schemas.microsoft.com/office/drawing/2014/main" id="{31ED59C9-A232-41E4-83BD-517DD11A80DE}"/>
+                <a16:creationId xmlns:a16="http://schemas.microsoft.com/office/drawing/2014/main" id="{01032B4A-9D50-4141-9D08-9899593F46C7}"/>
               </a:ext>
             </a:extLst>
           </p:cNvPr>
@@ -1988,7 +1988,7 @@
           <p:cNvPr id="6" name="text">
             <a:extLst xmlns:a="http://schemas.openxmlformats.org/drawingml/2006/main">
               <a:ext uri="{FF2B5EF4-FFF2-40B4-BE49-F238E27FC236}">
-                <a16:creationId xmlns:a16="http://schemas.microsoft.com/office/drawing/2014/main" id="{FF23068C-3FCD-4CB8-9A50-573254D47819}"/>
+                <a16:creationId xmlns:a16="http://schemas.microsoft.com/office/drawing/2014/main" id="{89D0DC74-5646-45EA-ACF4-C14216EE1AFB}"/>
               </a:ext>
             </a:extLst>
           </p:cNvPr>
@@ -2045,7 +2045,7 @@
           <p:cNvPr id="7" name="text">
             <a:extLst xmlns:a="http://schemas.openxmlformats.org/drawingml/2006/main">
               <a:ext uri="{FF2B5EF4-FFF2-40B4-BE49-F238E27FC236}">
-                <a16:creationId xmlns:a16="http://schemas.microsoft.com/office/drawing/2014/main" id="{3053D27A-F96A-41C5-B25E-68C7305AEE4E}"/>
+                <a16:creationId xmlns:a16="http://schemas.microsoft.com/office/drawing/2014/main" id="{2919D984-3536-45E1-805D-4B8A4CD6C6F5}"/>
               </a:ext>
             </a:extLst>
           </p:cNvPr>
@@ -2127,7 +2127,7 @@
           <p:cNvPr id="9" name="ongoing">
             <a:extLst xmlns:a="http://schemas.openxmlformats.org/drawingml/2006/main">
               <a:ext uri="{FF2B5EF4-FFF2-40B4-BE49-F238E27FC236}">
-                <a16:creationId xmlns:a16="http://schemas.microsoft.com/office/drawing/2014/main" id="{53FC607F-9BE4-4272-8004-167B7A9C4FD1}"/>
+                <a16:creationId xmlns:a16="http://schemas.microsoft.com/office/drawing/2014/main" id="{06F70008-B561-46E7-ADC8-AAF46E9B8B1D}"/>
               </a:ext>
             </a:extLst>
           </p:cNvPr>
@@ -2160,7 +2160,7 @@
           <p:cNvPr id="10" name="text">
             <a:extLst xmlns:a="http://schemas.openxmlformats.org/drawingml/2006/main">
               <a:ext uri="{FF2B5EF4-FFF2-40B4-BE49-F238E27FC236}">
-                <a16:creationId xmlns:a16="http://schemas.microsoft.com/office/drawing/2014/main" id="{B0744C8F-038D-4676-ABD4-1F7B6D4B0A8E}"/>
+                <a16:creationId xmlns:a16="http://schemas.microsoft.com/office/drawing/2014/main" id="{E0025848-F0E5-4EF9-B080-812B2CC0A87B}"/>
               </a:ext>
             </a:extLst>
           </p:cNvPr>
@@ -2217,7 +2217,7 @@
           <p:cNvPr id="11" name="text">
             <a:extLst xmlns:a="http://schemas.openxmlformats.org/drawingml/2006/main">
               <a:ext uri="{FF2B5EF4-FFF2-40B4-BE49-F238E27FC236}">
-                <a16:creationId xmlns:a16="http://schemas.microsoft.com/office/drawing/2014/main" id="{47E8400E-F05B-44C5-B481-E421A919F257}"/>
+                <a16:creationId xmlns:a16="http://schemas.microsoft.com/office/drawing/2014/main" id="{34AC3052-2990-4151-BBD0-B0E3357A48A9}"/>
               </a:ext>
             </a:extLst>
           </p:cNvPr>
@@ -2299,7 +2299,7 @@
           <p:cNvPr id="13" name="final">
             <a:extLst xmlns:a="http://schemas.openxmlformats.org/drawingml/2006/main">
               <a:ext uri="{FF2B5EF4-FFF2-40B4-BE49-F238E27FC236}">
-                <a16:creationId xmlns:a16="http://schemas.microsoft.com/office/drawing/2014/main" id="{A412C802-4F30-42FA-B5E9-3FC129B76D1E}"/>
+                <a16:creationId xmlns:a16="http://schemas.microsoft.com/office/drawing/2014/main" id="{867D632A-631B-4876-AE9F-8E12696F48F1}"/>
               </a:ext>
             </a:extLst>
           </p:cNvPr>
@@ -2332,7 +2332,7 @@
           <p:cNvPr id="14" name="text">
             <a:extLst xmlns:a="http://schemas.openxmlformats.org/drawingml/2006/main">
               <a:ext uri="{FF2B5EF4-FFF2-40B4-BE49-F238E27FC236}">
-                <a16:creationId xmlns:a16="http://schemas.microsoft.com/office/drawing/2014/main" id="{8D412DFB-E061-4769-94BD-8006E98BA5AA}"/>
+                <a16:creationId xmlns:a16="http://schemas.microsoft.com/office/drawing/2014/main" id="{59EB9D27-A0EA-48A4-9AF8-830B0206B94B}"/>
               </a:ext>
             </a:extLst>
           </p:cNvPr>
@@ -2389,7 +2389,7 @@
           <p:cNvPr id="15" name="text">
             <a:extLst xmlns:a="http://schemas.openxmlformats.org/drawingml/2006/main">
               <a:ext uri="{FF2B5EF4-FFF2-40B4-BE49-F238E27FC236}">
-                <a16:creationId xmlns:a16="http://schemas.microsoft.com/office/drawing/2014/main" id="{FC4871B6-C6AB-47A8-87F6-4D79C9E16CE7}"/>
+                <a16:creationId xmlns:a16="http://schemas.microsoft.com/office/drawing/2014/main" id="{48649248-49FE-4F63-B73B-0994AA16F3AE}"/>
               </a:ext>
             </a:extLst>
           </p:cNvPr>
@@ -2448,7 +2448,7 @@
           <p:cNvPr id="16" name="text">
             <a:extLst xmlns:a="http://schemas.openxmlformats.org/drawingml/2006/main">
               <a:ext uri="{FF2B5EF4-FFF2-40B4-BE49-F238E27FC236}">
-                <a16:creationId xmlns:a16="http://schemas.microsoft.com/office/drawing/2014/main" id="{2966C663-C66D-4B3F-98AB-3432A78A3B95}"/>
+                <a16:creationId xmlns:a16="http://schemas.microsoft.com/office/drawing/2014/main" id="{4100AAEE-EB05-43BA-AA01-E188BD546575}"/>
               </a:ext>
             </a:extLst>
           </p:cNvPr>
@@ -2503,7 +2503,7 @@
     </p:spTree>
     <p:extLst>
       <p:ext uri="{BB962C8B-B14F-4D97-AF65-F5344CB8AC3E}">
-        <p14:creationId xmlns:p14="http://schemas.microsoft.com/office/powerpoint/2010/main" val="166948314"/>
+        <p14:creationId xmlns:p14="http://schemas.microsoft.com/office/powerpoint/2010/main" val="1595303102"/>
       </p:ext>
     </p:extLst>
   </p:cSld>
@@ -2527,7 +2527,7 @@
           <p:cNvPr id="26" name="background">
             <a:extLst xmlns:a="http://schemas.openxmlformats.org/drawingml/2006/main">
               <a:ext uri="{FF2B5EF4-FFF2-40B4-BE49-F238E27FC236}">
-                <a16:creationId xmlns:a16="http://schemas.microsoft.com/office/drawing/2014/main" id="{E08E1DD9-5788-487A-8087-32B4C8D3F706}"/>
+                <a16:creationId xmlns:a16="http://schemas.microsoft.com/office/drawing/2014/main" id="{CF2EA1DD-5ECA-4D4B-BDB4-03860199CEC1}"/>
               </a:ext>
             </a:extLst>
           </p:cNvPr>
@@ -2558,7 +2558,7 @@
           <p:cNvPr id="2" name="text">
             <a:extLst xmlns:a="http://schemas.openxmlformats.org/drawingml/2006/main">
               <a:ext uri="{FF2B5EF4-FFF2-40B4-BE49-F238E27FC236}">
-                <a16:creationId xmlns:a16="http://schemas.microsoft.com/office/drawing/2014/main" id="{7D151613-B2FA-438A-A922-16C93E1EE3E1}"/>
+                <a16:creationId xmlns:a16="http://schemas.microsoft.com/office/drawing/2014/main" id="{71904170-54CD-4A6A-A54F-7C0EAAB558E1}"/>
               </a:ext>
             </a:extLst>
           </p:cNvPr>
@@ -2615,7 +2615,7 @@
           <p:cNvPr id="3" name="rule">
             <a:extLst xmlns:a="http://schemas.openxmlformats.org/drawingml/2006/main">
               <a:ext uri="{FF2B5EF4-FFF2-40B4-BE49-F238E27FC236}">
-                <a16:creationId xmlns:a16="http://schemas.microsoft.com/office/drawing/2014/main" id="{9D35AA78-F2BB-43F0-B82D-2154AAB97E02}"/>
+                <a16:creationId xmlns:a16="http://schemas.microsoft.com/office/drawing/2014/main" id="{16B48977-0613-4083-985F-719D8C3781DE}"/>
               </a:ext>
             </a:extLst>
           </p:cNvPr>
@@ -2646,7 +2646,7 @@
           <p:cNvPr id="4" name="page">
             <a:extLst xmlns:a="http://schemas.openxmlformats.org/drawingml/2006/main">
               <a:ext uri="{FF2B5EF4-FFF2-40B4-BE49-F238E27FC236}">
-                <a16:creationId xmlns:a16="http://schemas.microsoft.com/office/drawing/2014/main" id="{02E397BE-B865-41D5-A696-92DC9279F25A}"/>
+                <a16:creationId xmlns:a16="http://schemas.microsoft.com/office/drawing/2014/main" id="{3011BA40-FE13-4BB5-B587-90A1C63B02F3}"/>
               </a:ext>
             </a:extLst>
           </p:cNvPr>
@@ -2725,7 +2725,7 @@
           <p:cNvPr id="6" name="flow-0">
             <a:extLst xmlns:a="http://schemas.openxmlformats.org/drawingml/2006/main">
               <a:ext uri="{FF2B5EF4-FFF2-40B4-BE49-F238E27FC236}">
-                <a16:creationId xmlns:a16="http://schemas.microsoft.com/office/drawing/2014/main" id="{0B495B55-DA26-446E-BA0D-4CEFE911A753}"/>
+                <a16:creationId xmlns:a16="http://schemas.microsoft.com/office/drawing/2014/main" id="{EED86E3A-2CE3-42C6-ACC2-7BE13B6333F2}"/>
               </a:ext>
             </a:extLst>
           </p:cNvPr>
@@ -2758,7 +2758,7 @@
           <p:cNvPr id="7" name="text">
             <a:extLst xmlns:a="http://schemas.openxmlformats.org/drawingml/2006/main">
               <a:ext uri="{FF2B5EF4-FFF2-40B4-BE49-F238E27FC236}">
-                <a16:creationId xmlns:a16="http://schemas.microsoft.com/office/drawing/2014/main" id="{E4326F5A-6549-4B9A-83CE-489C9CE5D0AD}"/>
+                <a16:creationId xmlns:a16="http://schemas.microsoft.com/office/drawing/2014/main" id="{07693CBA-7998-466D-9A5B-4FF83E00C732}"/>
               </a:ext>
             </a:extLst>
           </p:cNvPr>
@@ -2815,7 +2815,7 @@
           <p:cNvPr id="8" name="text">
             <a:extLst xmlns:a="http://schemas.openxmlformats.org/drawingml/2006/main">
               <a:ext uri="{FF2B5EF4-FFF2-40B4-BE49-F238E27FC236}">
-                <a16:creationId xmlns:a16="http://schemas.microsoft.com/office/drawing/2014/main" id="{7A70076C-CDDA-4B09-9D4F-21FD187B5F02}"/>
+                <a16:creationId xmlns:a16="http://schemas.microsoft.com/office/drawing/2014/main" id="{BC4F867D-76C6-4840-BB12-C1CEF358393A}"/>
               </a:ext>
             </a:extLst>
           </p:cNvPr>
@@ -2872,7 +2872,7 @@
           <p:cNvPr id="9" name="text">
             <a:extLst xmlns:a="http://schemas.openxmlformats.org/drawingml/2006/main">
               <a:ext uri="{FF2B5EF4-FFF2-40B4-BE49-F238E27FC236}">
-                <a16:creationId xmlns:a16="http://schemas.microsoft.com/office/drawing/2014/main" id="{F8A68BB0-152C-4F08-ADA5-A0542C897A37}"/>
+                <a16:creationId xmlns:a16="http://schemas.microsoft.com/office/drawing/2014/main" id="{62348ED4-E3E7-4EFD-9217-648896A33255}"/>
               </a:ext>
             </a:extLst>
           </p:cNvPr>
@@ -2952,7 +2952,7 @@
           <p:cNvPr id="11" name="flow-1">
             <a:extLst xmlns:a="http://schemas.openxmlformats.org/drawingml/2006/main">
               <a:ext uri="{FF2B5EF4-FFF2-40B4-BE49-F238E27FC236}">
-                <a16:creationId xmlns:a16="http://schemas.microsoft.com/office/drawing/2014/main" id="{17AD9708-9934-4406-8005-211F74504FE2}"/>
+                <a16:creationId xmlns:a16="http://schemas.microsoft.com/office/drawing/2014/main" id="{08330289-421C-44CE-B559-DC5E499544C9}"/>
               </a:ext>
             </a:extLst>
           </p:cNvPr>
@@ -2985,7 +2985,7 @@
           <p:cNvPr id="12" name="text">
             <a:extLst xmlns:a="http://schemas.openxmlformats.org/drawingml/2006/main">
               <a:ext uri="{FF2B5EF4-FFF2-40B4-BE49-F238E27FC236}">
-                <a16:creationId xmlns:a16="http://schemas.microsoft.com/office/drawing/2014/main" id="{01806951-0944-45FD-88CE-775D507B6AF1}"/>
+                <a16:creationId xmlns:a16="http://schemas.microsoft.com/office/drawing/2014/main" id="{71E7FF8A-DF9B-4D1F-98E8-B37E33E21315}"/>
               </a:ext>
             </a:extLst>
           </p:cNvPr>
@@ -3042,7 +3042,7 @@
           <p:cNvPr id="13" name="text">
             <a:extLst xmlns:a="http://schemas.openxmlformats.org/drawingml/2006/main">
               <a:ext uri="{FF2B5EF4-FFF2-40B4-BE49-F238E27FC236}">
-                <a16:creationId xmlns:a16="http://schemas.microsoft.com/office/drawing/2014/main" id="{B4F13A78-9948-4FDB-B701-7B9A78597262}"/>
+                <a16:creationId xmlns:a16="http://schemas.microsoft.com/office/drawing/2014/main" id="{191EBA78-336F-4990-9643-577A3D6620E2}"/>
               </a:ext>
             </a:extLst>
           </p:cNvPr>
@@ -3099,7 +3099,7 @@
           <p:cNvPr id="14" name="text">
             <a:extLst xmlns:a="http://schemas.openxmlformats.org/drawingml/2006/main">
               <a:ext uri="{FF2B5EF4-FFF2-40B4-BE49-F238E27FC236}">
-                <a16:creationId xmlns:a16="http://schemas.microsoft.com/office/drawing/2014/main" id="{745BFD02-EDA3-4547-9EC0-B78CA5C0672C}"/>
+                <a16:creationId xmlns:a16="http://schemas.microsoft.com/office/drawing/2014/main" id="{BA1120F3-2E08-4B69-9A43-16CCD5F7B6DD}"/>
               </a:ext>
             </a:extLst>
           </p:cNvPr>
@@ -3179,7 +3179,7 @@
           <p:cNvPr id="16" name="flow-2">
             <a:extLst xmlns:a="http://schemas.openxmlformats.org/drawingml/2006/main">
               <a:ext uri="{FF2B5EF4-FFF2-40B4-BE49-F238E27FC236}">
-                <a16:creationId xmlns:a16="http://schemas.microsoft.com/office/drawing/2014/main" id="{275B2BC9-8C7E-43B8-8A67-F77E6B94687E}"/>
+                <a16:creationId xmlns:a16="http://schemas.microsoft.com/office/drawing/2014/main" id="{BC46735C-3E92-4C3A-910A-904385C1FF49}"/>
               </a:ext>
             </a:extLst>
           </p:cNvPr>
@@ -3212,7 +3212,7 @@
           <p:cNvPr id="17" name="text">
             <a:extLst xmlns:a="http://schemas.openxmlformats.org/drawingml/2006/main">
               <a:ext uri="{FF2B5EF4-FFF2-40B4-BE49-F238E27FC236}">
-                <a16:creationId xmlns:a16="http://schemas.microsoft.com/office/drawing/2014/main" id="{E5D55631-917A-49D3-8372-616744198562}"/>
+                <a16:creationId xmlns:a16="http://schemas.microsoft.com/office/drawing/2014/main" id="{91DB12A8-99EC-49C7-857D-23F5D9848A37}"/>
               </a:ext>
             </a:extLst>
           </p:cNvPr>
@@ -3269,7 +3269,7 @@
           <p:cNvPr id="18" name="text">
             <a:extLst xmlns:a="http://schemas.openxmlformats.org/drawingml/2006/main">
               <a:ext uri="{FF2B5EF4-FFF2-40B4-BE49-F238E27FC236}">
-                <a16:creationId xmlns:a16="http://schemas.microsoft.com/office/drawing/2014/main" id="{C74A23FF-6D0B-49E2-8C49-124D8306E5DD}"/>
+                <a16:creationId xmlns:a16="http://schemas.microsoft.com/office/drawing/2014/main" id="{5EBA48FF-E706-4CA5-9A08-EF4CABF9B859}"/>
               </a:ext>
             </a:extLst>
           </p:cNvPr>
@@ -3326,7 +3326,7 @@
           <p:cNvPr id="19" name="text">
             <a:extLst xmlns:a="http://schemas.openxmlformats.org/drawingml/2006/main">
               <a:ext uri="{FF2B5EF4-FFF2-40B4-BE49-F238E27FC236}">
-                <a16:creationId xmlns:a16="http://schemas.microsoft.com/office/drawing/2014/main" id="{AFFBEADD-005C-4306-8F7E-E3C47E2696EE}"/>
+                <a16:creationId xmlns:a16="http://schemas.microsoft.com/office/drawing/2014/main" id="{42FB9CF5-868C-402A-BF03-7AD966A5E08E}"/>
               </a:ext>
             </a:extLst>
           </p:cNvPr>
@@ -3384,7 +3384,7 @@
           <p:cNvPr id="20" name="flow-3">
             <a:extLst xmlns:a="http://schemas.openxmlformats.org/drawingml/2006/main">
               <a:ext uri="{FF2B5EF4-FFF2-40B4-BE49-F238E27FC236}">
-                <a16:creationId xmlns:a16="http://schemas.microsoft.com/office/drawing/2014/main" id="{A840C3AB-9414-4D77-AD1D-B26B37E42F16}"/>
+                <a16:creationId xmlns:a16="http://schemas.microsoft.com/office/drawing/2014/main" id="{A3147EE5-8658-40A1-8EAC-D5987EA2621B}"/>
               </a:ext>
             </a:extLst>
           </p:cNvPr>
@@ -3417,7 +3417,7 @@
           <p:cNvPr id="21" name="text">
             <a:extLst xmlns:a="http://schemas.openxmlformats.org/drawingml/2006/main">
               <a:ext uri="{FF2B5EF4-FFF2-40B4-BE49-F238E27FC236}">
-                <a16:creationId xmlns:a16="http://schemas.microsoft.com/office/drawing/2014/main" id="{D9B87075-F5E4-440D-998F-8C0AA8EC3965}"/>
+                <a16:creationId xmlns:a16="http://schemas.microsoft.com/office/drawing/2014/main" id="{802348F6-C53E-447B-B58C-6B141B0BB311}"/>
               </a:ext>
             </a:extLst>
           </p:cNvPr>
@@ -3474,7 +3474,7 @@
           <p:cNvPr id="22" name="text">
             <a:extLst xmlns:a="http://schemas.openxmlformats.org/drawingml/2006/main">
               <a:ext uri="{FF2B5EF4-FFF2-40B4-BE49-F238E27FC236}">
-                <a16:creationId xmlns:a16="http://schemas.microsoft.com/office/drawing/2014/main" id="{B643B084-21F7-410C-A369-3E61A65E135D}"/>
+                <a16:creationId xmlns:a16="http://schemas.microsoft.com/office/drawing/2014/main" id="{0C27B961-D466-4B0D-A6D4-2459F002FC84}"/>
               </a:ext>
             </a:extLst>
           </p:cNvPr>
@@ -3531,7 +3531,7 @@
           <p:cNvPr id="23" name="text">
             <a:extLst xmlns:a="http://schemas.openxmlformats.org/drawingml/2006/main">
               <a:ext uri="{FF2B5EF4-FFF2-40B4-BE49-F238E27FC236}">
-                <a16:creationId xmlns:a16="http://schemas.microsoft.com/office/drawing/2014/main" id="{8FC9BF0D-5121-4489-AF03-66A44ADC2B1E}"/>
+                <a16:creationId xmlns:a16="http://schemas.microsoft.com/office/drawing/2014/main" id="{B24D9A5E-B0F9-48D9-B58C-D9E6AB2EBC66}"/>
               </a:ext>
             </a:extLst>
           </p:cNvPr>
@@ -3589,7 +3589,7 @@
           <p:cNvPr id="24" name="chat">
             <a:extLst xmlns:a="http://schemas.openxmlformats.org/drawingml/2006/main">
               <a:ext uri="{FF2B5EF4-FFF2-40B4-BE49-F238E27FC236}">
-                <a16:creationId xmlns:a16="http://schemas.microsoft.com/office/drawing/2014/main" id="{A7ED1F10-079B-4386-B080-56BA7464FEEF}"/>
+                <a16:creationId xmlns:a16="http://schemas.microsoft.com/office/drawing/2014/main" id="{B6B637CC-B6E4-4539-B5F4-B4E79FB54722}"/>
               </a:ext>
             </a:extLst>
           </p:cNvPr>
@@ -3620,7 +3620,7 @@
           <p:cNvPr id="25" name="text">
             <a:extLst xmlns:a="http://schemas.openxmlformats.org/drawingml/2006/main">
               <a:ext uri="{FF2B5EF4-FFF2-40B4-BE49-F238E27FC236}">
-                <a16:creationId xmlns:a16="http://schemas.microsoft.com/office/drawing/2014/main" id="{3071592F-4741-41B8-A9D7-DCE0F8C7F946}"/>
+                <a16:creationId xmlns:a16="http://schemas.microsoft.com/office/drawing/2014/main" id="{B9AC020F-5EDF-44EF-A409-C7446ACE6F88}"/>
               </a:ext>
             </a:extLst>
           </p:cNvPr>
@@ -3675,7 +3675,7 @@
     </p:spTree>
     <p:extLst>
       <p:ext uri="{BB962C8B-B14F-4D97-AF65-F5344CB8AC3E}">
-        <p14:creationId xmlns:p14="http://schemas.microsoft.com/office/powerpoint/2010/main" val="1626646104"/>
+        <p14:creationId xmlns:p14="http://schemas.microsoft.com/office/powerpoint/2010/main" val="2027845609"/>
       </p:ext>
     </p:extLst>
   </p:cSld>
@@ -3699,7 +3699,7 @@
           <p:cNvPr id="21" name="background">
             <a:extLst xmlns:a="http://schemas.openxmlformats.org/drawingml/2006/main">
               <a:ext uri="{FF2B5EF4-FFF2-40B4-BE49-F238E27FC236}">
-                <a16:creationId xmlns:a16="http://schemas.microsoft.com/office/drawing/2014/main" id="{F88C17C4-2591-463F-8BB2-C3E3FD473726}"/>
+                <a16:creationId xmlns:a16="http://schemas.microsoft.com/office/drawing/2014/main" id="{174DC261-44CD-4322-9CFB-D96602CFF687}"/>
               </a:ext>
             </a:extLst>
           </p:cNvPr>
@@ -3730,7 +3730,7 @@
           <p:cNvPr id="2" name="text">
             <a:extLst xmlns:a="http://schemas.openxmlformats.org/drawingml/2006/main">
               <a:ext uri="{FF2B5EF4-FFF2-40B4-BE49-F238E27FC236}">
-                <a16:creationId xmlns:a16="http://schemas.microsoft.com/office/drawing/2014/main" id="{D4C44A32-C6D9-4214-B0BF-3FED098177BF}"/>
+                <a16:creationId xmlns:a16="http://schemas.microsoft.com/office/drawing/2014/main" id="{CDA8C2BF-E80C-448E-9960-7035DF90854A}"/>
               </a:ext>
             </a:extLst>
           </p:cNvPr>
@@ -3777,7 +3777,7 @@
                 <a:ea typeface="Malgun Gothic"/>
                 <a:cs typeface="Malgun Gothic"/>
               </a:rPr>
-              <a:t>Discussion #167의 4,000자 입력 오류를 복구했습니다</a:t>
+              <a:t>일반 질의 4,000자와 KB 종합 16,000자를 분리했습니다</a:t>
             </a:r>
           </a:p>
         </p:txBody>
@@ -3787,7 +3787,7 @@
           <p:cNvPr id="3" name="rule">
             <a:extLst xmlns:a="http://schemas.openxmlformats.org/drawingml/2006/main">
               <a:ext uri="{FF2B5EF4-FFF2-40B4-BE49-F238E27FC236}">
-                <a16:creationId xmlns:a16="http://schemas.microsoft.com/office/drawing/2014/main" id="{E6C53D10-A550-483F-BA64-6011AA9EEAFA}"/>
+                <a16:creationId xmlns:a16="http://schemas.microsoft.com/office/drawing/2014/main" id="{2FD58018-6C73-437E-A1DC-B94DD2D8BA62}"/>
               </a:ext>
             </a:extLst>
           </p:cNvPr>
@@ -3818,7 +3818,7 @@
           <p:cNvPr id="4" name="page">
             <a:extLst xmlns:a="http://schemas.openxmlformats.org/drawingml/2006/main">
               <a:ext uri="{FF2B5EF4-FFF2-40B4-BE49-F238E27FC236}">
-                <a16:creationId xmlns:a16="http://schemas.microsoft.com/office/drawing/2014/main" id="{B3A44364-CC73-415A-A371-DDD3A893955E}"/>
+                <a16:creationId xmlns:a16="http://schemas.microsoft.com/office/drawing/2014/main" id="{D3421A0A-842A-447B-8527-FFAAB20BFC3F}"/>
               </a:ext>
             </a:extLst>
           </p:cNvPr>
@@ -3875,7 +3875,7 @@
           <p:cNvPr id="5" name="text">
             <a:extLst xmlns:a="http://schemas.openxmlformats.org/drawingml/2006/main">
               <a:ext uri="{FF2B5EF4-FFF2-40B4-BE49-F238E27FC236}">
-                <a16:creationId xmlns:a16="http://schemas.microsoft.com/office/drawing/2014/main" id="{05A9E360-5B5B-436D-8010-96EC4B341164}"/>
+                <a16:creationId xmlns:a16="http://schemas.microsoft.com/office/drawing/2014/main" id="{A3D70DED-0E23-413E-AFE6-B366D933A1F6}"/>
               </a:ext>
             </a:extLst>
           </p:cNvPr>
@@ -3932,7 +3932,7 @@
           <p:cNvPr id="6" name="text">
             <a:extLst xmlns:a="http://schemas.openxmlformats.org/drawingml/2006/main">
               <a:ext uri="{FF2B5EF4-FFF2-40B4-BE49-F238E27FC236}">
-                <a16:creationId xmlns:a16="http://schemas.microsoft.com/office/drawing/2014/main" id="{54787956-DD67-4CF9-8237-387105F19507}"/>
+                <a16:creationId xmlns:a16="http://schemas.microsoft.com/office/drawing/2014/main" id="{94378448-6240-4151-9BCD-2C0EC3466646}"/>
               </a:ext>
             </a:extLst>
           </p:cNvPr>
@@ -3979,7 +3979,7 @@
                 <a:ea typeface="Malgun Gothic"/>
                 <a:cs typeface="Malgun Gothic"/>
               </a:rPr>
-              <a:t>Post #382</a:t>
+              <a:t>Post #383 선택</a:t>
             </a:r>
           </a:p>
         </p:txBody>
@@ -3989,7 +3989,7 @@
           <p:cNvPr id="7" name="text">
             <a:extLst xmlns:a="http://schemas.openxmlformats.org/drawingml/2006/main">
               <a:ext uri="{FF2B5EF4-FFF2-40B4-BE49-F238E27FC236}">
-                <a16:creationId xmlns:a16="http://schemas.microsoft.com/office/drawing/2014/main" id="{2E0DCAE6-C4E2-45C5-8E23-FE7780A0C0CD}"/>
+                <a16:creationId xmlns:a16="http://schemas.microsoft.com/office/drawing/2014/main" id="{AD7C4992-547E-4773-8E2B-31CFCD64CE9D}"/>
               </a:ext>
             </a:extLst>
           </p:cNvPr>
@@ -4036,7 +4036,7 @@
                 <a:ea typeface="Malgun Gothic"/>
                 <a:cs typeface="Malgun Gothic"/>
               </a:rPr>
-              <a:t>누적 대화 4,000자
+              <a:t>KB 입력 4,678자
 Activepieces HTTP 500</a:t>
             </a:r>
           </a:p>
@@ -4047,7 +4047,7 @@
           <p:cNvPr id="8" name="divider-1">
             <a:extLst xmlns:a="http://schemas.openxmlformats.org/drawingml/2006/main">
               <a:ext uri="{FF2B5EF4-FFF2-40B4-BE49-F238E27FC236}">
-                <a16:creationId xmlns:a16="http://schemas.microsoft.com/office/drawing/2014/main" id="{F349A14F-C1BA-45FB-9143-40EF4C7C1C5A}"/>
+                <a16:creationId xmlns:a16="http://schemas.microsoft.com/office/drawing/2014/main" id="{DEB337B3-C034-4CE7-BD08-98005A1E9EE0}"/>
               </a:ext>
             </a:extLst>
           </p:cNvPr>
@@ -4078,7 +4078,7 @@
           <p:cNvPr id="9" name="text">
             <a:extLst xmlns:a="http://schemas.openxmlformats.org/drawingml/2006/main">
               <a:ext uri="{FF2B5EF4-FFF2-40B4-BE49-F238E27FC236}">
-                <a16:creationId xmlns:a16="http://schemas.microsoft.com/office/drawing/2014/main" id="{2E0F96E8-9787-4A64-9D09-836452916DED}"/>
+                <a16:creationId xmlns:a16="http://schemas.microsoft.com/office/drawing/2014/main" id="{DE48D8EB-FCBC-46AC-AA9B-C9C2FE6AF966}"/>
               </a:ext>
             </a:extLst>
           </p:cNvPr>
@@ -4135,7 +4135,7 @@
           <p:cNvPr id="10" name="text">
             <a:extLst xmlns:a="http://schemas.openxmlformats.org/drawingml/2006/main">
               <a:ext uri="{FF2B5EF4-FFF2-40B4-BE49-F238E27FC236}">
-                <a16:creationId xmlns:a16="http://schemas.microsoft.com/office/drawing/2014/main" id="{E7D3146D-3AD7-41F9-B398-D6EF4E078F27}"/>
+                <a16:creationId xmlns:a16="http://schemas.microsoft.com/office/drawing/2014/main" id="{CFE23E6D-C9E1-4840-936A-E7B73E1491E7}"/>
               </a:ext>
             </a:extLst>
           </p:cNvPr>
@@ -4192,7 +4192,7 @@
           <p:cNvPr id="11" name="text">
             <a:extLst xmlns:a="http://schemas.openxmlformats.org/drawingml/2006/main">
               <a:ext uri="{FF2B5EF4-FFF2-40B4-BE49-F238E27FC236}">
-                <a16:creationId xmlns:a16="http://schemas.microsoft.com/office/drawing/2014/main" id="{6DA16AF6-9BCD-4412-8592-D4D60E5843E1}"/>
+                <a16:creationId xmlns:a16="http://schemas.microsoft.com/office/drawing/2014/main" id="{0D43B9F7-4642-4638-957F-7830B5C3A492}"/>
               </a:ext>
             </a:extLst>
           </p:cNvPr>
@@ -4239,8 +4239,8 @@
                 <a:ea typeface="Malgun Gothic"/>
                 <a:cs typeface="Malgun Gothic"/>
               </a:rPr>
-              <a:t>검색 키워드와
-재작성 지침을 뒤에 추가</a:t>
+              <a:t>외부 질문용 4,000자
+계약을 KB에도 재사용</a:t>
             </a:r>
           </a:p>
         </p:txBody>
@@ -4250,7 +4250,7 @@
           <p:cNvPr id="12" name="divider-2">
             <a:extLst xmlns:a="http://schemas.openxmlformats.org/drawingml/2006/main">
               <a:ext uri="{FF2B5EF4-FFF2-40B4-BE49-F238E27FC236}">
-                <a16:creationId xmlns:a16="http://schemas.microsoft.com/office/drawing/2014/main" id="{248DFBE1-FB03-4A70-8F2C-7548F7D33DDC}"/>
+                <a16:creationId xmlns:a16="http://schemas.microsoft.com/office/drawing/2014/main" id="{34BA6303-14FA-41DA-95A0-5ACD584F3E00}"/>
               </a:ext>
             </a:extLst>
           </p:cNvPr>
@@ -4281,7 +4281,7 @@
           <p:cNvPr id="13" name="text">
             <a:extLst xmlns:a="http://schemas.openxmlformats.org/drawingml/2006/main">
               <a:ext uri="{FF2B5EF4-FFF2-40B4-BE49-F238E27FC236}">
-                <a16:creationId xmlns:a16="http://schemas.microsoft.com/office/drawing/2014/main" id="{D98D6E1E-33CD-4E63-BA79-6F3D9E2FF4A0}"/>
+                <a16:creationId xmlns:a16="http://schemas.microsoft.com/office/drawing/2014/main" id="{5ED21BB8-C924-4986-AB0B-D8730F39D1AF}"/>
               </a:ext>
             </a:extLst>
           </p:cNvPr>
@@ -4338,7 +4338,7 @@
           <p:cNvPr id="14" name="text">
             <a:extLst xmlns:a="http://schemas.openxmlformats.org/drawingml/2006/main">
               <a:ext uri="{FF2B5EF4-FFF2-40B4-BE49-F238E27FC236}">
-                <a16:creationId xmlns:a16="http://schemas.microsoft.com/office/drawing/2014/main" id="{8C25AC1D-82C1-4F40-BA05-4E5F4AC016E1}"/>
+                <a16:creationId xmlns:a16="http://schemas.microsoft.com/office/drawing/2014/main" id="{2D5608FF-4043-4C26-9152-93DEE2E6DF39}"/>
               </a:ext>
             </a:extLst>
           </p:cNvPr>
@@ -4385,7 +4385,7 @@
                 <a:ea typeface="Malgun Gothic"/>
                 <a:cs typeface="Malgun Gothic"/>
               </a:rPr>
-              <a:t>공간 선예약</a:t>
+              <a:t>계약 분리</a:t>
             </a:r>
           </a:p>
         </p:txBody>
@@ -4395,7 +4395,7 @@
           <p:cNvPr id="15" name="text">
             <a:extLst xmlns:a="http://schemas.openxmlformats.org/drawingml/2006/main">
               <a:ext uri="{FF2B5EF4-FFF2-40B4-BE49-F238E27FC236}">
-                <a16:creationId xmlns:a16="http://schemas.microsoft.com/office/drawing/2014/main" id="{F39BAF28-207D-4808-B697-2376DE08706E}"/>
+                <a16:creationId xmlns:a16="http://schemas.microsoft.com/office/drawing/2014/main" id="{118EF134-3C1B-4F66-A24F-64518B5A4872}"/>
               </a:ext>
             </a:extLst>
           </p:cNvPr>
@@ -4442,9 +4442,9 @@
                 <a:ea typeface="Malgun Gothic"/>
                 <a:cs typeface="Malgun Gothic"/>
               </a:rPr>
-              <a:t>부가 지침 길이를 빼고
-대화 본문을 4,000자
-안에 맞춤</a:t>
+              <a:t>일반 질의 4,000자
+내부 KB 16,000자
+선택 답변 우선 보존</a:t>
             </a:r>
           </a:p>
         </p:txBody>
@@ -4454,7 +4454,7 @@
           <p:cNvPr id="16" name="divider-3">
             <a:extLst xmlns:a="http://schemas.openxmlformats.org/drawingml/2006/main">
               <a:ext uri="{FF2B5EF4-FFF2-40B4-BE49-F238E27FC236}">
-                <a16:creationId xmlns:a16="http://schemas.microsoft.com/office/drawing/2014/main" id="{0B8DE827-49D1-44D6-8521-4C8A390571F3}"/>
+                <a16:creationId xmlns:a16="http://schemas.microsoft.com/office/drawing/2014/main" id="{3713330F-F466-4C87-80E7-DCB5EC03A5DE}"/>
               </a:ext>
             </a:extLst>
           </p:cNvPr>
@@ -4485,7 +4485,7 @@
           <p:cNvPr id="17" name="text">
             <a:extLst xmlns:a="http://schemas.openxmlformats.org/drawingml/2006/main">
               <a:ext uri="{FF2B5EF4-FFF2-40B4-BE49-F238E27FC236}">
-                <a16:creationId xmlns:a16="http://schemas.microsoft.com/office/drawing/2014/main" id="{E0998317-2579-4A90-A03A-E3F26A1369F2}"/>
+                <a16:creationId xmlns:a16="http://schemas.microsoft.com/office/drawing/2014/main" id="{1845AB72-AB56-48C5-B0C9-7F7FECEEF720}"/>
               </a:ext>
             </a:extLst>
           </p:cNvPr>
@@ -4532,7 +4532,7 @@
                 <a:ea typeface="Malgun Gothic"/>
                 <a:cs typeface="Malgun Gothic"/>
               </a:rPr>
-              <a:t>#383</a:t>
+              <a:t>#384</a:t>
             </a:r>
           </a:p>
         </p:txBody>
@@ -4542,7 +4542,7 @@
           <p:cNvPr id="18" name="text">
             <a:extLst xmlns:a="http://schemas.openxmlformats.org/drawingml/2006/main">
               <a:ext uri="{FF2B5EF4-FFF2-40B4-BE49-F238E27FC236}">
-                <a16:creationId xmlns:a16="http://schemas.microsoft.com/office/drawing/2014/main" id="{417DEBCD-A02D-432C-A2BE-C6F0C65B2936}"/>
+                <a16:creationId xmlns:a16="http://schemas.microsoft.com/office/drawing/2014/main" id="{160620D2-E61D-4244-AF44-611A0BD5ED84}"/>
               </a:ext>
             </a:extLst>
           </p:cNvPr>
@@ -4599,7 +4599,7 @@
           <p:cNvPr id="19" name="text">
             <a:extLst xmlns:a="http://schemas.openxmlformats.org/drawingml/2006/main">
               <a:ext uri="{FF2B5EF4-FFF2-40B4-BE49-F238E27FC236}">
-                <a16:creationId xmlns:a16="http://schemas.microsoft.com/office/drawing/2014/main" id="{40A0D582-6EE8-47FF-89D3-42FEDD2B0A33}"/>
+                <a16:creationId xmlns:a16="http://schemas.microsoft.com/office/drawing/2014/main" id="{E3421EF5-B77F-4E68-BFD2-A78BF368339F}"/>
               </a:ext>
             </a:extLst>
           </p:cNvPr>
@@ -4646,7 +4646,7 @@
                 <a:ea typeface="Malgun Gothic"/>
                 <a:cs typeface="Malgun Gothic"/>
               </a:rPr>
-              <a:t>227</a:t>
+              <a:t>231</a:t>
             </a:r>
           </a:p>
         </p:txBody>
@@ -4656,7 +4656,7 @@
           <p:cNvPr id="20" name="text">
             <a:extLst xmlns:a="http://schemas.openxmlformats.org/drawingml/2006/main">
               <a:ext uri="{FF2B5EF4-FFF2-40B4-BE49-F238E27FC236}">
-                <a16:creationId xmlns:a16="http://schemas.microsoft.com/office/drawing/2014/main" id="{5248F462-C089-41A7-A8A1-77C7D443819A}"/>
+                <a16:creationId xmlns:a16="http://schemas.microsoft.com/office/drawing/2014/main" id="{7E41A266-26EC-4CCD-90D8-768E6FA15726}"/>
               </a:ext>
             </a:extLst>
           </p:cNvPr>
@@ -4711,7 +4711,7 @@
     </p:spTree>
     <p:extLst>
       <p:ext uri="{BB962C8B-B14F-4D97-AF65-F5344CB8AC3E}">
-        <p14:creationId xmlns:p14="http://schemas.microsoft.com/office/powerpoint/2010/main" val="1161314903"/>
+        <p14:creationId xmlns:p14="http://schemas.microsoft.com/office/powerpoint/2010/main" val="2016018878"/>
       </p:ext>
     </p:extLst>
   </p:cSld>
@@ -4735,7 +4735,7 @@
           <p:cNvPr id="10" name="background">
             <a:extLst xmlns:a="http://schemas.openxmlformats.org/drawingml/2006/main">
               <a:ext uri="{FF2B5EF4-FFF2-40B4-BE49-F238E27FC236}">
-                <a16:creationId xmlns:a16="http://schemas.microsoft.com/office/drawing/2014/main" id="{FA263E87-C2EF-4CC8-82D3-B8A543E3A1DF}"/>
+                <a16:creationId xmlns:a16="http://schemas.microsoft.com/office/drawing/2014/main" id="{68AF94A9-BA01-44B0-9C45-8A8C2A96B048}"/>
               </a:ext>
             </a:extLst>
           </p:cNvPr>
@@ -4766,7 +4766,7 @@
           <p:cNvPr id="2" name="closing">
             <a:extLst xmlns:a="http://schemas.openxmlformats.org/drawingml/2006/main">
               <a:ext uri="{FF2B5EF4-FFF2-40B4-BE49-F238E27FC236}">
-                <a16:creationId xmlns:a16="http://schemas.microsoft.com/office/drawing/2014/main" id="{7FFAA82A-40B5-42E8-88AE-ACB7A765F98C}"/>
+                <a16:creationId xmlns:a16="http://schemas.microsoft.com/office/drawing/2014/main" id="{E9ABEDC6-9DE5-404A-9D51-E917DAFEE293}"/>
               </a:ext>
             </a:extLst>
           </p:cNvPr>
@@ -4797,7 +4797,7 @@
           <p:cNvPr id="3" name="text">
             <a:extLst xmlns:a="http://schemas.openxmlformats.org/drawingml/2006/main">
               <a:ext uri="{FF2B5EF4-FFF2-40B4-BE49-F238E27FC236}">
-                <a16:creationId xmlns:a16="http://schemas.microsoft.com/office/drawing/2014/main" id="{D786087E-2563-4EB1-99ED-C57719A2D3A4}"/>
+                <a16:creationId xmlns:a16="http://schemas.microsoft.com/office/drawing/2014/main" id="{C4DD38C3-AA0F-4962-9D04-D130E61C96A4}"/>
               </a:ext>
             </a:extLst>
           </p:cNvPr>
@@ -4854,7 +4854,7 @@
           <p:cNvPr id="4" name="text">
             <a:extLst xmlns:a="http://schemas.openxmlformats.org/drawingml/2006/main">
               <a:ext uri="{FF2B5EF4-FFF2-40B4-BE49-F238E27FC236}">
-                <a16:creationId xmlns:a16="http://schemas.microsoft.com/office/drawing/2014/main" id="{650D866B-2212-4881-9319-7AD00A2AC95E}"/>
+                <a16:creationId xmlns:a16="http://schemas.microsoft.com/office/drawing/2014/main" id="{2393F05B-DEF4-4D32-947F-31D23F3DA350}"/>
               </a:ext>
             </a:extLst>
           </p:cNvPr>
@@ -4912,7 +4912,7 @@
           <p:cNvPr id="5" name="left-rule">
             <a:extLst xmlns:a="http://schemas.openxmlformats.org/drawingml/2006/main">
               <a:ext uri="{FF2B5EF4-FFF2-40B4-BE49-F238E27FC236}">
-                <a16:creationId xmlns:a16="http://schemas.microsoft.com/office/drawing/2014/main" id="{8F34661E-9BAA-4641-B5A3-082AF3C94127}"/>
+                <a16:creationId xmlns:a16="http://schemas.microsoft.com/office/drawing/2014/main" id="{B93726C4-37DE-4761-B6AB-3CD5A7B030C2}"/>
               </a:ext>
             </a:extLst>
           </p:cNvPr>
@@ -4943,7 +4943,7 @@
           <p:cNvPr id="6" name="text">
             <a:extLst xmlns:a="http://schemas.openxmlformats.org/drawingml/2006/main">
               <a:ext uri="{FF2B5EF4-FFF2-40B4-BE49-F238E27FC236}">
-                <a16:creationId xmlns:a16="http://schemas.microsoft.com/office/drawing/2014/main" id="{4AFBF89B-D375-4AA5-8558-2F1C3A2E460D}"/>
+                <a16:creationId xmlns:a16="http://schemas.microsoft.com/office/drawing/2014/main" id="{396B21C8-1C16-473F-97B2-E58689C230C6}"/>
               </a:ext>
             </a:extLst>
           </p:cNvPr>
@@ -4990,7 +4990,7 @@
                 <a:ea typeface="Malgun Gothic"/>
                 <a:cs typeface="Malgun Gothic"/>
               </a:rPr>
-              <a:t>AI Gateway 0.14.5 · OpenAI · 긴 대화 입력 상한 보호</a:t>
+              <a:t>AI Gateway 0.14.6 · OpenAI · 본문과 첨부 제한 분리</a:t>
             </a:r>
           </a:p>
         </p:txBody>
@@ -5000,7 +5000,7 @@
           <p:cNvPr id="7" name="text">
             <a:extLst xmlns:a="http://schemas.openxmlformats.org/drawingml/2006/main">
               <a:ext uri="{FF2B5EF4-FFF2-40B4-BE49-F238E27FC236}">
-                <a16:creationId xmlns:a16="http://schemas.microsoft.com/office/drawing/2014/main" id="{37AD21C3-4599-477A-8065-0AEC0CF67D78}"/>
+                <a16:creationId xmlns:a16="http://schemas.microsoft.com/office/drawing/2014/main" id="{70BF68F8-97E4-428A-938D-0543099578B3}"/>
               </a:ext>
             </a:extLst>
           </p:cNvPr>
@@ -5047,7 +5047,7 @@
                 <a:ea typeface="Malgun Gothic"/>
                 <a:cs typeface="Malgun Gothic"/>
               </a:rPr>
-              <a:t>Process · Database · Vector ready</a:t>
+              <a:t>공개 적용 버전: ABLESTACK Diplo · Preview 평가는 내부 전용</a:t>
             </a:r>
           </a:p>
         </p:txBody>
@@ -5057,7 +5057,7 @@
           <p:cNvPr id="8" name="text">
             <a:extLst xmlns:a="http://schemas.openxmlformats.org/drawingml/2006/main">
               <a:ext uri="{FF2B5EF4-FFF2-40B4-BE49-F238E27FC236}">
-                <a16:creationId xmlns:a16="http://schemas.microsoft.com/office/drawing/2014/main" id="{E9760DFA-A05E-4072-ABA0-A5FA45555F9F}"/>
+                <a16:creationId xmlns:a16="http://schemas.microsoft.com/office/drawing/2014/main" id="{EA33FB5D-8E4B-486C-A77C-4425DD279CCB}"/>
               </a:ext>
             </a:extLst>
           </p:cNvPr>
@@ -5104,7 +5104,7 @@
                 <a:ea typeface="Malgun Gothic"/>
                 <a:cs typeface="Malgun Gothic"/>
               </a:rPr>
-              <a:t>전체 DB 백업 · 루트 여유 921 GB · 보호 서비스 무변경</a:t>
+              <a:t>231 tests · Process · Database · Vector ready · 보호 서비스 무변경</a:t>
             </a:r>
           </a:p>
         </p:txBody>
@@ -5114,7 +5114,7 @@
           <p:cNvPr id="9" name="text">
             <a:extLst xmlns:a="http://schemas.openxmlformats.org/drawingml/2006/main">
               <a:ext uri="{FF2B5EF4-FFF2-40B4-BE49-F238E27FC236}">
-                <a16:creationId xmlns:a16="http://schemas.microsoft.com/office/drawing/2014/main" id="{8DDFBFB7-A190-42E0-AE6B-7EB738B01B4B}"/>
+                <a16:creationId xmlns:a16="http://schemas.microsoft.com/office/drawing/2014/main" id="{6BE24316-A711-41EE-9083-8CD29B7EED7D}"/>
               </a:ext>
             </a:extLst>
           </p:cNvPr>
@@ -5169,7 +5169,7 @@
     </p:spTree>
     <p:extLst>
       <p:ext uri="{BB962C8B-B14F-4D97-AF65-F5344CB8AC3E}">
-        <p14:creationId xmlns:p14="http://schemas.microsoft.com/office/powerpoint/2010/main" val="536863604"/>
+        <p14:creationId xmlns:p14="http://schemas.microsoft.com/office/powerpoint/2010/main" val="722030679"/>
       </p:ext>
     </p:extLst>
   </p:cSld>
